--- a/docs/pitch/組長簡報-產品資安與簽辦-2026-08-12.pptx
+++ b/docs/pitch/組長簡報-產品資安與簽辦-2026-08-12.pptx
@@ -526,7 +526,7 @@
           <a:p>
             <a:r>
               <a:rPr lang="en-US" dirty="0"/>
-              <a:t>開場：今天講功能、資安、簽辦。最後一頁只剩兩件事要請組長決定——驗收時點，以及引薦計網中心。</a:t>
+              <a:t>這是寄給組長自己看的文件,不是簡報稿。語氣一律供參,不催決定。</a:t>
             </a:r>
             <a:endParaRPr lang="en-US" dirty="0"/>
           </a:p>
@@ -1318,7 +1318,7 @@
           <a:p>
             <a:r>
               <a:rPr lang="en-US" dirty="0"/>
-              <a:t>這一段才是今天的目的。</a:t>
+              <a:t>這一段不要用催的口氣講。</a:t>
             </a:r>
             <a:endParaRPr lang="en-US" dirty="0"/>
           </a:p>
@@ -1406,7 +1406,7 @@
           <a:p>
             <a:r>
               <a:rPr lang="en-US" dirty="0"/>
-              <a:t/>
+              <a:t>這是這份文件的核心一頁。他還在想怎麼合作，給他一個零成本的第一步。</a:t>
             </a:r>
             <a:endParaRPr lang="en-US" dirty="0"/>
           </a:p>
@@ -1582,7 +1582,7 @@
           <a:p>
             <a:r>
               <a:rPr lang="en-US" dirty="0"/>
-              <a:t>這頁請組長當場選。若他猶豫，建議乙；若他要保守，丙也完全接受——不要爭。履約期間建議一年，自服務開通日起算。</a:t>
+              <a:t/>
             </a:r>
             <a:endParaRPr lang="en-US" dirty="0"/>
           </a:p>
@@ -1670,7 +1670,7 @@
           <a:p>
             <a:r>
               <a:rPr lang="en-US" dirty="0"/>
-              <a:t>可用率 99% 與四小時回應是會被寫進契約的義務——講之前先確認自己做得到。</a:t>
+              <a:t/>
             </a:r>
             <a:endParaRPr lang="en-US" dirty="0"/>
           </a:p>
@@ -1758,7 +1758,7 @@
           <a:p>
             <a:r>
               <a:rPr lang="en-US" dirty="0"/>
-              <a:t/>
+              <a:t>可用率 99% 與四小時回應是會被寫進契約的義務——確認自己做得到再送出這份文件。</a:t>
             </a:r>
             <a:endParaRPr lang="en-US" dirty="0"/>
           </a:p>
@@ -1934,7 +1934,7 @@
           <a:p>
             <a:r>
               <a:rPr lang="en-US" dirty="0"/>
-              <a:t>講完直接問引薦。這是今天最重要的一個 ask。</a:t>
+              <a:t/>
             </a:r>
             <a:endParaRPr lang="en-US" dirty="0"/>
           </a:p>
@@ -2022,7 +2022,7 @@
           <a:p>
             <a:r>
               <a:rPr lang="en-US" dirty="0"/>
-              <a:t>第 2 題價值最高——他會直接告訴你這個簽會卡在哪一關。</a:t>
+              <a:t>這頁只留一個 ask，而且是零承諾的那一個。不要催他決定合作方式。</a:t>
             </a:r>
             <a:endParaRPr lang="en-US" dirty="0"/>
           </a:p>
@@ -3579,7 +3579,7 @@
                 <a:ea typeface="Arial" pitchFamily="34" charset="-122"/>
                 <a:cs typeface="Arial" pitchFamily="34" charset="-120"/>
               </a:rPr>
-              <a:t>2026 年 8 月 12 日　·　中央大學總務處營繕組</a:t>
+              <a:t>接續 8 月 12 日談話的書面整理　·　中央大學總務處營繕組</a:t>
             </a:r>
             <a:endParaRPr lang="en-US" sz="1200" dirty="0"/>
           </a:p>
@@ -15186,7 +15186,7 @@
                 <a:ea typeface="Arial" pitchFamily="34" charset="-122"/>
                 <a:cs typeface="Arial" pitchFamily="34" charset="-120"/>
               </a:rPr>
-              <a:t>參 · 簽辦</a:t>
+              <a:t>參 · 行政</a:t>
             </a:r>
             <a:endParaRPr lang="en-US" sz="900" dirty="0"/>
           </a:p>
@@ -15309,7 +15309,7 @@
                 <a:ea typeface="Arial" pitchFamily="34" charset="-122"/>
                 <a:cs typeface="Arial" pitchFamily="34" charset="-120"/>
               </a:rPr>
-              <a:t>簽辦怎麼走。</a:t>
+              <a:t>真的要合作的話，行政面怎麼走。</a:t>
             </a:r>
             <a:endParaRPr lang="en-US" sz="3600" dirty="0"/>
           </a:p>
@@ -15353,7 +15353,7 @@
                 <a:ea typeface="Arial" pitchFamily="34" charset="-122"/>
                 <a:cs typeface="Arial" pitchFamily="34" charset="-120"/>
               </a:rPr>
-              <a:t>採購方式已經確定，核定層級也確定。</a:t>
+              <a:t>這一段是供參的整理，不是要請組長現在決定。</a:t>
             </a:r>
             <a:endParaRPr lang="en-US" sz="1450" dirty="0"/>
           </a:p>
@@ -15375,7 +15375,7 @@
                 <a:ea typeface="Arial" pitchFamily="34" charset="-122"/>
                 <a:cs typeface="Arial" pitchFamily="34" charset="-120"/>
               </a:rPr>
-              <a:t>只剩驗收時點要請組長定。</a:t>
+              <a:t>重點只有一個：這一格不會卡。</a:t>
             </a:r>
             <a:endParaRPr lang="en-US" sz="1450" dirty="0"/>
           </a:p>
@@ -15457,7 +15457,7 @@
                 <a:ea typeface="Arial" pitchFamily="34" charset="-122"/>
                 <a:cs typeface="Arial" pitchFamily="34" charset="-120"/>
               </a:rPr>
-              <a:t>本案已經確定的四件事</a:t>
+              <a:t>合作可以從很小開始</a:t>
             </a:r>
             <a:endParaRPr lang="en-US" sz="1250" dirty="0"/>
           </a:p>
@@ -15539,7 +15539,7 @@
                 <a:ea typeface="Arial" pitchFamily="34" charset="-122"/>
                 <a:cs typeface="Arial" pitchFamily="34" charset="-120"/>
               </a:rPr>
-              <a:t>履約期間與驗收時點（要決定）</a:t>
+              <a:t>行政面我先查過的事</a:t>
             </a:r>
             <a:endParaRPr lang="en-US" sz="1250" dirty="0"/>
           </a:p>
@@ -15621,7 +15621,7 @@
                 <a:ea typeface="Arial" pitchFamily="34" charset="-122"/>
                 <a:cs typeface="Arial" pitchFamily="34" charset="-120"/>
               </a:rPr>
-              <a:t>寫進契約的服務承諾</a:t>
+              <a:t>屆時的驗收方式</a:t>
             </a:r>
             <a:endParaRPr lang="en-US" sz="1250" dirty="0"/>
           </a:p>
@@ -15703,7 +15703,7 @@
                 <a:ea typeface="Arial" pitchFamily="34" charset="-122"/>
                 <a:cs typeface="Arial" pitchFamily="34" charset="-120"/>
               </a:rPr>
-              <a:t>簽稿七段骨架</a:t>
+              <a:t>若合作，會寫進契約的承諾</a:t>
             </a:r>
             <a:endParaRPr lang="en-US" sz="1250" dirty="0"/>
           </a:p>
@@ -15785,7 +15785,7 @@
                 <a:ea typeface="Arial" pitchFamily="34" charset="-122"/>
                 <a:cs typeface="Arial" pitchFamily="34" charset="-120"/>
               </a:rPr>
-              <a:t>七份附件與現況</a:t>
+              <a:t>簽長什麼樣子</a:t>
             </a:r>
             <a:endParaRPr lang="en-US" sz="1250" dirty="0"/>
           </a:p>
@@ -15867,7 +15867,7 @@
                 <a:ea typeface="Arial" pitchFamily="34" charset="-122"/>
                 <a:cs typeface="Arial" pitchFamily="34" charset="-120"/>
               </a:rPr>
-              <a:t>會辦動線</a:t>
+              <a:t>文件現況</a:t>
             </a:r>
             <a:endParaRPr lang="en-US" sz="1250" dirty="0"/>
           </a:p>
@@ -15940,7 +15940,7 @@
                 <a:ea typeface="Arial" pitchFamily="34" charset="-122"/>
                 <a:cs typeface="Arial" pitchFamily="34" charset="-120"/>
               </a:rPr>
-              <a:t>參 · 簽辦</a:t>
+              <a:t>參 · 行政</a:t>
             </a:r>
             <a:endParaRPr lang="en-US" sz="900" dirty="0"/>
           </a:p>
@@ -16022,7 +16022,7 @@
                 <a:ea typeface="Arial" pitchFamily="34" charset="-122"/>
                 <a:cs typeface="Arial" pitchFamily="34" charset="-120"/>
               </a:rPr>
-              <a:t>本案定位</a:t>
+              <a:t>合作方式</a:t>
             </a:r>
             <a:endParaRPr lang="en-US" sz="950" dirty="0"/>
           </a:p>
@@ -16063,7 +16063,7 @@
                 <a:ea typeface="Arial" pitchFamily="34" charset="-122"/>
                 <a:cs typeface="Arial" pitchFamily="34" charset="-120"/>
               </a:rPr>
-              <a:t>該確定的都確定了，只剩一件事要定。</a:t>
+              <a:t>合作可以從很小開始。</a:t>
             </a:r>
             <a:endParaRPr lang="en-US" sz="3100" dirty="0"/>
           </a:p>
@@ -16071,281 +16071,1583 @@
       </p:sp>
       <p:sp>
         <p:nvSpPr>
-          <p:cNvPr id="6" name="Shape 4"/>
+          <p:cNvPr id="6" name="Text 4"/>
           <p:cNvSpPr/>
           <p:nvPr/>
         </p:nvSpPr>
         <p:spPr>
           <a:xfrm>
             <a:off x="658368" y="1481328"/>
-            <a:ext cx="2513000" cy="1600200"/>
+            <a:ext cx="10874959" cy="292608"/>
+          </a:xfrm>
+          <a:prstGeom prst="rect">
+            <a:avLst/>
+          </a:prstGeom>
+          <a:noFill/>
+          <a:ln/>
+        </p:spPr>
+        <p:txBody>
+          <a:bodyPr wrap="square" lIns="0" tIns="0" rIns="0" bIns="0" rtlCol="0" anchor="ctr"/>
+          <a:lstStyle/>
+          <a:p>
+            <a:pPr indent="0" marL="0">
+              <a:buNone/>
+            </a:pPr>
+            <a:r>
+              <a:rPr lang="en-US" sz="1250" dirty="0">
+                <a:solidFill>
+                  <a:srgbClr val="4E5F70"/>
+                </a:solidFill>
+                <a:latin typeface="Arial" pitchFamily="34" charset="0"/>
+                <a:ea typeface="Microsoft JhengHei"/>
+                <a:cs typeface="Microsoft JhengHei"/>
+                <a:ea typeface="Arial" pitchFamily="34" charset="-122"/>
+                <a:cs typeface="Arial" pitchFamily="34" charset="-120"/>
+              </a:rPr>
+              <a:t>由淺到深四個層級，不必一次跳到最後一格。前兩格完全不涉採購，也不需要任何行政程序。</a:t>
+            </a:r>
+            <a:endParaRPr lang="en-US" sz="1250" dirty="0"/>
+          </a:p>
+        </p:txBody>
+      </p:sp>
+      <p:graphicFrame>
+        <p:nvGraphicFramePr>
+          <p:cNvPr id="20" name="Table 0"/>
+          <p:cNvGraphicFramePr>
+            <a:graphicFrameLocks noGrp="1"/>
+          </p:cNvGraphicFramePr>
+          <p:nvPr>
+            <p:extLst>
+              <p:ext uri="{D42A27DB-BD31-4B8C-83A1-F6EECF244321}">
+                <p14:modId xmlns:p14="http://schemas.microsoft.com/office/powerpoint/2010/main" val="1579011935"/>
+              </p:ext>
+            </p:extLst>
+          </p:nvPr>
+        </p:nvGraphicFramePr>
+        <p:xfrm>
+          <a:off x="658368" y="1901952"/>
+          <a:ext cx="10874959" cy="914400"/>
+        </p:xfrm>
+        <a:graphic>
+          <a:graphicData uri="http://schemas.openxmlformats.org/drawingml/2006/table">
+            <a:tbl>
+              <a:tblPr/>
+              <a:tblGrid>
+                <a:gridCol w="2377440"/>
+                <a:gridCol w="4937760"/>
+                <a:gridCol w="1828800"/>
+                <a:gridCol w="1913839"/>
+              </a:tblGrid>
+              <a:tr h="0">
+                <a:tc>
+                  <a:txBody>
+                    <a:bodyPr/>
+                    <a:lstStyle/>
+                    <a:p>
+                      <a:pPr algn="l" indent="0" marL="0">
+                        <a:buNone/>
+                      </a:pPr>
+                      <a:r>
+                        <a:rPr lang="en-US" sz="950" b="1" spc="120" kern="0" dirty="0">
+                          <a:solidFill>
+                            <a:srgbClr val="1B5480"/>
+                          </a:solidFill>
+                          <a:latin typeface="Arial" pitchFamily="34" charset="0"/>
+                          <a:ea typeface="Microsoft JhengHei"/>
+                          <a:cs typeface="Microsoft JhengHei"/>
+                          <a:ea typeface="Arial" pitchFamily="34" charset="-122"/>
+                          <a:cs typeface="Arial" pitchFamily="34" charset="-120"/>
+                        </a:rPr>
+                        <a:t>層級</a:t>
+                      </a:r>
+                      <a:endParaRPr lang="en-US" sz="950" dirty="0">
+                        <a:latin typeface="Arial" charset="0"/>
+                        <a:ea typeface="Microsoft JhengHei"/>
+                        <a:cs typeface="Microsoft JhengHei"/>
+                        <a:ea typeface="Arial" charset="0"/>
+                        <a:cs typeface="Arial" charset="0"/>
+                      </a:endParaRPr>
+                    </a:p>
+                  </a:txBody>
+                  <a:tcPr marL="127000" marR="127000" marT="177800" marB="177800" anchor="ctr">
+                    <a:lnL w="6350" cap="flat" cmpd="sng" algn="ctr">
+                      <a:solidFill>
+                        <a:srgbClr val="E6EBF0"/>
+                      </a:solidFill>
+                      <a:prstDash val="solid"/>
+                      <a:round/>
+                      <a:headEnd type="none" w="med" len="med"/>
+                      <a:tailEnd type="none" w="med" len="med"/>
+                    </a:lnL>
+                    <a:lnR w="6350" cap="flat" cmpd="sng" algn="ctr">
+                      <a:solidFill>
+                        <a:srgbClr val="E6EBF0"/>
+                      </a:solidFill>
+                      <a:prstDash val="solid"/>
+                      <a:round/>
+                      <a:headEnd type="none" w="med" len="med"/>
+                      <a:tailEnd type="none" w="med" len="med"/>
+                    </a:lnR>
+                    <a:lnT w="6350" cap="flat" cmpd="sng" algn="ctr">
+                      <a:solidFill>
+                        <a:srgbClr val="E6EBF0"/>
+                      </a:solidFill>
+                      <a:prstDash val="solid"/>
+                      <a:round/>
+                      <a:headEnd type="none" w="med" len="med"/>
+                      <a:tailEnd type="none" w="med" len="med"/>
+                    </a:lnT>
+                    <a:lnB w="6350" cap="flat" cmpd="sng" algn="ctr">
+                      <a:solidFill>
+                        <a:srgbClr val="E6EBF0"/>
+                      </a:solidFill>
+                      <a:prstDash val="solid"/>
+                      <a:round/>
+                      <a:headEnd type="none" w="med" len="med"/>
+                      <a:tailEnd type="none" w="med" len="med"/>
+                    </a:lnB>
+                    <a:solidFill>
+                      <a:srgbClr val="E4EDF5"/>
+                    </a:solidFill>
+                  </a:tcPr>
+                </a:tc>
+                <a:tc>
+                  <a:txBody>
+                    <a:bodyPr/>
+                    <a:lstStyle/>
+                    <a:p>
+                      <a:pPr algn="l" indent="0" marL="0">
+                        <a:buNone/>
+                      </a:pPr>
+                      <a:r>
+                        <a:rPr lang="en-US" sz="950" b="1" spc="120" kern="0" dirty="0">
+                          <a:solidFill>
+                            <a:srgbClr val="1B5480"/>
+                          </a:solidFill>
+                          <a:latin typeface="Arial" pitchFamily="34" charset="0"/>
+                          <a:ea typeface="Microsoft JhengHei"/>
+                          <a:cs typeface="Microsoft JhengHei"/>
+                          <a:ea typeface="Arial" pitchFamily="34" charset="-122"/>
+                          <a:cs typeface="Arial" pitchFamily="34" charset="-120"/>
+                        </a:rPr>
+                        <a:t>做什麼</a:t>
+                      </a:r>
+                      <a:endParaRPr lang="en-US" sz="950" dirty="0">
+                        <a:latin typeface="Arial" charset="0"/>
+                        <a:ea typeface="Microsoft JhengHei"/>
+                        <a:cs typeface="Microsoft JhengHei"/>
+                        <a:ea typeface="Arial" charset="0"/>
+                        <a:cs typeface="Arial" charset="0"/>
+                      </a:endParaRPr>
+                    </a:p>
+                  </a:txBody>
+                  <a:tcPr marL="127000" marR="127000" marT="177800" marB="177800" anchor="ctr">
+                    <a:lnL w="6350" cap="flat" cmpd="sng" algn="ctr">
+                      <a:solidFill>
+                        <a:srgbClr val="E6EBF0"/>
+                      </a:solidFill>
+                      <a:prstDash val="solid"/>
+                      <a:round/>
+                      <a:headEnd type="none" w="med" len="med"/>
+                      <a:tailEnd type="none" w="med" len="med"/>
+                    </a:lnL>
+                    <a:lnR w="6350" cap="flat" cmpd="sng" algn="ctr">
+                      <a:solidFill>
+                        <a:srgbClr val="E6EBF0"/>
+                      </a:solidFill>
+                      <a:prstDash val="solid"/>
+                      <a:round/>
+                      <a:headEnd type="none" w="med" len="med"/>
+                      <a:tailEnd type="none" w="med" len="med"/>
+                    </a:lnR>
+                    <a:lnT w="6350" cap="flat" cmpd="sng" algn="ctr">
+                      <a:solidFill>
+                        <a:srgbClr val="E6EBF0"/>
+                      </a:solidFill>
+                      <a:prstDash val="solid"/>
+                      <a:round/>
+                      <a:headEnd type="none" w="med" len="med"/>
+                      <a:tailEnd type="none" w="med" len="med"/>
+                    </a:lnT>
+                    <a:lnB w="6350" cap="flat" cmpd="sng" algn="ctr">
+                      <a:solidFill>
+                        <a:srgbClr val="E6EBF0"/>
+                      </a:solidFill>
+                      <a:prstDash val="solid"/>
+                      <a:round/>
+                      <a:headEnd type="none" w="med" len="med"/>
+                      <a:tailEnd type="none" w="med" len="med"/>
+                    </a:lnB>
+                    <a:solidFill>
+                      <a:srgbClr val="E4EDF5"/>
+                    </a:solidFill>
+                  </a:tcPr>
+                </a:tc>
+                <a:tc>
+                  <a:txBody>
+                    <a:bodyPr/>
+                    <a:lstStyle/>
+                    <a:p>
+                      <a:pPr algn="l" indent="0" marL="0">
+                        <a:buNone/>
+                      </a:pPr>
+                      <a:r>
+                        <a:rPr lang="en-US" sz="950" b="1" spc="120" kern="0" dirty="0">
+                          <a:solidFill>
+                            <a:srgbClr val="1B5480"/>
+                          </a:solidFill>
+                          <a:latin typeface="Arial" pitchFamily="34" charset="0"/>
+                          <a:ea typeface="Microsoft JhengHei"/>
+                          <a:cs typeface="Microsoft JhengHei"/>
+                          <a:ea typeface="Arial" pitchFamily="34" charset="-122"/>
+                          <a:cs typeface="Arial" pitchFamily="34" charset="-120"/>
+                        </a:rPr>
+                        <a:t>貴組要投入</a:t>
+                      </a:r>
+                      <a:endParaRPr lang="en-US" sz="950" dirty="0">
+                        <a:latin typeface="Arial" charset="0"/>
+                        <a:ea typeface="Microsoft JhengHei"/>
+                        <a:cs typeface="Microsoft JhengHei"/>
+                        <a:ea typeface="Arial" charset="0"/>
+                        <a:cs typeface="Arial" charset="0"/>
+                      </a:endParaRPr>
+                    </a:p>
+                  </a:txBody>
+                  <a:tcPr marL="127000" marR="127000" marT="177800" marB="177800" anchor="ctr">
+                    <a:lnL w="6350" cap="flat" cmpd="sng" algn="ctr">
+                      <a:solidFill>
+                        <a:srgbClr val="E6EBF0"/>
+                      </a:solidFill>
+                      <a:prstDash val="solid"/>
+                      <a:round/>
+                      <a:headEnd type="none" w="med" len="med"/>
+                      <a:tailEnd type="none" w="med" len="med"/>
+                    </a:lnL>
+                    <a:lnR w="6350" cap="flat" cmpd="sng" algn="ctr">
+                      <a:solidFill>
+                        <a:srgbClr val="E6EBF0"/>
+                      </a:solidFill>
+                      <a:prstDash val="solid"/>
+                      <a:round/>
+                      <a:headEnd type="none" w="med" len="med"/>
+                      <a:tailEnd type="none" w="med" len="med"/>
+                    </a:lnR>
+                    <a:lnT w="6350" cap="flat" cmpd="sng" algn="ctr">
+                      <a:solidFill>
+                        <a:srgbClr val="E6EBF0"/>
+                      </a:solidFill>
+                      <a:prstDash val="solid"/>
+                      <a:round/>
+                      <a:headEnd type="none" w="med" len="med"/>
+                      <a:tailEnd type="none" w="med" len="med"/>
+                    </a:lnT>
+                    <a:lnB w="6350" cap="flat" cmpd="sng" algn="ctr">
+                      <a:solidFill>
+                        <a:srgbClr val="E6EBF0"/>
+                      </a:solidFill>
+                      <a:prstDash val="solid"/>
+                      <a:round/>
+                      <a:headEnd type="none" w="med" len="med"/>
+                      <a:tailEnd type="none" w="med" len="med"/>
+                    </a:lnB>
+                    <a:solidFill>
+                      <a:srgbClr val="E4EDF5"/>
+                    </a:solidFill>
+                  </a:tcPr>
+                </a:tc>
+                <a:tc>
+                  <a:txBody>
+                    <a:bodyPr/>
+                    <a:lstStyle/>
+                    <a:p>
+                      <a:pPr algn="l" indent="0" marL="0">
+                        <a:buNone/>
+                      </a:pPr>
+                      <a:r>
+                        <a:rPr lang="en-US" sz="950" b="1" spc="120" kern="0" dirty="0">
+                          <a:solidFill>
+                            <a:srgbClr val="1B5480"/>
+                          </a:solidFill>
+                          <a:latin typeface="Arial" pitchFamily="34" charset="0"/>
+                          <a:ea typeface="Microsoft JhengHei"/>
+                          <a:cs typeface="Microsoft JhengHei"/>
+                          <a:ea typeface="Arial" pitchFamily="34" charset="-122"/>
+                          <a:cs typeface="Arial" pitchFamily="34" charset="-120"/>
+                        </a:rPr>
+                        <a:t>涉不涉採購</a:t>
+                      </a:r>
+                      <a:endParaRPr lang="en-US" sz="950" dirty="0">
+                        <a:latin typeface="Arial" charset="0"/>
+                        <a:ea typeface="Microsoft JhengHei"/>
+                        <a:cs typeface="Microsoft JhengHei"/>
+                        <a:ea typeface="Arial" charset="0"/>
+                        <a:cs typeface="Arial" charset="0"/>
+                      </a:endParaRPr>
+                    </a:p>
+                  </a:txBody>
+                  <a:tcPr marL="127000" marR="127000" marT="177800" marB="177800" anchor="ctr">
+                    <a:lnL w="6350" cap="flat" cmpd="sng" algn="ctr">
+                      <a:solidFill>
+                        <a:srgbClr val="E6EBF0"/>
+                      </a:solidFill>
+                      <a:prstDash val="solid"/>
+                      <a:round/>
+                      <a:headEnd type="none" w="med" len="med"/>
+                      <a:tailEnd type="none" w="med" len="med"/>
+                    </a:lnL>
+                    <a:lnR w="6350" cap="flat" cmpd="sng" algn="ctr">
+                      <a:solidFill>
+                        <a:srgbClr val="E6EBF0"/>
+                      </a:solidFill>
+                      <a:prstDash val="solid"/>
+                      <a:round/>
+                      <a:headEnd type="none" w="med" len="med"/>
+                      <a:tailEnd type="none" w="med" len="med"/>
+                    </a:lnR>
+                    <a:lnT w="6350" cap="flat" cmpd="sng" algn="ctr">
+                      <a:solidFill>
+                        <a:srgbClr val="E6EBF0"/>
+                      </a:solidFill>
+                      <a:prstDash val="solid"/>
+                      <a:round/>
+                      <a:headEnd type="none" w="med" len="med"/>
+                      <a:tailEnd type="none" w="med" len="med"/>
+                    </a:lnT>
+                    <a:lnB w="6350" cap="flat" cmpd="sng" algn="ctr">
+                      <a:solidFill>
+                        <a:srgbClr val="E6EBF0"/>
+                      </a:solidFill>
+                      <a:prstDash val="solid"/>
+                      <a:round/>
+                      <a:headEnd type="none" w="med" len="med"/>
+                      <a:tailEnd type="none" w="med" len="med"/>
+                    </a:lnB>
+                    <a:solidFill>
+                      <a:srgbClr val="E4EDF5"/>
+                    </a:solidFill>
+                  </a:tcPr>
+                </a:tc>
+              </a:tr>
+              <a:tr h="0">
+                <a:tc>
+                  <a:txBody>
+                    <a:bodyPr/>
+                    <a:lstStyle/>
+                    <a:p>
+                      <a:pPr algn="l" indent="0" marL="0">
+                        <a:buNone/>
+                      </a:pPr>
+                      <a:r>
+                        <a:rPr lang="en-US" sz="1100" b="1" dirty="0">
+                          <a:solidFill>
+                            <a:srgbClr val="1D2B39"/>
+                          </a:solidFill>
+                          <a:latin typeface="Arial" pitchFamily="34" charset="0"/>
+                          <a:ea typeface="Microsoft JhengHei"/>
+                          <a:cs typeface="Microsoft JhengHei"/>
+                          <a:ea typeface="Arial" pitchFamily="34" charset="-122"/>
+                          <a:cs typeface="Arial" pitchFamily="34" charset="-120"/>
+                        </a:rPr>
+                        <a:t>一　先看</a:t>
+                      </a:r>
+                      <a:endParaRPr lang="en-US" sz="1100" dirty="0">
+                        <a:latin typeface="Arial" charset="0"/>
+                        <a:ea typeface="Microsoft JhengHei"/>
+                        <a:cs typeface="Microsoft JhengHei"/>
+                        <a:ea typeface="Arial" charset="0"/>
+                        <a:cs typeface="Arial" charset="0"/>
+                      </a:endParaRPr>
+                    </a:p>
+                  </a:txBody>
+                  <a:tcPr marL="127000" marR="127000" marT="177800" marB="177800" anchor="ctr">
+                    <a:lnL w="6350" cap="flat" cmpd="sng" algn="ctr">
+                      <a:solidFill>
+                        <a:srgbClr val="E6EBF0"/>
+                      </a:solidFill>
+                      <a:prstDash val="solid"/>
+                      <a:round/>
+                      <a:headEnd type="none" w="med" len="med"/>
+                      <a:tailEnd type="none" w="med" len="med"/>
+                    </a:lnL>
+                    <a:lnR w="6350" cap="flat" cmpd="sng" algn="ctr">
+                      <a:solidFill>
+                        <a:srgbClr val="E6EBF0"/>
+                      </a:solidFill>
+                      <a:prstDash val="solid"/>
+                      <a:round/>
+                      <a:headEnd type="none" w="med" len="med"/>
+                      <a:tailEnd type="none" w="med" len="med"/>
+                    </a:lnR>
+                    <a:lnT w="6350" cap="flat" cmpd="sng" algn="ctr">
+                      <a:solidFill>
+                        <a:srgbClr val="E6EBF0"/>
+                      </a:solidFill>
+                      <a:prstDash val="solid"/>
+                      <a:round/>
+                      <a:headEnd type="none" w="med" len="med"/>
+                      <a:tailEnd type="none" w="med" len="med"/>
+                    </a:lnT>
+                    <a:lnB w="6350" cap="flat" cmpd="sng" algn="ctr">
+                      <a:solidFill>
+                        <a:srgbClr val="E6EBF0"/>
+                      </a:solidFill>
+                      <a:prstDash val="solid"/>
+                      <a:round/>
+                      <a:headEnd type="none" w="med" len="med"/>
+                      <a:tailEnd type="none" w="med" len="med"/>
+                    </a:lnB>
+                    <a:solidFill>
+                      <a:srgbClr val="FFFFFF"/>
+                    </a:solidFill>
+                  </a:tcPr>
+                </a:tc>
+                <a:tc>
+                  <a:txBody>
+                    <a:bodyPr/>
+                    <a:lstStyle/>
+                    <a:p>
+                      <a:pPr algn="l" indent="0" marL="0">
+                        <a:buNone/>
+                      </a:pPr>
+                      <a:r>
+                        <a:rPr lang="en-US" sz="1100" dirty="0">
+                          <a:solidFill>
+                            <a:srgbClr val="4E5F70"/>
+                          </a:solidFill>
+                          <a:latin typeface="Arial" pitchFamily="34" charset="0"/>
+                          <a:ea typeface="Microsoft JhengHei"/>
+                          <a:cs typeface="Microsoft JhengHei"/>
+                          <a:ea typeface="Arial" pitchFamily="34" charset="-122"/>
+                          <a:cs typeface="Arial" pitchFamily="34" charset="-120"/>
+                        </a:rPr>
+                        <a:t>我開一個示範專案帳號，組長與承辦人自己點，想看哪裡點哪裡</a:t>
+                      </a:r>
+                      <a:endParaRPr lang="en-US" sz="1100" dirty="0">
+                        <a:latin typeface="Arial" charset="0"/>
+                        <a:ea typeface="Microsoft JhengHei"/>
+                        <a:cs typeface="Microsoft JhengHei"/>
+                        <a:ea typeface="Arial" charset="0"/>
+                        <a:cs typeface="Arial" charset="0"/>
+                      </a:endParaRPr>
+                    </a:p>
+                  </a:txBody>
+                  <a:tcPr marL="127000" marR="127000" marT="177800" marB="177800" anchor="ctr">
+                    <a:lnL w="6350" cap="flat" cmpd="sng" algn="ctr">
+                      <a:solidFill>
+                        <a:srgbClr val="E6EBF0"/>
+                      </a:solidFill>
+                      <a:prstDash val="solid"/>
+                      <a:round/>
+                      <a:headEnd type="none" w="med" len="med"/>
+                      <a:tailEnd type="none" w="med" len="med"/>
+                    </a:lnL>
+                    <a:lnR w="6350" cap="flat" cmpd="sng" algn="ctr">
+                      <a:solidFill>
+                        <a:srgbClr val="E6EBF0"/>
+                      </a:solidFill>
+                      <a:prstDash val="solid"/>
+                      <a:round/>
+                      <a:headEnd type="none" w="med" len="med"/>
+                      <a:tailEnd type="none" w="med" len="med"/>
+                    </a:lnR>
+                    <a:lnT w="6350" cap="flat" cmpd="sng" algn="ctr">
+                      <a:solidFill>
+                        <a:srgbClr val="E6EBF0"/>
+                      </a:solidFill>
+                      <a:prstDash val="solid"/>
+                      <a:round/>
+                      <a:headEnd type="none" w="med" len="med"/>
+                      <a:tailEnd type="none" w="med" len="med"/>
+                    </a:lnT>
+                    <a:lnB w="6350" cap="flat" cmpd="sng" algn="ctr">
+                      <a:solidFill>
+                        <a:srgbClr val="E6EBF0"/>
+                      </a:solidFill>
+                      <a:prstDash val="solid"/>
+                      <a:round/>
+                      <a:headEnd type="none" w="med" len="med"/>
+                      <a:tailEnd type="none" w="med" len="med"/>
+                    </a:lnB>
+                    <a:solidFill>
+                      <a:srgbClr val="FFFFFF"/>
+                    </a:solidFill>
+                  </a:tcPr>
+                </a:tc>
+                <a:tc>
+                  <a:txBody>
+                    <a:bodyPr/>
+                    <a:lstStyle/>
+                    <a:p>
+                      <a:pPr algn="l" indent="0" marL="0">
+                        <a:buNone/>
+                      </a:pPr>
+                      <a:r>
+                        <a:rPr lang="en-US" sz="1100" dirty="0">
+                          <a:solidFill>
+                            <a:srgbClr val="4E5F70"/>
+                          </a:solidFill>
+                          <a:latin typeface="Arial" pitchFamily="34" charset="0"/>
+                          <a:ea typeface="Microsoft JhengHei"/>
+                          <a:cs typeface="Microsoft JhengHei"/>
+                          <a:ea typeface="Arial" pitchFamily="34" charset="-122"/>
+                          <a:cs typeface="Arial" pitchFamily="34" charset="-120"/>
+                        </a:rPr>
+                        <a:t>約半小時</a:t>
+                      </a:r>
+                      <a:endParaRPr lang="en-US" sz="1100" dirty="0">
+                        <a:latin typeface="Arial" charset="0"/>
+                        <a:ea typeface="Microsoft JhengHei"/>
+                        <a:cs typeface="Microsoft JhengHei"/>
+                        <a:ea typeface="Arial" charset="0"/>
+                        <a:cs typeface="Arial" charset="0"/>
+                      </a:endParaRPr>
+                    </a:p>
+                  </a:txBody>
+                  <a:tcPr marL="127000" marR="127000" marT="177800" marB="177800" anchor="ctr">
+                    <a:lnL w="6350" cap="flat" cmpd="sng" algn="ctr">
+                      <a:solidFill>
+                        <a:srgbClr val="E6EBF0"/>
+                      </a:solidFill>
+                      <a:prstDash val="solid"/>
+                      <a:round/>
+                      <a:headEnd type="none" w="med" len="med"/>
+                      <a:tailEnd type="none" w="med" len="med"/>
+                    </a:lnL>
+                    <a:lnR w="6350" cap="flat" cmpd="sng" algn="ctr">
+                      <a:solidFill>
+                        <a:srgbClr val="E6EBF0"/>
+                      </a:solidFill>
+                      <a:prstDash val="solid"/>
+                      <a:round/>
+                      <a:headEnd type="none" w="med" len="med"/>
+                      <a:tailEnd type="none" w="med" len="med"/>
+                    </a:lnR>
+                    <a:lnT w="6350" cap="flat" cmpd="sng" algn="ctr">
+                      <a:solidFill>
+                        <a:srgbClr val="E6EBF0"/>
+                      </a:solidFill>
+                      <a:prstDash val="solid"/>
+                      <a:round/>
+                      <a:headEnd type="none" w="med" len="med"/>
+                      <a:tailEnd type="none" w="med" len="med"/>
+                    </a:lnT>
+                    <a:lnB w="6350" cap="flat" cmpd="sng" algn="ctr">
+                      <a:solidFill>
+                        <a:srgbClr val="E6EBF0"/>
+                      </a:solidFill>
+                      <a:prstDash val="solid"/>
+                      <a:round/>
+                      <a:headEnd type="none" w="med" len="med"/>
+                      <a:tailEnd type="none" w="med" len="med"/>
+                    </a:lnB>
+                    <a:solidFill>
+                      <a:srgbClr val="FFFFFF"/>
+                    </a:solidFill>
+                  </a:tcPr>
+                </a:tc>
+                <a:tc>
+                  <a:txBody>
+                    <a:bodyPr/>
+                    <a:lstStyle/>
+                    <a:p>
+                      <a:pPr algn="ctr" indent="0" marL="0">
+                        <a:buNone/>
+                      </a:pPr>
+                      <a:r>
+                        <a:rPr lang="en-US" sz="1100" b="1" dirty="0">
+                          <a:solidFill>
+                            <a:srgbClr val="1A7F4E"/>
+                          </a:solidFill>
+                          <a:latin typeface="Arial" pitchFamily="34" charset="0"/>
+                          <a:ea typeface="Microsoft JhengHei"/>
+                          <a:cs typeface="Microsoft JhengHei"/>
+                          <a:ea typeface="Arial" pitchFamily="34" charset="-122"/>
+                          <a:cs typeface="Arial" pitchFamily="34" charset="-120"/>
+                        </a:rPr>
+                        <a:t>不涉</a:t>
+                      </a:r>
+                      <a:endParaRPr lang="en-US" sz="1100" dirty="0">
+                        <a:latin typeface="Arial" charset="0"/>
+                        <a:ea typeface="Microsoft JhengHei"/>
+                        <a:cs typeface="Microsoft JhengHei"/>
+                        <a:ea typeface="Arial" charset="0"/>
+                        <a:cs typeface="Arial" charset="0"/>
+                      </a:endParaRPr>
+                    </a:p>
+                  </a:txBody>
+                  <a:tcPr marL="127000" marR="127000" marT="177800" marB="177800" anchor="ctr">
+                    <a:lnL w="6350" cap="flat" cmpd="sng" algn="ctr">
+                      <a:solidFill>
+                        <a:srgbClr val="E6EBF0"/>
+                      </a:solidFill>
+                      <a:prstDash val="solid"/>
+                      <a:round/>
+                      <a:headEnd type="none" w="med" len="med"/>
+                      <a:tailEnd type="none" w="med" len="med"/>
+                    </a:lnL>
+                    <a:lnR w="6350" cap="flat" cmpd="sng" algn="ctr">
+                      <a:solidFill>
+                        <a:srgbClr val="E6EBF0"/>
+                      </a:solidFill>
+                      <a:prstDash val="solid"/>
+                      <a:round/>
+                      <a:headEnd type="none" w="med" len="med"/>
+                      <a:tailEnd type="none" w="med" len="med"/>
+                    </a:lnR>
+                    <a:lnT w="6350" cap="flat" cmpd="sng" algn="ctr">
+                      <a:solidFill>
+                        <a:srgbClr val="E6EBF0"/>
+                      </a:solidFill>
+                      <a:prstDash val="solid"/>
+                      <a:round/>
+                      <a:headEnd type="none" w="med" len="med"/>
+                      <a:tailEnd type="none" w="med" len="med"/>
+                    </a:lnT>
+                    <a:lnB w="6350" cap="flat" cmpd="sng" algn="ctr">
+                      <a:solidFill>
+                        <a:srgbClr val="E6EBF0"/>
+                      </a:solidFill>
+                      <a:prstDash val="solid"/>
+                      <a:round/>
+                      <a:headEnd type="none" w="med" len="med"/>
+                      <a:tailEnd type="none" w="med" len="med"/>
+                    </a:lnB>
+                    <a:solidFill>
+                      <a:srgbClr val="E1F1E9"/>
+                    </a:solidFill>
+                  </a:tcPr>
+                </a:tc>
+              </a:tr>
+              <a:tr h="0">
+                <a:tc>
+                  <a:txBody>
+                    <a:bodyPr/>
+                    <a:lstStyle/>
+                    <a:p>
+                      <a:pPr algn="l" indent="0" marL="0">
+                        <a:buNone/>
+                      </a:pPr>
+                      <a:r>
+                        <a:rPr lang="en-US" sz="1100" b="1" dirty="0">
+                          <a:solidFill>
+                            <a:srgbClr val="1D2B39"/>
+                          </a:solidFill>
+                          <a:latin typeface="Arial" pitchFamily="34" charset="0"/>
+                          <a:ea typeface="Microsoft JhengHei"/>
+                          <a:cs typeface="Microsoft JhengHei"/>
+                          <a:ea typeface="Arial" pitchFamily="34" charset="-122"/>
+                          <a:cs typeface="Arial" pitchFamily="34" charset="-120"/>
+                        </a:rPr>
+                        <a:t>二　用貴組真的文件跑一次</a:t>
+                      </a:r>
+                      <a:endParaRPr lang="en-US" sz="1100" dirty="0">
+                        <a:latin typeface="Arial" charset="0"/>
+                        <a:ea typeface="Microsoft JhengHei"/>
+                        <a:cs typeface="Microsoft JhengHei"/>
+                        <a:ea typeface="Arial" charset="0"/>
+                        <a:cs typeface="Arial" charset="0"/>
+                      </a:endParaRPr>
+                    </a:p>
+                  </a:txBody>
+                  <a:tcPr marL="127000" marR="127000" marT="177800" marB="177800" anchor="ctr">
+                    <a:lnL w="6350" cap="flat" cmpd="sng" algn="ctr">
+                      <a:solidFill>
+                        <a:srgbClr val="E6EBF0"/>
+                      </a:solidFill>
+                      <a:prstDash val="solid"/>
+                      <a:round/>
+                      <a:headEnd type="none" w="med" len="med"/>
+                      <a:tailEnd type="none" w="med" len="med"/>
+                    </a:lnL>
+                    <a:lnR w="6350" cap="flat" cmpd="sng" algn="ctr">
+                      <a:solidFill>
+                        <a:srgbClr val="E6EBF0"/>
+                      </a:solidFill>
+                      <a:prstDash val="solid"/>
+                      <a:round/>
+                      <a:headEnd type="none" w="med" len="med"/>
+                      <a:tailEnd type="none" w="med" len="med"/>
+                    </a:lnR>
+                    <a:lnT w="6350" cap="flat" cmpd="sng" algn="ctr">
+                      <a:solidFill>
+                        <a:srgbClr val="E6EBF0"/>
+                      </a:solidFill>
+                      <a:prstDash val="solid"/>
+                      <a:round/>
+                      <a:headEnd type="none" w="med" len="med"/>
+                      <a:tailEnd type="none" w="med" len="med"/>
+                    </a:lnT>
+                    <a:lnB w="6350" cap="flat" cmpd="sng" algn="ctr">
+                      <a:solidFill>
+                        <a:srgbClr val="E6EBF0"/>
+                      </a:solidFill>
+                      <a:prstDash val="solid"/>
+                      <a:round/>
+                      <a:headEnd type="none" w="med" len="med"/>
+                      <a:tailEnd type="none" w="med" len="med"/>
+                    </a:lnB>
+                    <a:solidFill>
+                      <a:srgbClr val="FFFFFF"/>
+                    </a:solidFill>
+                  </a:tcPr>
+                </a:tc>
+                <a:tc>
+                  <a:txBody>
+                    <a:bodyPr/>
+                    <a:lstStyle/>
+                    <a:p>
+                      <a:pPr algn="l" indent="0" marL="0">
+                        <a:buNone/>
+                      </a:pPr>
+                      <a:r>
+                        <a:rPr lang="en-US" sz="1100" dirty="0">
+                          <a:solidFill>
+                            <a:srgbClr val="4E5F70"/>
+                          </a:solidFill>
+                          <a:latin typeface="Arial" pitchFamily="34" charset="0"/>
+                          <a:ea typeface="Microsoft JhengHei"/>
+                          <a:cs typeface="Microsoft JhengHei"/>
+                          <a:ea typeface="Arial" pitchFamily="34" charset="-122"/>
+                          <a:cs typeface="Arial" pitchFamily="34" charset="-120"/>
+                        </a:rPr>
+                        <a:t>給我一份不含個資的契約與標單，我建好之後讓貴組看實際長什麼樣</a:t>
+                      </a:r>
+                      <a:endParaRPr lang="en-US" sz="1100" dirty="0">
+                        <a:latin typeface="Arial" charset="0"/>
+                        <a:ea typeface="Microsoft JhengHei"/>
+                        <a:cs typeface="Microsoft JhengHei"/>
+                        <a:ea typeface="Arial" charset="0"/>
+                        <a:cs typeface="Arial" charset="0"/>
+                      </a:endParaRPr>
+                    </a:p>
+                  </a:txBody>
+                  <a:tcPr marL="127000" marR="127000" marT="177800" marB="177800" anchor="ctr">
+                    <a:lnL w="6350" cap="flat" cmpd="sng" algn="ctr">
+                      <a:solidFill>
+                        <a:srgbClr val="E6EBF0"/>
+                      </a:solidFill>
+                      <a:prstDash val="solid"/>
+                      <a:round/>
+                      <a:headEnd type="none" w="med" len="med"/>
+                      <a:tailEnd type="none" w="med" len="med"/>
+                    </a:lnL>
+                    <a:lnR w="6350" cap="flat" cmpd="sng" algn="ctr">
+                      <a:solidFill>
+                        <a:srgbClr val="E6EBF0"/>
+                      </a:solidFill>
+                      <a:prstDash val="solid"/>
+                      <a:round/>
+                      <a:headEnd type="none" w="med" len="med"/>
+                      <a:tailEnd type="none" w="med" len="med"/>
+                    </a:lnR>
+                    <a:lnT w="6350" cap="flat" cmpd="sng" algn="ctr">
+                      <a:solidFill>
+                        <a:srgbClr val="E6EBF0"/>
+                      </a:solidFill>
+                      <a:prstDash val="solid"/>
+                      <a:round/>
+                      <a:headEnd type="none" w="med" len="med"/>
+                      <a:tailEnd type="none" w="med" len="med"/>
+                    </a:lnT>
+                    <a:lnB w="6350" cap="flat" cmpd="sng" algn="ctr">
+                      <a:solidFill>
+                        <a:srgbClr val="E6EBF0"/>
+                      </a:solidFill>
+                      <a:prstDash val="solid"/>
+                      <a:round/>
+                      <a:headEnd type="none" w="med" len="med"/>
+                      <a:tailEnd type="none" w="med" len="med"/>
+                    </a:lnB>
+                    <a:solidFill>
+                      <a:srgbClr val="FFFFFF"/>
+                    </a:solidFill>
+                  </a:tcPr>
+                </a:tc>
+                <a:tc>
+                  <a:txBody>
+                    <a:bodyPr/>
+                    <a:lstStyle/>
+                    <a:p>
+                      <a:pPr algn="l" indent="0" marL="0">
+                        <a:buNone/>
+                      </a:pPr>
+                      <a:r>
+                        <a:rPr lang="en-US" sz="1100" dirty="0">
+                          <a:solidFill>
+                            <a:srgbClr val="4E5F70"/>
+                          </a:solidFill>
+                          <a:latin typeface="Arial" pitchFamily="34" charset="0"/>
+                          <a:ea typeface="Microsoft JhengHei"/>
+                          <a:cs typeface="Microsoft JhengHei"/>
+                          <a:ea typeface="Arial" pitchFamily="34" charset="-122"/>
+                          <a:cs typeface="Arial" pitchFamily="34" charset="-120"/>
+                        </a:rPr>
+                        <a:t>交一次檔</a:t>
+                      </a:r>
+                      <a:endParaRPr lang="en-US" sz="1100" dirty="0">
+                        <a:latin typeface="Arial" charset="0"/>
+                        <a:ea typeface="Microsoft JhengHei"/>
+                        <a:cs typeface="Microsoft JhengHei"/>
+                        <a:ea typeface="Arial" charset="0"/>
+                        <a:cs typeface="Arial" charset="0"/>
+                      </a:endParaRPr>
+                    </a:p>
+                  </a:txBody>
+                  <a:tcPr marL="127000" marR="127000" marT="177800" marB="177800" anchor="ctr">
+                    <a:lnL w="6350" cap="flat" cmpd="sng" algn="ctr">
+                      <a:solidFill>
+                        <a:srgbClr val="E6EBF0"/>
+                      </a:solidFill>
+                      <a:prstDash val="solid"/>
+                      <a:round/>
+                      <a:headEnd type="none" w="med" len="med"/>
+                      <a:tailEnd type="none" w="med" len="med"/>
+                    </a:lnL>
+                    <a:lnR w="6350" cap="flat" cmpd="sng" algn="ctr">
+                      <a:solidFill>
+                        <a:srgbClr val="E6EBF0"/>
+                      </a:solidFill>
+                      <a:prstDash val="solid"/>
+                      <a:round/>
+                      <a:headEnd type="none" w="med" len="med"/>
+                      <a:tailEnd type="none" w="med" len="med"/>
+                    </a:lnR>
+                    <a:lnT w="6350" cap="flat" cmpd="sng" algn="ctr">
+                      <a:solidFill>
+                        <a:srgbClr val="E6EBF0"/>
+                      </a:solidFill>
+                      <a:prstDash val="solid"/>
+                      <a:round/>
+                      <a:headEnd type="none" w="med" len="med"/>
+                      <a:tailEnd type="none" w="med" len="med"/>
+                    </a:lnT>
+                    <a:lnB w="6350" cap="flat" cmpd="sng" algn="ctr">
+                      <a:solidFill>
+                        <a:srgbClr val="E6EBF0"/>
+                      </a:solidFill>
+                      <a:prstDash val="solid"/>
+                      <a:round/>
+                      <a:headEnd type="none" w="med" len="med"/>
+                      <a:tailEnd type="none" w="med" len="med"/>
+                    </a:lnB>
+                    <a:solidFill>
+                      <a:srgbClr val="FFFFFF"/>
+                    </a:solidFill>
+                  </a:tcPr>
+                </a:tc>
+                <a:tc>
+                  <a:txBody>
+                    <a:bodyPr/>
+                    <a:lstStyle/>
+                    <a:p>
+                      <a:pPr algn="ctr" indent="0" marL="0">
+                        <a:buNone/>
+                      </a:pPr>
+                      <a:r>
+                        <a:rPr lang="en-US" sz="1100" b="1" dirty="0">
+                          <a:solidFill>
+                            <a:srgbClr val="1A7F4E"/>
+                          </a:solidFill>
+                          <a:latin typeface="Arial" pitchFamily="34" charset="0"/>
+                          <a:ea typeface="Microsoft JhengHei"/>
+                          <a:cs typeface="Microsoft JhengHei"/>
+                          <a:ea typeface="Arial" pitchFamily="34" charset="-122"/>
+                          <a:cs typeface="Arial" pitchFamily="34" charset="-120"/>
+                        </a:rPr>
+                        <a:t>不涉</a:t>
+                      </a:r>
+                      <a:endParaRPr lang="en-US" sz="1100" dirty="0">
+                        <a:latin typeface="Arial" charset="0"/>
+                        <a:ea typeface="Microsoft JhengHei"/>
+                        <a:cs typeface="Microsoft JhengHei"/>
+                        <a:ea typeface="Arial" charset="0"/>
+                        <a:cs typeface="Arial" charset="0"/>
+                      </a:endParaRPr>
+                    </a:p>
+                  </a:txBody>
+                  <a:tcPr marL="127000" marR="127000" marT="177800" marB="177800" anchor="ctr">
+                    <a:lnL w="6350" cap="flat" cmpd="sng" algn="ctr">
+                      <a:solidFill>
+                        <a:srgbClr val="E6EBF0"/>
+                      </a:solidFill>
+                      <a:prstDash val="solid"/>
+                      <a:round/>
+                      <a:headEnd type="none" w="med" len="med"/>
+                      <a:tailEnd type="none" w="med" len="med"/>
+                    </a:lnL>
+                    <a:lnR w="6350" cap="flat" cmpd="sng" algn="ctr">
+                      <a:solidFill>
+                        <a:srgbClr val="E6EBF0"/>
+                      </a:solidFill>
+                      <a:prstDash val="solid"/>
+                      <a:round/>
+                      <a:headEnd type="none" w="med" len="med"/>
+                      <a:tailEnd type="none" w="med" len="med"/>
+                    </a:lnR>
+                    <a:lnT w="6350" cap="flat" cmpd="sng" algn="ctr">
+                      <a:solidFill>
+                        <a:srgbClr val="E6EBF0"/>
+                      </a:solidFill>
+                      <a:prstDash val="solid"/>
+                      <a:round/>
+                      <a:headEnd type="none" w="med" len="med"/>
+                      <a:tailEnd type="none" w="med" len="med"/>
+                    </a:lnT>
+                    <a:lnB w="6350" cap="flat" cmpd="sng" algn="ctr">
+                      <a:solidFill>
+                        <a:srgbClr val="E6EBF0"/>
+                      </a:solidFill>
+                      <a:prstDash val="solid"/>
+                      <a:round/>
+                      <a:headEnd type="none" w="med" len="med"/>
+                      <a:tailEnd type="none" w="med" len="med"/>
+                    </a:lnB>
+                    <a:solidFill>
+                      <a:srgbClr val="E1F1E9"/>
+                    </a:solidFill>
+                  </a:tcPr>
+                </a:tc>
+              </a:tr>
+              <a:tr h="0">
+                <a:tc>
+                  <a:txBody>
+                    <a:bodyPr/>
+                    <a:lstStyle/>
+                    <a:p>
+                      <a:pPr algn="l" indent="0" marL="0">
+                        <a:buNone/>
+                      </a:pPr>
+                      <a:r>
+                        <a:rPr lang="en-US" sz="1100" b="1" dirty="0">
+                          <a:solidFill>
+                            <a:srgbClr val="1D2B39"/>
+                          </a:solidFill>
+                          <a:latin typeface="Arial" pitchFamily="34" charset="0"/>
+                          <a:ea typeface="Microsoft JhengHei"/>
+                          <a:cs typeface="Microsoft JhengHei"/>
+                          <a:ea typeface="Arial" pitchFamily="34" charset="-122"/>
+                          <a:cs typeface="Arial" pitchFamily="34" charset="-120"/>
+                        </a:rPr>
+                        <a:t>三　單一功能先用</a:t>
+                      </a:r>
+                      <a:endParaRPr lang="en-US" sz="1100" dirty="0">
+                        <a:latin typeface="Arial" charset="0"/>
+                        <a:ea typeface="Microsoft JhengHei"/>
+                        <a:cs typeface="Microsoft JhengHei"/>
+                        <a:ea typeface="Arial" charset="0"/>
+                        <a:cs typeface="Arial" charset="0"/>
+                      </a:endParaRPr>
+                    </a:p>
+                  </a:txBody>
+                  <a:tcPr marL="127000" marR="127000" marT="177800" marB="177800" anchor="ctr">
+                    <a:lnL w="6350" cap="flat" cmpd="sng" algn="ctr">
+                      <a:solidFill>
+                        <a:srgbClr val="E6EBF0"/>
+                      </a:solidFill>
+                      <a:prstDash val="solid"/>
+                      <a:round/>
+                      <a:headEnd type="none" w="med" len="med"/>
+                      <a:tailEnd type="none" w="med" len="med"/>
+                    </a:lnL>
+                    <a:lnR w="6350" cap="flat" cmpd="sng" algn="ctr">
+                      <a:solidFill>
+                        <a:srgbClr val="E6EBF0"/>
+                      </a:solidFill>
+                      <a:prstDash val="solid"/>
+                      <a:round/>
+                      <a:headEnd type="none" w="med" len="med"/>
+                      <a:tailEnd type="none" w="med" len="med"/>
+                    </a:lnR>
+                    <a:lnT w="6350" cap="flat" cmpd="sng" algn="ctr">
+                      <a:solidFill>
+                        <a:srgbClr val="E6EBF0"/>
+                      </a:solidFill>
+                      <a:prstDash val="solid"/>
+                      <a:round/>
+                      <a:headEnd type="none" w="med" len="med"/>
+                      <a:tailEnd type="none" w="med" len="med"/>
+                    </a:lnT>
+                    <a:lnB w="6350" cap="flat" cmpd="sng" algn="ctr">
+                      <a:solidFill>
+                        <a:srgbClr val="E6EBF0"/>
+                      </a:solidFill>
+                      <a:prstDash val="solid"/>
+                      <a:round/>
+                      <a:headEnd type="none" w="med" len="med"/>
+                      <a:tailEnd type="none" w="med" len="med"/>
+                    </a:lnB>
+                    <a:solidFill>
+                      <a:srgbClr val="FFFFFF"/>
+                    </a:solidFill>
+                  </a:tcPr>
+                </a:tc>
+                <a:tc>
+                  <a:txBody>
+                    <a:bodyPr/>
+                    <a:lstStyle/>
+                    <a:p>
+                      <a:pPr algn="l" indent="0" marL="0">
+                        <a:buNone/>
+                      </a:pPr>
+                      <a:r>
+                        <a:rPr lang="en-US" sz="1100" dirty="0">
+                          <a:solidFill>
+                            <a:srgbClr val="4E5F70"/>
+                          </a:solidFill>
+                          <a:latin typeface="Arial" pitchFamily="34" charset="0"/>
+                          <a:ea typeface="Microsoft JhengHei"/>
+                          <a:cs typeface="Microsoft JhengHei"/>
+                          <a:ea typeface="Arial" pitchFamily="34" charset="-122"/>
+                          <a:cs typeface="Arial" pitchFamily="34" charset="-120"/>
+                        </a:rPr>
+                        <a:t>挑最痛的一塊先上（例如施工日誌＋照片辨識，或估驗佐證包）</a:t>
+                      </a:r>
+                      <a:endParaRPr lang="en-US" sz="1100" dirty="0">
+                        <a:latin typeface="Arial" charset="0"/>
+                        <a:ea typeface="Microsoft JhengHei"/>
+                        <a:cs typeface="Microsoft JhengHei"/>
+                        <a:ea typeface="Arial" charset="0"/>
+                        <a:cs typeface="Arial" charset="0"/>
+                      </a:endParaRPr>
+                    </a:p>
+                  </a:txBody>
+                  <a:tcPr marL="127000" marR="127000" marT="177800" marB="177800" anchor="ctr">
+                    <a:lnL w="6350" cap="flat" cmpd="sng" algn="ctr">
+                      <a:solidFill>
+                        <a:srgbClr val="E6EBF0"/>
+                      </a:solidFill>
+                      <a:prstDash val="solid"/>
+                      <a:round/>
+                      <a:headEnd type="none" w="med" len="med"/>
+                      <a:tailEnd type="none" w="med" len="med"/>
+                    </a:lnL>
+                    <a:lnR w="6350" cap="flat" cmpd="sng" algn="ctr">
+                      <a:solidFill>
+                        <a:srgbClr val="E6EBF0"/>
+                      </a:solidFill>
+                      <a:prstDash val="solid"/>
+                      <a:round/>
+                      <a:headEnd type="none" w="med" len="med"/>
+                      <a:tailEnd type="none" w="med" len="med"/>
+                    </a:lnR>
+                    <a:lnT w="6350" cap="flat" cmpd="sng" algn="ctr">
+                      <a:solidFill>
+                        <a:srgbClr val="E6EBF0"/>
+                      </a:solidFill>
+                      <a:prstDash val="solid"/>
+                      <a:round/>
+                      <a:headEnd type="none" w="med" len="med"/>
+                      <a:tailEnd type="none" w="med" len="med"/>
+                    </a:lnT>
+                    <a:lnB w="6350" cap="flat" cmpd="sng" algn="ctr">
+                      <a:solidFill>
+                        <a:srgbClr val="E6EBF0"/>
+                      </a:solidFill>
+                      <a:prstDash val="solid"/>
+                      <a:round/>
+                      <a:headEnd type="none" w="med" len="med"/>
+                      <a:tailEnd type="none" w="med" len="med"/>
+                    </a:lnB>
+                    <a:solidFill>
+                      <a:srgbClr val="FFFFFF"/>
+                    </a:solidFill>
+                  </a:tcPr>
+                </a:tc>
+                <a:tc>
+                  <a:txBody>
+                    <a:bodyPr/>
+                    <a:lstStyle/>
+                    <a:p>
+                      <a:pPr algn="l" indent="0" marL="0">
+                        <a:buNone/>
+                      </a:pPr>
+                      <a:r>
+                        <a:rPr lang="en-US" sz="1100" dirty="0">
+                          <a:solidFill>
+                            <a:srgbClr val="4E5F70"/>
+                          </a:solidFill>
+                          <a:latin typeface="Arial" pitchFamily="34" charset="0"/>
+                          <a:ea typeface="Microsoft JhengHei"/>
+                          <a:cs typeface="Microsoft JhengHei"/>
+                          <a:ea typeface="Arial" pitchFamily="34" charset="-122"/>
+                          <a:cs typeface="Arial" pitchFamily="34" charset="-120"/>
+                        </a:rPr>
+                        <a:t>一位承辦人</a:t>
+                      </a:r>
+                      <a:endParaRPr lang="en-US" sz="1100" dirty="0">
+                        <a:latin typeface="Arial" charset="0"/>
+                        <a:ea typeface="Microsoft JhengHei"/>
+                        <a:cs typeface="Microsoft JhengHei"/>
+                        <a:ea typeface="Arial" charset="0"/>
+                        <a:cs typeface="Arial" charset="0"/>
+                      </a:endParaRPr>
+                    </a:p>
+                  </a:txBody>
+                  <a:tcPr marL="127000" marR="127000" marT="177800" marB="177800" anchor="ctr">
+                    <a:lnL w="6350" cap="flat" cmpd="sng" algn="ctr">
+                      <a:solidFill>
+                        <a:srgbClr val="E6EBF0"/>
+                      </a:solidFill>
+                      <a:prstDash val="solid"/>
+                      <a:round/>
+                      <a:headEnd type="none" w="med" len="med"/>
+                      <a:tailEnd type="none" w="med" len="med"/>
+                    </a:lnL>
+                    <a:lnR w="6350" cap="flat" cmpd="sng" algn="ctr">
+                      <a:solidFill>
+                        <a:srgbClr val="E6EBF0"/>
+                      </a:solidFill>
+                      <a:prstDash val="solid"/>
+                      <a:round/>
+                      <a:headEnd type="none" w="med" len="med"/>
+                      <a:tailEnd type="none" w="med" len="med"/>
+                    </a:lnR>
+                    <a:lnT w="6350" cap="flat" cmpd="sng" algn="ctr">
+                      <a:solidFill>
+                        <a:srgbClr val="E6EBF0"/>
+                      </a:solidFill>
+                      <a:prstDash val="solid"/>
+                      <a:round/>
+                      <a:headEnd type="none" w="med" len="med"/>
+                      <a:tailEnd type="none" w="med" len="med"/>
+                    </a:lnT>
+                    <a:lnB w="6350" cap="flat" cmpd="sng" algn="ctr">
+                      <a:solidFill>
+                        <a:srgbClr val="E6EBF0"/>
+                      </a:solidFill>
+                      <a:prstDash val="solid"/>
+                      <a:round/>
+                      <a:headEnd type="none" w="med" len="med"/>
+                      <a:tailEnd type="none" w="med" len="med"/>
+                    </a:lnB>
+                    <a:solidFill>
+                      <a:srgbClr val="FFFFFF"/>
+                    </a:solidFill>
+                  </a:tcPr>
+                </a:tc>
+                <a:tc>
+                  <a:txBody>
+                    <a:bodyPr/>
+                    <a:lstStyle/>
+                    <a:p>
+                      <a:pPr algn="l" indent="0" marL="0">
+                        <a:buNone/>
+                      </a:pPr>
+                      <a:r>
+                        <a:rPr lang="en-US" sz="1100" dirty="0">
+                          <a:solidFill>
+                            <a:srgbClr val="4E5F70"/>
+                          </a:solidFill>
+                          <a:latin typeface="Arial" pitchFamily="34" charset="0"/>
+                          <a:ea typeface="Microsoft JhengHei"/>
+                          <a:cs typeface="Microsoft JhengHei"/>
+                          <a:ea typeface="Arial" pitchFamily="34" charset="-122"/>
+                          <a:cs typeface="Arial" pitchFamily="34" charset="-120"/>
+                        </a:rPr>
+                        <a:t>免費期間不涉</a:t>
+                      </a:r>
+                      <a:endParaRPr lang="en-US" sz="1100" dirty="0">
+                        <a:latin typeface="Arial" charset="0"/>
+                        <a:ea typeface="Microsoft JhengHei"/>
+                        <a:cs typeface="Microsoft JhengHei"/>
+                        <a:ea typeface="Arial" charset="0"/>
+                        <a:cs typeface="Arial" charset="0"/>
+                      </a:endParaRPr>
+                    </a:p>
+                  </a:txBody>
+                  <a:tcPr marL="127000" marR="127000" marT="177800" marB="177800" anchor="ctr">
+                    <a:lnL w="6350" cap="flat" cmpd="sng" algn="ctr">
+                      <a:solidFill>
+                        <a:srgbClr val="E6EBF0"/>
+                      </a:solidFill>
+                      <a:prstDash val="solid"/>
+                      <a:round/>
+                      <a:headEnd type="none" w="med" len="med"/>
+                      <a:tailEnd type="none" w="med" len="med"/>
+                    </a:lnL>
+                    <a:lnR w="6350" cap="flat" cmpd="sng" algn="ctr">
+                      <a:solidFill>
+                        <a:srgbClr val="E6EBF0"/>
+                      </a:solidFill>
+                      <a:prstDash val="solid"/>
+                      <a:round/>
+                      <a:headEnd type="none" w="med" len="med"/>
+                      <a:tailEnd type="none" w="med" len="med"/>
+                    </a:lnR>
+                    <a:lnT w="6350" cap="flat" cmpd="sng" algn="ctr">
+                      <a:solidFill>
+                        <a:srgbClr val="E6EBF0"/>
+                      </a:solidFill>
+                      <a:prstDash val="solid"/>
+                      <a:round/>
+                      <a:headEnd type="none" w="med" len="med"/>
+                      <a:tailEnd type="none" w="med" len="med"/>
+                    </a:lnT>
+                    <a:lnB w="6350" cap="flat" cmpd="sng" algn="ctr">
+                      <a:solidFill>
+                        <a:srgbClr val="E6EBF0"/>
+                      </a:solidFill>
+                      <a:prstDash val="solid"/>
+                      <a:round/>
+                      <a:headEnd type="none" w="med" len="med"/>
+                      <a:tailEnd type="none" w="med" len="med"/>
+                    </a:lnB>
+                    <a:solidFill>
+                      <a:srgbClr val="FFFFFF"/>
+                    </a:solidFill>
+                  </a:tcPr>
+                </a:tc>
+              </a:tr>
+              <a:tr h="0">
+                <a:tc>
+                  <a:txBody>
+                    <a:bodyPr/>
+                    <a:lstStyle/>
+                    <a:p>
+                      <a:pPr algn="l" indent="0" marL="0">
+                        <a:buNone/>
+                      </a:pPr>
+                      <a:r>
+                        <a:rPr lang="en-US" sz="1100" b="1" dirty="0">
+                          <a:solidFill>
+                            <a:srgbClr val="1D2B39"/>
+                          </a:solidFill>
+                          <a:latin typeface="Arial" pitchFamily="34" charset="0"/>
+                          <a:ea typeface="Microsoft JhengHei"/>
+                          <a:cs typeface="Microsoft JhengHei"/>
+                          <a:ea typeface="Arial" pitchFamily="34" charset="-122"/>
+                          <a:cs typeface="Arial" pitchFamily="34" charset="-120"/>
+                        </a:rPr>
+                        <a:t>四　單案訂閱</a:t>
+                      </a:r>
+                      <a:endParaRPr lang="en-US" sz="1100" dirty="0">
+                        <a:latin typeface="Arial" charset="0"/>
+                        <a:ea typeface="Microsoft JhengHei"/>
+                        <a:cs typeface="Microsoft JhengHei"/>
+                        <a:ea typeface="Arial" charset="0"/>
+                        <a:cs typeface="Arial" charset="0"/>
+                      </a:endParaRPr>
+                    </a:p>
+                  </a:txBody>
+                  <a:tcPr marL="127000" marR="127000" marT="177800" marB="177800" anchor="ctr">
+                    <a:lnL w="6350" cap="flat" cmpd="sng" algn="ctr">
+                      <a:solidFill>
+                        <a:srgbClr val="E6EBF0"/>
+                      </a:solidFill>
+                      <a:prstDash val="solid"/>
+                      <a:round/>
+                      <a:headEnd type="none" w="med" len="med"/>
+                      <a:tailEnd type="none" w="med" len="med"/>
+                    </a:lnL>
+                    <a:lnR w="6350" cap="flat" cmpd="sng" algn="ctr">
+                      <a:solidFill>
+                        <a:srgbClr val="E6EBF0"/>
+                      </a:solidFill>
+                      <a:prstDash val="solid"/>
+                      <a:round/>
+                      <a:headEnd type="none" w="med" len="med"/>
+                      <a:tailEnd type="none" w="med" len="med"/>
+                    </a:lnR>
+                    <a:lnT w="6350" cap="flat" cmpd="sng" algn="ctr">
+                      <a:solidFill>
+                        <a:srgbClr val="E6EBF0"/>
+                      </a:solidFill>
+                      <a:prstDash val="solid"/>
+                      <a:round/>
+                      <a:headEnd type="none" w="med" len="med"/>
+                      <a:tailEnd type="none" w="med" len="med"/>
+                    </a:lnT>
+                    <a:lnB w="6350" cap="flat" cmpd="sng" algn="ctr">
+                      <a:solidFill>
+                        <a:srgbClr val="E6EBF0"/>
+                      </a:solidFill>
+                      <a:prstDash val="solid"/>
+                      <a:round/>
+                      <a:headEnd type="none" w="med" len="med"/>
+                      <a:tailEnd type="none" w="med" len="med"/>
+                    </a:lnB>
+                    <a:solidFill>
+                      <a:srgbClr val="FFFFFF"/>
+                    </a:solidFill>
+                  </a:tcPr>
+                </a:tc>
+                <a:tc>
+                  <a:txBody>
+                    <a:bodyPr/>
+                    <a:lstStyle/>
+                    <a:p>
+                      <a:pPr algn="l" indent="0" marL="0">
+                        <a:buNone/>
+                      </a:pPr>
+                      <a:r>
+                        <a:rPr lang="en-US" sz="1100" dirty="0">
+                          <a:solidFill>
+                            <a:srgbClr val="4E5F70"/>
+                          </a:solidFill>
+                          <a:latin typeface="Arial" pitchFamily="34" charset="0"/>
+                          <a:ea typeface="Microsoft JhengHei"/>
+                          <a:cs typeface="Microsoft JhengHei"/>
+                          <a:ea typeface="Arial" pitchFamily="34" charset="-122"/>
+                          <a:cs typeface="Arial" pitchFamily="34" charset="-120"/>
+                        </a:rPr>
+                        <a:t>一個在建案的完整流程，一年期</a:t>
+                      </a:r>
+                      <a:endParaRPr lang="en-US" sz="1100" dirty="0">
+                        <a:latin typeface="Arial" charset="0"/>
+                        <a:ea typeface="Microsoft JhengHei"/>
+                        <a:cs typeface="Microsoft JhengHei"/>
+                        <a:ea typeface="Arial" charset="0"/>
+                        <a:cs typeface="Arial" charset="0"/>
+                      </a:endParaRPr>
+                    </a:p>
+                  </a:txBody>
+                  <a:tcPr marL="127000" marR="127000" marT="177800" marB="177800" anchor="ctr">
+                    <a:lnL w="6350" cap="flat" cmpd="sng" algn="ctr">
+                      <a:solidFill>
+                        <a:srgbClr val="E6EBF0"/>
+                      </a:solidFill>
+                      <a:prstDash val="solid"/>
+                      <a:round/>
+                      <a:headEnd type="none" w="med" len="med"/>
+                      <a:tailEnd type="none" w="med" len="med"/>
+                    </a:lnL>
+                    <a:lnR w="6350" cap="flat" cmpd="sng" algn="ctr">
+                      <a:solidFill>
+                        <a:srgbClr val="E6EBF0"/>
+                      </a:solidFill>
+                      <a:prstDash val="solid"/>
+                      <a:round/>
+                      <a:headEnd type="none" w="med" len="med"/>
+                      <a:tailEnd type="none" w="med" len="med"/>
+                    </a:lnR>
+                    <a:lnT w="6350" cap="flat" cmpd="sng" algn="ctr">
+                      <a:solidFill>
+                        <a:srgbClr val="E6EBF0"/>
+                      </a:solidFill>
+                      <a:prstDash val="solid"/>
+                      <a:round/>
+                      <a:headEnd type="none" w="med" len="med"/>
+                      <a:tailEnd type="none" w="med" len="med"/>
+                    </a:lnT>
+                    <a:lnB w="6350" cap="flat" cmpd="sng" algn="ctr">
+                      <a:solidFill>
+                        <a:srgbClr val="E6EBF0"/>
+                      </a:solidFill>
+                      <a:prstDash val="solid"/>
+                      <a:round/>
+                      <a:headEnd type="none" w="med" len="med"/>
+                      <a:tailEnd type="none" w="med" len="med"/>
+                    </a:lnB>
+                    <a:solidFill>
+                      <a:srgbClr val="FFFFFF"/>
+                    </a:solidFill>
+                  </a:tcPr>
+                </a:tc>
+                <a:tc>
+                  <a:txBody>
+                    <a:bodyPr/>
+                    <a:lstStyle/>
+                    <a:p>
+                      <a:pPr algn="l" indent="0" marL="0">
+                        <a:buNone/>
+                      </a:pPr>
+                      <a:r>
+                        <a:rPr lang="en-US" sz="1100" dirty="0">
+                          <a:solidFill>
+                            <a:srgbClr val="4E5F70"/>
+                          </a:solidFill>
+                          <a:latin typeface="Arial" pitchFamily="34" charset="0"/>
+                          <a:ea typeface="Microsoft JhengHei"/>
+                          <a:cs typeface="Microsoft JhengHei"/>
+                          <a:ea typeface="Arial" pitchFamily="34" charset="-122"/>
+                          <a:cs typeface="Arial" pitchFamily="34" charset="-120"/>
+                        </a:rPr>
+                        <a:t>承辦人＋廠商監造聯絡人</a:t>
+                      </a:r>
+                      <a:endParaRPr lang="en-US" sz="1100" dirty="0">
+                        <a:latin typeface="Arial" charset="0"/>
+                        <a:ea typeface="Microsoft JhengHei"/>
+                        <a:cs typeface="Microsoft JhengHei"/>
+                        <a:ea typeface="Arial" charset="0"/>
+                        <a:cs typeface="Arial" charset="0"/>
+                      </a:endParaRPr>
+                    </a:p>
+                  </a:txBody>
+                  <a:tcPr marL="127000" marR="127000" marT="177800" marB="177800" anchor="ctr">
+                    <a:lnL w="6350" cap="flat" cmpd="sng" algn="ctr">
+                      <a:solidFill>
+                        <a:srgbClr val="E6EBF0"/>
+                      </a:solidFill>
+                      <a:prstDash val="solid"/>
+                      <a:round/>
+                      <a:headEnd type="none" w="med" len="med"/>
+                      <a:tailEnd type="none" w="med" len="med"/>
+                    </a:lnL>
+                    <a:lnR w="6350" cap="flat" cmpd="sng" algn="ctr">
+                      <a:solidFill>
+                        <a:srgbClr val="E6EBF0"/>
+                      </a:solidFill>
+                      <a:prstDash val="solid"/>
+                      <a:round/>
+                      <a:headEnd type="none" w="med" len="med"/>
+                      <a:tailEnd type="none" w="med" len="med"/>
+                    </a:lnR>
+                    <a:lnT w="6350" cap="flat" cmpd="sng" algn="ctr">
+                      <a:solidFill>
+                        <a:srgbClr val="E6EBF0"/>
+                      </a:solidFill>
+                      <a:prstDash val="solid"/>
+                      <a:round/>
+                      <a:headEnd type="none" w="med" len="med"/>
+                      <a:tailEnd type="none" w="med" len="med"/>
+                    </a:lnT>
+                    <a:lnB w="6350" cap="flat" cmpd="sng" algn="ctr">
+                      <a:solidFill>
+                        <a:srgbClr val="E6EBF0"/>
+                      </a:solidFill>
+                      <a:prstDash val="solid"/>
+                      <a:round/>
+                      <a:headEnd type="none" w="med" len="med"/>
+                      <a:tailEnd type="none" w="med" len="med"/>
+                    </a:lnB>
+                    <a:solidFill>
+                      <a:srgbClr val="FFFFFF"/>
+                    </a:solidFill>
+                  </a:tcPr>
+                </a:tc>
+                <a:tc>
+                  <a:txBody>
+                    <a:bodyPr/>
+                    <a:lstStyle/>
+                    <a:p>
+                      <a:pPr algn="l" indent="0" marL="0">
+                        <a:buNone/>
+                      </a:pPr>
+                      <a:r>
+                        <a:rPr lang="en-US" sz="1100" dirty="0">
+                          <a:solidFill>
+                            <a:srgbClr val="4E5F70"/>
+                          </a:solidFill>
+                          <a:latin typeface="Arial" pitchFamily="34" charset="0"/>
+                          <a:ea typeface="Microsoft JhengHei"/>
+                          <a:cs typeface="Microsoft JhengHei"/>
+                          <a:ea typeface="Arial" pitchFamily="34" charset="-122"/>
+                          <a:cs typeface="Arial" pitchFamily="34" charset="-120"/>
+                        </a:rPr>
+                        <a:t>小額採購</a:t>
+                      </a:r>
+                      <a:endParaRPr lang="en-US" sz="1100" dirty="0">
+                        <a:latin typeface="Arial" charset="0"/>
+                        <a:ea typeface="Microsoft JhengHei"/>
+                        <a:cs typeface="Microsoft JhengHei"/>
+                        <a:ea typeface="Arial" charset="0"/>
+                        <a:cs typeface="Arial" charset="0"/>
+                      </a:endParaRPr>
+                    </a:p>
+                  </a:txBody>
+                  <a:tcPr marL="127000" marR="127000" marT="177800" marB="177800" anchor="ctr">
+                    <a:lnL w="6350" cap="flat" cmpd="sng" algn="ctr">
+                      <a:solidFill>
+                        <a:srgbClr val="E6EBF0"/>
+                      </a:solidFill>
+                      <a:prstDash val="solid"/>
+                      <a:round/>
+                      <a:headEnd type="none" w="med" len="med"/>
+                      <a:tailEnd type="none" w="med" len="med"/>
+                    </a:lnL>
+                    <a:lnR w="6350" cap="flat" cmpd="sng" algn="ctr">
+                      <a:solidFill>
+                        <a:srgbClr val="E6EBF0"/>
+                      </a:solidFill>
+                      <a:prstDash val="solid"/>
+                      <a:round/>
+                      <a:headEnd type="none" w="med" len="med"/>
+                      <a:tailEnd type="none" w="med" len="med"/>
+                    </a:lnR>
+                    <a:lnT w="6350" cap="flat" cmpd="sng" algn="ctr">
+                      <a:solidFill>
+                        <a:srgbClr val="E6EBF0"/>
+                      </a:solidFill>
+                      <a:prstDash val="solid"/>
+                      <a:round/>
+                      <a:headEnd type="none" w="med" len="med"/>
+                      <a:tailEnd type="none" w="med" len="med"/>
+                    </a:lnT>
+                    <a:lnB w="6350" cap="flat" cmpd="sng" algn="ctr">
+                      <a:solidFill>
+                        <a:srgbClr val="E6EBF0"/>
+                      </a:solidFill>
+                      <a:prstDash val="solid"/>
+                      <a:round/>
+                      <a:headEnd type="none" w="med" len="med"/>
+                      <a:tailEnd type="none" w="med" len="med"/>
+                    </a:lnB>
+                    <a:solidFill>
+                      <a:srgbClr val="FFFFFF"/>
+                    </a:solidFill>
+                  </a:tcPr>
+                </a:tc>
+              </a:tr>
+            </a:tbl>
+          </a:graphicData>
+        </a:graphic>
+      </p:graphicFrame>
+      <p:sp>
+        <p:nvSpPr>
+          <p:cNvPr id="8" name="Shape 5"/>
+          <p:cNvSpPr/>
+          <p:nvPr/>
+        </p:nvSpPr>
+        <p:spPr>
+          <a:xfrm>
+            <a:off x="658368" y="4681728"/>
+            <a:ext cx="10874959" cy="960120"/>
           </a:xfrm>
           <a:prstGeom prst="roundRect">
             <a:avLst>
-              <a:gd name="adj" fmla="val 2000"/>
+              <a:gd name="adj" fmla="val 3333"/>
             </a:avLst>
           </a:prstGeom>
           <a:solidFill>
-            <a:srgbClr val="FFFFFF"/>
+            <a:srgbClr val="E4EDF5"/>
           </a:solidFill>
-          <a:ln w="9525">
+          <a:ln w="12700">
             <a:solidFill>
-              <a:srgbClr val="E6EBF0"/>
+              <a:srgbClr val="E4EDF5"/>
             </a:solidFill>
             <a:prstDash val="solid"/>
           </a:ln>
-          <a:effectLst>
-            <a:outerShdw sx="100000" sy="100000" kx="0" ky="0" algn="bl" rotWithShape="0" blurRad="88900" dist="445" dir="5400000">
-              <a:srgbClr val="93A3B2">
-                <a:alpha val="16000"/>
-              </a:srgbClr>
-            </a:outerShdw>
-          </a:effectLst>
-        </p:spPr>
-      </p:sp>
-      <p:sp>
-        <p:nvSpPr>
-          <p:cNvPr id="7" name="Text 5"/>
-          <p:cNvSpPr/>
-          <p:nvPr/>
-        </p:nvSpPr>
-        <p:spPr>
-          <a:xfrm>
-            <a:off x="877824" y="1645920"/>
-            <a:ext cx="694944" cy="237744"/>
-          </a:xfrm>
-          <a:prstGeom prst="roundRect">
-            <a:avLst>
-              <a:gd name="adj" fmla="val 11538"/>
-            </a:avLst>
-          </a:prstGeom>
-          <a:solidFill>
-            <a:srgbClr val="E1F1E9"/>
-          </a:solidFill>
-          <a:ln>
-            <a:solidFill>
-              <a:srgbClr val="E1F1E9"/>
-            </a:solidFill>
-          </a:ln>
+        </p:spPr>
+      </p:sp>
+      <p:sp>
+        <p:nvSpPr>
+          <p:cNvPr id="9" name="Text 6"/>
+          <p:cNvSpPr/>
+          <p:nvPr/>
+        </p:nvSpPr>
+        <p:spPr>
+          <a:xfrm>
+            <a:off x="932688" y="4681728"/>
+            <a:ext cx="10326319" cy="960120"/>
+          </a:xfrm>
+          <a:prstGeom prst="rect">
+            <a:avLst/>
+          </a:prstGeom>
+          <a:noFill/>
+          <a:ln/>
         </p:spPr>
         <p:txBody>
           <a:bodyPr wrap="square" lIns="0" tIns="0" rIns="0" bIns="0" rtlCol="0" anchor="ctr"/>
-          <a:lstStyle/>
-          <a:p>
-            <a:pPr algn="ctr" indent="0" marL="0">
-              <a:buNone/>
-            </a:pPr>
-            <a:r>
-              <a:rPr lang="en-US" sz="900" b="1" spc="60" kern="0" dirty="0">
-                <a:solidFill>
-                  <a:srgbClr val="1A7F4E"/>
-                </a:solidFill>
-                <a:latin typeface="Arial" pitchFamily="34" charset="0"/>
-                <a:ea typeface="Microsoft JhengHei"/>
-                <a:cs typeface="Microsoft JhengHei"/>
-                <a:ea typeface="Arial" pitchFamily="34" charset="-122"/>
-                <a:cs typeface="Arial" pitchFamily="34" charset="-120"/>
-              </a:rPr>
-              <a:t>採購方式</a:t>
-            </a:r>
-            <a:endParaRPr lang="en-US" sz="900" dirty="0"/>
-          </a:p>
-        </p:txBody>
-      </p:sp>
-      <p:sp>
-        <p:nvSpPr>
-          <p:cNvPr id="8" name="Text 6"/>
-          <p:cNvSpPr/>
-          <p:nvPr/>
-        </p:nvSpPr>
-        <p:spPr>
-          <a:xfrm>
-            <a:off x="877824" y="2011680"/>
-            <a:ext cx="2074088" cy="274320"/>
-          </a:xfrm>
-          <a:prstGeom prst="rect">
-            <a:avLst/>
-          </a:prstGeom>
-          <a:noFill/>
-          <a:ln/>
-        </p:spPr>
-        <p:txBody>
-          <a:bodyPr wrap="square" lIns="0" tIns="0" rIns="0" bIns="0" rtlCol="0" anchor="ctr"/>
-          <a:lstStyle/>
-          <a:p>
-            <a:pPr indent="0" marL="0">
-              <a:buNone/>
-            </a:pPr>
-            <a:r>
-              <a:rPr lang="en-US" sz="1500" b="1" dirty="0">
-                <a:solidFill>
-                  <a:srgbClr val="1D2B39"/>
-                </a:solidFill>
-                <a:latin typeface="Arial" pitchFamily="34" charset="0"/>
-                <a:ea typeface="Microsoft JhengHei"/>
-                <a:cs typeface="Microsoft JhengHei"/>
-                <a:ea typeface="Arial" pitchFamily="34" charset="-122"/>
-                <a:cs typeface="Arial" pitchFamily="34" charset="-120"/>
-              </a:rPr>
-              <a:t>小額採購逕洽</a:t>
-            </a:r>
-            <a:endParaRPr lang="en-US" sz="1500" dirty="0"/>
-          </a:p>
-        </p:txBody>
-      </p:sp>
-      <p:sp>
-        <p:nvSpPr>
-          <p:cNvPr id="9" name="Text 7"/>
-          <p:cNvSpPr/>
-          <p:nvPr/>
-        </p:nvSpPr>
-        <p:spPr>
-          <a:xfrm>
-            <a:off x="877824" y="2359152"/>
-            <a:ext cx="2074088" cy="576072"/>
-          </a:xfrm>
-          <a:prstGeom prst="rect">
-            <a:avLst/>
-          </a:prstGeom>
-          <a:noFill/>
-          <a:ln/>
-        </p:spPr>
-        <p:txBody>
-          <a:bodyPr wrap="square" lIns="0" tIns="0" rIns="0" bIns="0" rtlCol="0" anchor="t"/>
           <a:lstStyle/>
           <a:p>
             <a:pPr indent="0" marL="0">
               <a:lnSpc>
-                <a:spcPts val="1512"/>
+                <a:spcPts val="1900"/>
               </a:lnSpc>
               <a:buNone/>
             </a:pPr>
             <a:r>
-              <a:rPr lang="en-US" sz="1050" dirty="0">
-                <a:solidFill>
-                  <a:srgbClr val="4E5F70"/>
-                </a:solidFill>
-                <a:latin typeface="Arial" pitchFamily="34" charset="0"/>
-                <a:ea typeface="Microsoft JhengHei"/>
-                <a:cs typeface="Microsoft JhengHei"/>
-                <a:ea typeface="Arial" pitchFamily="34" charset="-122"/>
-                <a:cs typeface="Arial" pitchFamily="34" charset="-120"/>
-              </a:rPr>
-              <a:t>15 萬元以下，得不經公告程序逕洽廠商，免提供報價或企劃書。無須三家比價。</a:t>
-            </a:r>
-            <a:endParaRPr lang="en-US" sz="1050" dirty="0"/>
-          </a:p>
-        </p:txBody>
-      </p:sp>
-      <p:sp>
-        <p:nvSpPr>
-          <p:cNvPr id="10" name="Shape 8"/>
-          <p:cNvSpPr/>
-          <p:nvPr/>
-        </p:nvSpPr>
-        <p:spPr>
-          <a:xfrm>
-            <a:off x="3445688" y="1481328"/>
-            <a:ext cx="2513000" cy="1600200"/>
-          </a:xfrm>
-          <a:prstGeom prst="roundRect">
-            <a:avLst>
-              <a:gd name="adj" fmla="val 2000"/>
-            </a:avLst>
-          </a:prstGeom>
-          <a:solidFill>
-            <a:srgbClr val="FFFFFF"/>
-          </a:solidFill>
-          <a:ln w="9525">
-            <a:solidFill>
-              <a:srgbClr val="E6EBF0"/>
-            </a:solidFill>
-            <a:prstDash val="solid"/>
-          </a:ln>
-          <a:effectLst>
-            <a:outerShdw sx="100000" sy="100000" kx="0" ky="0" algn="bl" rotWithShape="0" blurRad="88900" dist="445" dir="5400000">
-              <a:srgbClr val="93A3B2">
-                <a:alpha val="16000"/>
-              </a:srgbClr>
-            </a:outerShdw>
-          </a:effectLst>
-        </p:spPr>
-      </p:sp>
-      <p:sp>
-        <p:nvSpPr>
-          <p:cNvPr id="11" name="Text 9"/>
-          <p:cNvSpPr/>
-          <p:nvPr/>
-        </p:nvSpPr>
-        <p:spPr>
-          <a:xfrm>
-            <a:off x="3665144" y="1645920"/>
-            <a:ext cx="694944" cy="237744"/>
-          </a:xfrm>
-          <a:prstGeom prst="roundRect">
-            <a:avLst>
-              <a:gd name="adj" fmla="val 11538"/>
-            </a:avLst>
-          </a:prstGeom>
-          <a:solidFill>
-            <a:srgbClr val="E1F1E9"/>
-          </a:solidFill>
-          <a:ln>
-            <a:solidFill>
-              <a:srgbClr val="E1F1E9"/>
-            </a:solidFill>
-          </a:ln>
-        </p:spPr>
-        <p:txBody>
-          <a:bodyPr wrap="square" lIns="0" tIns="0" rIns="0" bIns="0" rtlCol="0" anchor="ctr"/>
-          <a:lstStyle/>
-          <a:p>
-            <a:pPr algn="ctr" indent="0" marL="0">
-              <a:buNone/>
-            </a:pPr>
-            <a:r>
-              <a:rPr lang="en-US" sz="900" b="1" spc="60" kern="0" dirty="0">
-                <a:solidFill>
-                  <a:srgbClr val="1A7F4E"/>
-                </a:solidFill>
-                <a:latin typeface="Arial" pitchFamily="34" charset="0"/>
-                <a:ea typeface="Microsoft JhengHei"/>
-                <a:cs typeface="Microsoft JhengHei"/>
-                <a:ea typeface="Arial" pitchFamily="34" charset="-122"/>
-                <a:cs typeface="Arial" pitchFamily="34" charset="-120"/>
-              </a:rPr>
-              <a:t>核定層級</a:t>
-            </a:r>
-            <a:endParaRPr lang="en-US" sz="900" dirty="0"/>
-          </a:p>
-        </p:txBody>
-      </p:sp>
-      <p:sp>
-        <p:nvSpPr>
-          <p:cNvPr id="12" name="Text 10"/>
-          <p:cNvSpPr/>
-          <p:nvPr/>
-        </p:nvSpPr>
-        <p:spPr>
-          <a:xfrm>
-            <a:off x="3665144" y="2011680"/>
-            <a:ext cx="2074088" cy="274320"/>
-          </a:xfrm>
-          <a:prstGeom prst="rect">
-            <a:avLst/>
-          </a:prstGeom>
-          <a:noFill/>
-          <a:ln/>
-        </p:spPr>
-        <p:txBody>
-          <a:bodyPr wrap="square" lIns="0" tIns="0" rIns="0" bIns="0" rtlCol="0" anchor="ctr"/>
-          <a:lstStyle/>
-          <a:p>
-            <a:pPr indent="0" marL="0">
-              <a:buNone/>
-            </a:pPr>
-            <a:r>
-              <a:rPr lang="en-US" sz="1500" b="1" dirty="0">
+              <a:rPr lang="en-US" sz="1250" b="1" dirty="0">
                 <a:solidFill>
                   <a:srgbClr val="1D2B39"/>
                 </a:solidFill>
@@ -16355,41 +17657,16 @@
                 <a:ea typeface="Arial" pitchFamily="34" charset="-122"/>
                 <a:cs typeface="Arial" pitchFamily="34" charset="-120"/>
               </a:rPr>
-              <a:t>組長核定</a:t>
-            </a:r>
-            <a:endParaRPr lang="en-US" sz="1500" dirty="0"/>
-          </a:p>
-        </p:txBody>
-      </p:sp>
-      <p:sp>
-        <p:nvSpPr>
-          <p:cNvPr id="13" name="Text 11"/>
-          <p:cNvSpPr/>
-          <p:nvPr/>
-        </p:nvSpPr>
-        <p:spPr>
-          <a:xfrm>
-            <a:off x="3665144" y="2359152"/>
-            <a:ext cx="2074088" cy="576072"/>
-          </a:xfrm>
-          <a:prstGeom prst="rect">
-            <a:avLst/>
-          </a:prstGeom>
-          <a:noFill/>
-          <a:ln/>
-        </p:spPr>
-        <p:txBody>
-          <a:bodyPr wrap="square" lIns="0" tIns="0" rIns="0" bIns="0" rtlCol="0" anchor="t"/>
-          <a:lstStyle/>
-          <a:p>
+              <a:t>我的建議是先做到第二格。</a:t>
+            </a:r>
             <a:pPr indent="0" marL="0">
               <a:lnSpc>
-                <a:spcPts val="1512"/>
+                <a:spcPts val="1900"/>
               </a:lnSpc>
               <a:buNone/>
             </a:pPr>
             <a:r>
-              <a:rPr lang="en-US" sz="1050" dirty="0">
+              <a:rPr lang="en-US" sz="1250" dirty="0">
                 <a:solidFill>
                   <a:srgbClr val="4E5F70"/>
                 </a:solidFill>
@@ -16399,665 +17676,9 @@
                 <a:ea typeface="Arial" pitchFamily="34" charset="-122"/>
                 <a:cs typeface="Arial" pitchFamily="34" charset="-120"/>
               </a:rPr>
-              <a:t>屬小額採購，本組權責即可核定，不必往上跑層級。</a:t>
-            </a:r>
-            <a:endParaRPr lang="en-US" sz="1050" dirty="0"/>
-          </a:p>
-        </p:txBody>
-      </p:sp>
-      <p:sp>
-        <p:nvSpPr>
-          <p:cNvPr id="14" name="Shape 12"/>
-          <p:cNvSpPr/>
-          <p:nvPr/>
-        </p:nvSpPr>
-        <p:spPr>
-          <a:xfrm>
-            <a:off x="6233008" y="1481328"/>
-            <a:ext cx="2513000" cy="1600200"/>
-          </a:xfrm>
-          <a:prstGeom prst="roundRect">
-            <a:avLst>
-              <a:gd name="adj" fmla="val 2000"/>
-            </a:avLst>
-          </a:prstGeom>
-          <a:solidFill>
-            <a:srgbClr val="FFFFFF"/>
-          </a:solidFill>
-          <a:ln w="9525">
-            <a:solidFill>
-              <a:srgbClr val="E6EBF0"/>
-            </a:solidFill>
-            <a:prstDash val="solid"/>
-          </a:ln>
-          <a:effectLst>
-            <a:outerShdw sx="100000" sy="100000" kx="0" ky="0" algn="bl" rotWithShape="0" blurRad="88900" dist="445" dir="5400000">
-              <a:srgbClr val="93A3B2">
-                <a:alpha val="16000"/>
-              </a:srgbClr>
-            </a:outerShdw>
-          </a:effectLst>
-        </p:spPr>
-      </p:sp>
-      <p:sp>
-        <p:nvSpPr>
-          <p:cNvPr id="15" name="Text 13"/>
-          <p:cNvSpPr/>
-          <p:nvPr/>
-        </p:nvSpPr>
-        <p:spPr>
-          <a:xfrm>
-            <a:off x="6452464" y="1645920"/>
-            <a:ext cx="694944" cy="237744"/>
-          </a:xfrm>
-          <a:prstGeom prst="roundRect">
-            <a:avLst>
-              <a:gd name="adj" fmla="val 11538"/>
-            </a:avLst>
-          </a:prstGeom>
-          <a:solidFill>
-            <a:srgbClr val="E1F1E9"/>
-          </a:solidFill>
-          <a:ln>
-            <a:solidFill>
-              <a:srgbClr val="E1F1E9"/>
-            </a:solidFill>
-          </a:ln>
-        </p:spPr>
-        <p:txBody>
-          <a:bodyPr wrap="square" lIns="0" tIns="0" rIns="0" bIns="0" rtlCol="0" anchor="ctr"/>
-          <a:lstStyle/>
-          <a:p>
-            <a:pPr algn="ctr" indent="0" marL="0">
-              <a:buNone/>
-            </a:pPr>
-            <a:r>
-              <a:rPr lang="en-US" sz="900" b="1" spc="60" kern="0" dirty="0">
-                <a:solidFill>
-                  <a:srgbClr val="1A7F4E"/>
-                </a:solidFill>
-                <a:latin typeface="Arial" pitchFamily="34" charset="0"/>
-                <a:ea typeface="Microsoft JhengHei"/>
-                <a:cs typeface="Microsoft JhengHei"/>
-                <a:ea typeface="Arial" pitchFamily="34" charset="-122"/>
-                <a:cs typeface="Arial" pitchFamily="34" charset="-120"/>
-              </a:rPr>
-              <a:t>財產登記</a:t>
-            </a:r>
-            <a:endParaRPr lang="en-US" sz="900" dirty="0"/>
-          </a:p>
-        </p:txBody>
-      </p:sp>
-      <p:sp>
-        <p:nvSpPr>
-          <p:cNvPr id="16" name="Text 14"/>
-          <p:cNvSpPr/>
-          <p:nvPr/>
-        </p:nvSpPr>
-        <p:spPr>
-          <a:xfrm>
-            <a:off x="6452464" y="2011680"/>
-            <a:ext cx="2074088" cy="274320"/>
-          </a:xfrm>
-          <a:prstGeom prst="rect">
-            <a:avLst/>
-          </a:prstGeom>
-          <a:noFill/>
-          <a:ln/>
-        </p:spPr>
-        <p:txBody>
-          <a:bodyPr wrap="square" lIns="0" tIns="0" rIns="0" bIns="0" rtlCol="0" anchor="ctr"/>
-          <a:lstStyle/>
-          <a:p>
-            <a:pPr indent="0" marL="0">
-              <a:buNone/>
-            </a:pPr>
-            <a:r>
-              <a:rPr lang="en-US" sz="1500" b="1" dirty="0">
-                <a:solidFill>
-                  <a:srgbClr val="1D2B39"/>
-                </a:solidFill>
-                <a:latin typeface="Arial" pitchFamily="34" charset="0"/>
-                <a:ea typeface="Microsoft JhengHei"/>
-                <a:cs typeface="Microsoft JhengHei"/>
-                <a:ea typeface="Arial" pitchFamily="34" charset="-122"/>
-                <a:cs typeface="Arial" pitchFamily="34" charset="-120"/>
-              </a:rPr>
-              <a:t>不涉財產登記</a:t>
-            </a:r>
-            <a:endParaRPr lang="en-US" sz="1500" dirty="0"/>
-          </a:p>
-        </p:txBody>
-      </p:sp>
-      <p:sp>
-        <p:nvSpPr>
-          <p:cNvPr id="17" name="Text 15"/>
-          <p:cNvSpPr/>
-          <p:nvPr/>
-        </p:nvSpPr>
-        <p:spPr>
-          <a:xfrm>
-            <a:off x="6452464" y="2359152"/>
-            <a:ext cx="2074088" cy="576072"/>
-          </a:xfrm>
-          <a:prstGeom prst="rect">
-            <a:avLst/>
-          </a:prstGeom>
-          <a:noFill/>
-          <a:ln/>
-        </p:spPr>
-        <p:txBody>
-          <a:bodyPr wrap="square" lIns="0" tIns="0" rIns="0" bIns="0" rtlCol="0" anchor="t"/>
-          <a:lstStyle/>
-          <a:p>
-            <a:pPr indent="0" marL="0">
-              <a:lnSpc>
-                <a:spcPts val="1512"/>
-              </a:lnSpc>
-              <a:buNone/>
-            </a:pPr>
-            <a:r>
-              <a:rPr lang="en-US" sz="1050" dirty="0">
-                <a:solidFill>
-                  <a:srgbClr val="4E5F70"/>
-                </a:solidFill>
-                <a:latin typeface="Arial" pitchFamily="34" charset="0"/>
-                <a:ea typeface="Microsoft JhengHei"/>
-                <a:cs typeface="Microsoft JhengHei"/>
-                <a:ea typeface="Arial" pitchFamily="34" charset="-122"/>
-                <a:cs typeface="Arial" pitchFamily="34" charset="-120"/>
-              </a:rPr>
-              <a:t>純訂閱服務，機關未取得軟硬體所有權，省一段流程。</a:t>
-            </a:r>
-            <a:endParaRPr lang="en-US" sz="1050" dirty="0"/>
-          </a:p>
-        </p:txBody>
-      </p:sp>
-      <p:sp>
-        <p:nvSpPr>
-          <p:cNvPr id="18" name="Shape 16"/>
-          <p:cNvSpPr/>
-          <p:nvPr/>
-        </p:nvSpPr>
-        <p:spPr>
-          <a:xfrm>
-            <a:off x="9020327" y="1481328"/>
-            <a:ext cx="2513000" cy="1600200"/>
-          </a:xfrm>
-          <a:prstGeom prst="roundRect">
-            <a:avLst>
-              <a:gd name="adj" fmla="val 2000"/>
-            </a:avLst>
-          </a:prstGeom>
-          <a:solidFill>
-            <a:srgbClr val="FFFFFF"/>
-          </a:solidFill>
-          <a:ln w="9525">
-            <a:solidFill>
-              <a:srgbClr val="E6EBF0"/>
-            </a:solidFill>
-            <a:prstDash val="solid"/>
-          </a:ln>
-          <a:effectLst>
-            <a:outerShdw sx="100000" sy="100000" kx="0" ky="0" algn="bl" rotWithShape="0" blurRad="88900" dist="445" dir="5400000">
-              <a:srgbClr val="93A3B2">
-                <a:alpha val="16000"/>
-              </a:srgbClr>
-            </a:outerShdw>
-          </a:effectLst>
-        </p:spPr>
-      </p:sp>
-      <p:sp>
-        <p:nvSpPr>
-          <p:cNvPr id="19" name="Text 17"/>
-          <p:cNvSpPr/>
-          <p:nvPr/>
-        </p:nvSpPr>
-        <p:spPr>
-          <a:xfrm>
-            <a:off x="9239783" y="1645920"/>
-            <a:ext cx="694944" cy="237744"/>
-          </a:xfrm>
-          <a:prstGeom prst="roundRect">
-            <a:avLst>
-              <a:gd name="adj" fmla="val 11538"/>
-            </a:avLst>
-          </a:prstGeom>
-          <a:solidFill>
-            <a:srgbClr val="E1F1E9"/>
-          </a:solidFill>
-          <a:ln>
-            <a:solidFill>
-              <a:srgbClr val="E1F1E9"/>
-            </a:solidFill>
-          </a:ln>
-        </p:spPr>
-        <p:txBody>
-          <a:bodyPr wrap="square" lIns="0" tIns="0" rIns="0" bIns="0" rtlCol="0" anchor="ctr"/>
-          <a:lstStyle/>
-          <a:p>
-            <a:pPr algn="ctr" indent="0" marL="0">
-              <a:buNone/>
-            </a:pPr>
-            <a:r>
-              <a:rPr lang="en-US" sz="900" b="1" spc="60" kern="0" dirty="0">
-                <a:solidFill>
-                  <a:srgbClr val="1A7F4E"/>
-                </a:solidFill>
-                <a:latin typeface="Arial" pitchFamily="34" charset="0"/>
-                <a:ea typeface="Microsoft JhengHei"/>
-                <a:cs typeface="Microsoft JhengHei"/>
-                <a:ea typeface="Arial" pitchFamily="34" charset="-122"/>
-                <a:cs typeface="Arial" pitchFamily="34" charset="-120"/>
-              </a:rPr>
-              <a:t>校內規定</a:t>
-            </a:r>
-            <a:endParaRPr lang="en-US" sz="900" dirty="0"/>
-          </a:p>
-        </p:txBody>
-      </p:sp>
-      <p:sp>
-        <p:nvSpPr>
-          <p:cNvPr id="20" name="Text 18"/>
-          <p:cNvSpPr/>
-          <p:nvPr/>
-        </p:nvSpPr>
-        <p:spPr>
-          <a:xfrm>
-            <a:off x="9239783" y="2011680"/>
-            <a:ext cx="2074088" cy="274320"/>
-          </a:xfrm>
-          <a:prstGeom prst="rect">
-            <a:avLst/>
-          </a:prstGeom>
-          <a:noFill/>
-          <a:ln/>
-        </p:spPr>
-        <p:txBody>
-          <a:bodyPr wrap="square" lIns="0" tIns="0" rIns="0" bIns="0" rtlCol="0" anchor="ctr"/>
-          <a:lstStyle/>
-          <a:p>
-            <a:pPr indent="0" marL="0">
-              <a:buNone/>
-            </a:pPr>
-            <a:r>
-              <a:rPr lang="en-US" sz="1500" b="1" dirty="0">
-                <a:solidFill>
-                  <a:srgbClr val="1D2B39"/>
-                </a:solidFill>
-                <a:latin typeface="Arial" pitchFamily="34" charset="0"/>
-                <a:ea typeface="Microsoft JhengHei"/>
-                <a:cs typeface="Microsoft JhengHei"/>
-                <a:ea typeface="Arial" pitchFamily="34" charset="-122"/>
-                <a:cs typeface="Arial" pitchFamily="34" charset="-120"/>
-              </a:rPr>
-              <a:t>無加嚴規定</a:t>
-            </a:r>
-            <a:endParaRPr lang="en-US" sz="1500" dirty="0"/>
-          </a:p>
-        </p:txBody>
-      </p:sp>
-      <p:sp>
-        <p:nvSpPr>
-          <p:cNvPr id="21" name="Text 19"/>
-          <p:cNvSpPr/>
-          <p:nvPr/>
-        </p:nvSpPr>
-        <p:spPr>
-          <a:xfrm>
-            <a:off x="9239783" y="2359152"/>
-            <a:ext cx="2074088" cy="576072"/>
-          </a:xfrm>
-          <a:prstGeom prst="rect">
-            <a:avLst/>
-          </a:prstGeom>
-          <a:noFill/>
-          <a:ln/>
-        </p:spPr>
-        <p:txBody>
-          <a:bodyPr wrap="square" lIns="0" tIns="0" rIns="0" bIns="0" rtlCol="0" anchor="t"/>
-          <a:lstStyle/>
-          <a:p>
-            <a:pPr indent="0" marL="0">
-              <a:lnSpc>
-                <a:spcPts val="1512"/>
-              </a:lnSpc>
-              <a:buNone/>
-            </a:pPr>
-            <a:r>
-              <a:rPr lang="en-US" sz="1050" dirty="0">
-                <a:solidFill>
-                  <a:srgbClr val="4E5F70"/>
-                </a:solidFill>
-                <a:latin typeface="Arial" pitchFamily="34" charset="0"/>
-                <a:ea typeface="Microsoft JhengHei"/>
-                <a:cs typeface="Microsoft JhengHei"/>
-                <a:ea typeface="Arial" pitchFamily="34" charset="-122"/>
-                <a:cs typeface="Arial" pitchFamily="34" charset="-120"/>
-              </a:rPr>
-              <a:t>已確認貴校對 15 萬以下無額外加嚴要求。</a:t>
-            </a:r>
-            <a:endParaRPr lang="en-US" sz="1050" dirty="0"/>
-          </a:p>
-        </p:txBody>
-      </p:sp>
-      <p:sp>
-        <p:nvSpPr>
-          <p:cNvPr id="22" name="Shape 20"/>
-          <p:cNvSpPr/>
-          <p:nvPr/>
-        </p:nvSpPr>
-        <p:spPr>
-          <a:xfrm>
-            <a:off x="658368" y="3401568"/>
-            <a:ext cx="10874959" cy="1737360"/>
-          </a:xfrm>
-          <a:prstGeom prst="roundRect">
-            <a:avLst>
-              <a:gd name="adj" fmla="val 1842"/>
-            </a:avLst>
-          </a:prstGeom>
-          <a:solidFill>
-            <a:srgbClr val="FCE9DC"/>
-          </a:solidFill>
-          <a:ln w="12700">
-            <a:solidFill>
-              <a:srgbClr val="FCE9DC"/>
-            </a:solidFill>
-            <a:prstDash val="solid"/>
-          </a:ln>
-        </p:spPr>
-      </p:sp>
-      <p:sp>
-        <p:nvSpPr>
-          <p:cNvPr id="23" name="Text 21"/>
-          <p:cNvSpPr/>
-          <p:nvPr/>
-        </p:nvSpPr>
-        <p:spPr>
-          <a:xfrm>
-            <a:off x="969264" y="3566160"/>
-            <a:ext cx="10253167" cy="292608"/>
-          </a:xfrm>
-          <a:prstGeom prst="rect">
-            <a:avLst/>
-          </a:prstGeom>
-          <a:noFill/>
-          <a:ln/>
-        </p:spPr>
-        <p:txBody>
-          <a:bodyPr wrap="square" lIns="0" tIns="0" rIns="0" bIns="0" rtlCol="0" anchor="ctr"/>
-          <a:lstStyle/>
-          <a:p>
-            <a:pPr indent="0" marL="0">
-              <a:buNone/>
-            </a:pPr>
-            <a:r>
-              <a:rPr lang="en-US" sz="1600" b="1" dirty="0">
-                <a:solidFill>
-                  <a:srgbClr val="1D2B39"/>
-                </a:solidFill>
-                <a:latin typeface="Arial" pitchFamily="34" charset="0"/>
-                <a:ea typeface="Microsoft JhengHei"/>
-                <a:cs typeface="Microsoft JhengHei"/>
-                <a:ea typeface="Arial" pitchFamily="34" charset="-122"/>
-                <a:cs typeface="Arial" pitchFamily="34" charset="-120"/>
-              </a:rPr>
-              <a:t>剩下的兩件事</a:t>
-            </a:r>
-            <a:endParaRPr lang="en-US" sz="1600" dirty="0"/>
-          </a:p>
-        </p:txBody>
-      </p:sp>
-      <p:sp>
-        <p:nvSpPr>
-          <p:cNvPr id="24" name="Text 22"/>
-          <p:cNvSpPr/>
-          <p:nvPr/>
-        </p:nvSpPr>
-        <p:spPr>
-          <a:xfrm>
-            <a:off x="969264" y="3986784"/>
-            <a:ext cx="274320" cy="274320"/>
-          </a:xfrm>
-          <a:prstGeom prst="rect">
-            <a:avLst/>
-          </a:prstGeom>
-          <a:noFill/>
-          <a:ln/>
-        </p:spPr>
-        <p:txBody>
-          <a:bodyPr wrap="square" lIns="0" tIns="0" rIns="0" bIns="0" rtlCol="0" anchor="ctr"/>
-          <a:lstStyle/>
-          <a:p>
-            <a:pPr indent="0" marL="0">
-              <a:buNone/>
-            </a:pPr>
-            <a:r>
-              <a:rPr lang="en-US" sz="1400" b="1" dirty="0">
-                <a:solidFill>
-                  <a:srgbClr val="E8630C"/>
-                </a:solidFill>
-                <a:latin typeface="Arial" pitchFamily="34" charset="0"/>
-                <a:ea typeface="Microsoft JhengHei"/>
-                <a:cs typeface="Microsoft JhengHei"/>
-                <a:ea typeface="Arial" pitchFamily="34" charset="-122"/>
-                <a:cs typeface="Arial" pitchFamily="34" charset="-120"/>
-              </a:rPr>
-              <a:t>一</a:t>
-            </a:r>
-            <a:endParaRPr lang="en-US" sz="1400" dirty="0"/>
-          </a:p>
-        </p:txBody>
-      </p:sp>
-      <p:sp>
-        <p:nvSpPr>
-          <p:cNvPr id="25" name="Text 23"/>
-          <p:cNvSpPr/>
-          <p:nvPr/>
-        </p:nvSpPr>
-        <p:spPr>
-          <a:xfrm>
-            <a:off x="1280160" y="3986784"/>
-            <a:ext cx="4632808" cy="274320"/>
-          </a:xfrm>
-          <a:prstGeom prst="rect">
-            <a:avLst/>
-          </a:prstGeom>
-          <a:noFill/>
-          <a:ln/>
-        </p:spPr>
-        <p:txBody>
-          <a:bodyPr wrap="square" lIns="0" tIns="0" rIns="0" bIns="0" rtlCol="0" anchor="ctr"/>
-          <a:lstStyle/>
-          <a:p>
-            <a:pPr indent="0" marL="0">
-              <a:buNone/>
-            </a:pPr>
-            <a:r>
-              <a:rPr lang="en-US" sz="1400" b="1" dirty="0">
-                <a:solidFill>
-                  <a:srgbClr val="1D2B39"/>
-                </a:solidFill>
-                <a:latin typeface="Arial" pitchFamily="34" charset="0"/>
-                <a:ea typeface="Microsoft JhengHei"/>
-                <a:cs typeface="Microsoft JhengHei"/>
-                <a:ea typeface="Arial" pitchFamily="34" charset="-122"/>
-                <a:cs typeface="Arial" pitchFamily="34" charset="-120"/>
-              </a:rPr>
-              <a:t>履約期間與驗收時點</a:t>
-            </a:r>
-            <a:endParaRPr lang="en-US" sz="1400" dirty="0"/>
-          </a:p>
-        </p:txBody>
-      </p:sp>
-      <p:sp>
-        <p:nvSpPr>
-          <p:cNvPr id="26" name="Text 24"/>
-          <p:cNvSpPr/>
-          <p:nvPr/>
-        </p:nvSpPr>
-        <p:spPr>
-          <a:xfrm>
-            <a:off x="1280160" y="4315968"/>
-            <a:ext cx="4632808" cy="548640"/>
-          </a:xfrm>
-          <a:prstGeom prst="rect">
-            <a:avLst/>
-          </a:prstGeom>
-          <a:noFill/>
-          <a:ln/>
-        </p:spPr>
-        <p:txBody>
-          <a:bodyPr wrap="square" lIns="0" tIns="0" rIns="0" bIns="0" rtlCol="0" anchor="t"/>
-          <a:lstStyle/>
-          <a:p>
-            <a:pPr indent="0" marL="0">
-              <a:lnSpc>
-                <a:spcPts val="1650"/>
-              </a:lnSpc>
-              <a:buNone/>
-            </a:pPr>
-            <a:r>
-              <a:rPr lang="en-US" sz="1150" dirty="0">
-                <a:solidFill>
-                  <a:srgbClr val="4E5F70"/>
-                </a:solidFill>
-                <a:latin typeface="Arial" pitchFamily="34" charset="0"/>
-                <a:ea typeface="Microsoft JhengHei"/>
-                <a:cs typeface="Microsoft JhengHei"/>
-                <a:ea typeface="Arial" pitchFamily="34" charset="-122"/>
-                <a:cs typeface="Arial" pitchFamily="34" charset="-120"/>
-              </a:rPr>
-              <a:t>簽一定要寫到「什麼時候驗收」。下一頁提三個方案，今天就可以定。</a:t>
-            </a:r>
-            <a:endParaRPr lang="en-US" sz="1150" dirty="0"/>
-          </a:p>
-        </p:txBody>
-      </p:sp>
-      <p:sp>
-        <p:nvSpPr>
-          <p:cNvPr id="27" name="Text 25"/>
-          <p:cNvSpPr/>
-          <p:nvPr/>
-        </p:nvSpPr>
-        <p:spPr>
-          <a:xfrm>
-            <a:off x="6278728" y="3986784"/>
-            <a:ext cx="274320" cy="274320"/>
-          </a:xfrm>
-          <a:prstGeom prst="rect">
-            <a:avLst/>
-          </a:prstGeom>
-          <a:noFill/>
-          <a:ln/>
-        </p:spPr>
-        <p:txBody>
-          <a:bodyPr wrap="square" lIns="0" tIns="0" rIns="0" bIns="0" rtlCol="0" anchor="ctr"/>
-          <a:lstStyle/>
-          <a:p>
-            <a:pPr indent="0" marL="0">
-              <a:buNone/>
-            </a:pPr>
-            <a:r>
-              <a:rPr lang="en-US" sz="1400" b="1" dirty="0">
-                <a:solidFill>
-                  <a:srgbClr val="E8630C"/>
-                </a:solidFill>
-                <a:latin typeface="Arial" pitchFamily="34" charset="0"/>
-                <a:ea typeface="Microsoft JhengHei"/>
-                <a:cs typeface="Microsoft JhengHei"/>
-                <a:ea typeface="Arial" pitchFamily="34" charset="-122"/>
-                <a:cs typeface="Arial" pitchFamily="34" charset="-120"/>
-              </a:rPr>
-              <a:t>二</a:t>
-            </a:r>
-            <a:endParaRPr lang="en-US" sz="1400" dirty="0"/>
-          </a:p>
-        </p:txBody>
-      </p:sp>
-      <p:sp>
-        <p:nvSpPr>
-          <p:cNvPr id="28" name="Text 26"/>
-          <p:cNvSpPr/>
-          <p:nvPr/>
-        </p:nvSpPr>
-        <p:spPr>
-          <a:xfrm>
-            <a:off x="6589624" y="3986784"/>
-            <a:ext cx="4632808" cy="274320"/>
-          </a:xfrm>
-          <a:prstGeom prst="rect">
-            <a:avLst/>
-          </a:prstGeom>
-          <a:noFill/>
-          <a:ln/>
-        </p:spPr>
-        <p:txBody>
-          <a:bodyPr wrap="square" lIns="0" tIns="0" rIns="0" bIns="0" rtlCol="0" anchor="ctr"/>
-          <a:lstStyle/>
-          <a:p>
-            <a:pPr indent="0" marL="0">
-              <a:buNone/>
-            </a:pPr>
-            <a:r>
-              <a:rPr lang="en-US" sz="1400" b="1" dirty="0">
-                <a:solidFill>
-                  <a:srgbClr val="1D2B39"/>
-                </a:solidFill>
-                <a:latin typeface="Arial" pitchFamily="34" charset="0"/>
-                <a:ea typeface="Microsoft JhengHei"/>
-                <a:cs typeface="Microsoft JhengHei"/>
-                <a:ea typeface="Arial" pitchFamily="34" charset="-122"/>
-                <a:cs typeface="Arial" pitchFamily="34" charset="-120"/>
-              </a:rPr>
-              <a:t>會辦計網中心</a:t>
-            </a:r>
-            <a:endParaRPr lang="en-US" sz="1400" dirty="0"/>
-          </a:p>
-        </p:txBody>
-      </p:sp>
-      <p:sp>
-        <p:nvSpPr>
-          <p:cNvPr id="29" name="Text 27"/>
-          <p:cNvSpPr/>
-          <p:nvPr/>
-        </p:nvSpPr>
-        <p:spPr>
-          <a:xfrm>
-            <a:off x="6589624" y="4315968"/>
-            <a:ext cx="4632808" cy="548640"/>
-          </a:xfrm>
-          <a:prstGeom prst="rect">
-            <a:avLst/>
-          </a:prstGeom>
-          <a:noFill/>
-          <a:ln/>
-        </p:spPr>
-        <p:txBody>
-          <a:bodyPr wrap="square" lIns="0" tIns="0" rIns="0" bIns="0" rtlCol="0" anchor="t"/>
-          <a:lstStyle/>
-          <a:p>
-            <a:pPr indent="0" marL="0">
-              <a:lnSpc>
-                <a:spcPts val="1650"/>
-              </a:lnSpc>
-              <a:buNone/>
-            </a:pPr>
-            <a:r>
-              <a:rPr lang="en-US" sz="1150" dirty="0">
-                <a:solidFill>
-                  <a:srgbClr val="4E5F70"/>
-                </a:solidFill>
-                <a:latin typeface="Arial" pitchFamily="34" charset="0"/>
-                <a:ea typeface="Microsoft JhengHei"/>
-                <a:cs typeface="Microsoft JhengHei"/>
-                <a:ea typeface="Arial" pitchFamily="34" charset="-122"/>
-                <a:cs typeface="Arial" pitchFamily="34" charset="-120"/>
-              </a:rPr>
-              <a:t>資訊類採購必會辦。文件我已備齊，希望送簽前先與他們對過一次。</a:t>
-            </a:r>
-            <a:endParaRPr lang="en-US" sz="1150" dirty="0"/>
+              <a:t>　它零採購、零風險，而且組長會直接看到系統吃了貴組真實的契約與標單之後長什麼樣子，再決定要不要往下走。這一步我這邊不收費，也不需要貴組跑任何程序。</a:t>
+            </a:r>
+            <a:endParaRPr lang="en-US" sz="1250" dirty="0"/>
           </a:p>
         </p:txBody>
       </p:sp>
@@ -17711,7 +18332,7 @@
                 <a:ea typeface="Arial" pitchFamily="34" charset="-122"/>
                 <a:cs typeface="Arial" pitchFamily="34" charset="-120"/>
               </a:rPr>
-              <a:t>簽辦怎麼走</a:t>
+              <a:t>行政面怎麼走</a:t>
             </a:r>
             <a:endParaRPr lang="en-US" sz="1700" dirty="0"/>
           </a:p>
@@ -17755,7 +18376,7 @@
                 <a:ea typeface="Arial" pitchFamily="34" charset="-122"/>
                 <a:cs typeface="Arial" pitchFamily="34" charset="-120"/>
               </a:rPr>
-              <a:t>已確定的事、履約期間與驗收時點、服務承諾、簽稿骨架、七份附件、會辦動線。</a:t>
+              <a:t>合作可以從很小開始、行政面我先查過的事、屆時的驗收方式、會寫進契約的服務承諾、文件現況。</a:t>
             </a:r>
             <a:endParaRPr lang="en-US" sz="1100" dirty="0"/>
           </a:p>
@@ -17826,7 +18447,7 @@
                 <a:ea typeface="Arial" pitchFamily="34" charset="-122"/>
                 <a:cs typeface="Arial" pitchFamily="34" charset="-120"/>
               </a:rPr>
-              <a:t>先說結論：資安不是這個案子的風險，歸類才是。</a:t>
+              <a:t>這份是接續 8 月 12 日談話的書面整理，供組長參考。</a:t>
             </a:r>
             <a:pPr indent="0" marL="0">
               <a:lnSpc>
@@ -17845,7 +18466,7 @@
                 <a:ea typeface="Arial" pitchFamily="34" charset="-122"/>
                 <a:cs typeface="Arial" pitchFamily="34" charset="-120"/>
               </a:rPr>
-              <a:t>　同一套系統歸到不同的表，普級要求差好幾倍——所以第貳部分的第一頁在講歸類，不是在講技術。</a:t>
+              <a:t>　第參部分是行政面的整理，不是要請組長現在決定什麼；有哪一頁與貴校實務不符，請直接指正。</a:t>
             </a:r>
             <a:endParaRPr lang="en-US" sz="1300" dirty="0"/>
           </a:p>
@@ -17918,7 +18539,7 @@
                 <a:ea typeface="Arial" pitchFamily="34" charset="-122"/>
                 <a:cs typeface="Arial" pitchFamily="34" charset="-120"/>
               </a:rPr>
-              <a:t>參 · 簽辦</a:t>
+              <a:t>參 · 行政</a:t>
             </a:r>
             <a:endParaRPr lang="en-US" sz="900" dirty="0"/>
           </a:p>
@@ -18000,7 +18621,7 @@
                 <a:ea typeface="Arial" pitchFamily="34" charset="-122"/>
                 <a:cs typeface="Arial" pitchFamily="34" charset="-120"/>
               </a:rPr>
-              <a:t>要決定的第一件事</a:t>
+              <a:t>行政面</a:t>
             </a:r>
             <a:endParaRPr lang="en-US" sz="950" dirty="0"/>
           </a:p>
@@ -18031,7 +18652,7 @@
               <a:buNone/>
             </a:pPr>
             <a:r>
-              <a:rPr lang="en-US" sz="3100" b="1" dirty="0">
+              <a:rPr lang="en-US" sz="2700" b="1" dirty="0">
                 <a:solidFill>
                   <a:srgbClr val="1D2B39"/>
                 </a:solidFill>
@@ -18041,26 +18662,67 @@
                 <a:ea typeface="Arial" pitchFamily="34" charset="-122"/>
                 <a:cs typeface="Arial" pitchFamily="34" charset="-120"/>
               </a:rPr>
-              <a:t>簽要簽到什麼時候驗收。</a:t>
-            </a:r>
-            <a:endParaRPr lang="en-US" sz="3100" dirty="0"/>
-          </a:p>
-        </p:txBody>
-      </p:sp>
-      <p:sp>
-        <p:nvSpPr>
-          <p:cNvPr id="6" name="Shape 4"/>
-          <p:cNvSpPr/>
-          <p:nvPr/>
-        </p:nvSpPr>
-        <p:spPr>
-          <a:xfrm>
-            <a:off x="658368" y="1481328"/>
-            <a:ext cx="10874959" cy="713232"/>
+              <a:t>若走到第四格，這些我先查過了。</a:t>
+            </a:r>
+            <a:endParaRPr lang="en-US" sz="2700" dirty="0"/>
+          </a:p>
+        </p:txBody>
+      </p:sp>
+      <p:sp>
+        <p:nvSpPr>
+          <p:cNvPr id="6" name="Text 4"/>
+          <p:cNvSpPr/>
+          <p:nvPr/>
+        </p:nvSpPr>
+        <p:spPr>
+          <a:xfrm>
+            <a:off x="658368" y="1444752"/>
+            <a:ext cx="10874959" cy="274320"/>
+          </a:xfrm>
+          <a:prstGeom prst="rect">
+            <a:avLst/>
+          </a:prstGeom>
+          <a:noFill/>
+          <a:ln/>
+        </p:spPr>
+        <p:txBody>
+          <a:bodyPr wrap="square" lIns="0" tIns="0" rIns="0" bIns="0" rtlCol="0" anchor="ctr"/>
+          <a:lstStyle/>
+          <a:p>
+            <a:pPr indent="0" marL="0">
+              <a:buNone/>
+            </a:pPr>
+            <a:r>
+              <a:rPr lang="en-US" sz="1150" dirty="0">
+                <a:solidFill>
+                  <a:srgbClr val="7A8794"/>
+                </a:solidFill>
+                <a:latin typeface="Arial" pitchFamily="34" charset="0"/>
+                <a:ea typeface="Microsoft JhengHei"/>
+                <a:cs typeface="Microsoft JhengHei"/>
+                <a:ea typeface="Arial" pitchFamily="34" charset="-122"/>
+                <a:cs typeface="Arial" pitchFamily="34" charset="-120"/>
+              </a:rPr>
+              <a:t>以下是我方查證與理解，供組長參考；如與貴校實務有出入，請直接指正，我照貴組的做法調整。</a:t>
+            </a:r>
+            <a:endParaRPr lang="en-US" sz="1150" dirty="0"/>
+          </a:p>
+        </p:txBody>
+      </p:sp>
+      <p:sp>
+        <p:nvSpPr>
+          <p:cNvPr id="7" name="Shape 5"/>
+          <p:cNvSpPr/>
+          <p:nvPr/>
+        </p:nvSpPr>
+        <p:spPr>
+          <a:xfrm>
+            <a:off x="658368" y="1810512"/>
+            <a:ext cx="2513000" cy="1572768"/>
           </a:xfrm>
           <a:prstGeom prst="roundRect">
             <a:avLst>
-              <a:gd name="adj" fmla="val 4487"/>
+              <a:gd name="adj" fmla="val 2035"/>
             </a:avLst>
           </a:prstGeom>
           <a:solidFill>
@@ -18072,17 +18734,1717 @@
             </a:solidFill>
             <a:prstDash val="solid"/>
           </a:ln>
-        </p:spPr>
-      </p:sp>
-      <p:sp>
-        <p:nvSpPr>
-          <p:cNvPr id="7" name="Text 5"/>
-          <p:cNvSpPr/>
-          <p:nvPr/>
-        </p:nvSpPr>
-        <p:spPr>
-          <a:xfrm>
-            <a:off x="896112" y="1536192"/>
+          <a:effectLst>
+            <a:outerShdw sx="100000" sy="100000" kx="0" ky="0" algn="bl" rotWithShape="0" blurRad="88900" dist="445" dir="5400000">
+              <a:srgbClr val="93A3B2">
+                <a:alpha val="16000"/>
+              </a:srgbClr>
+            </a:outerShdw>
+          </a:effectLst>
+        </p:spPr>
+      </p:sp>
+      <p:sp>
+        <p:nvSpPr>
+          <p:cNvPr id="8" name="Text 6"/>
+          <p:cNvSpPr/>
+          <p:nvPr/>
+        </p:nvSpPr>
+        <p:spPr>
+          <a:xfrm>
+            <a:off x="877824" y="1938528"/>
+            <a:ext cx="694944" cy="237744"/>
+          </a:xfrm>
+          <a:prstGeom prst="roundRect">
+            <a:avLst>
+              <a:gd name="adj" fmla="val 11538"/>
+            </a:avLst>
+          </a:prstGeom>
+          <a:solidFill>
+            <a:srgbClr val="E4EDF5"/>
+          </a:solidFill>
+          <a:ln>
+            <a:solidFill>
+              <a:srgbClr val="E4EDF5"/>
+            </a:solidFill>
+          </a:ln>
+        </p:spPr>
+        <p:txBody>
+          <a:bodyPr wrap="square" lIns="0" tIns="0" rIns="0" bIns="0" rtlCol="0" anchor="ctr"/>
+          <a:lstStyle/>
+          <a:p>
+            <a:pPr algn="ctr" indent="0" marL="0">
+              <a:buNone/>
+            </a:pPr>
+            <a:r>
+              <a:rPr lang="en-US" sz="900" b="1" spc="60" kern="0" dirty="0">
+                <a:solidFill>
+                  <a:srgbClr val="1B5480"/>
+                </a:solidFill>
+                <a:latin typeface="Arial" pitchFamily="34" charset="0"/>
+                <a:ea typeface="Microsoft JhengHei"/>
+                <a:cs typeface="Microsoft JhengHei"/>
+                <a:ea typeface="Arial" pitchFamily="34" charset="-122"/>
+                <a:cs typeface="Arial" pitchFamily="34" charset="-120"/>
+              </a:rPr>
+              <a:t>採購方式</a:t>
+            </a:r>
+            <a:endParaRPr lang="en-US" sz="900" dirty="0"/>
+          </a:p>
+        </p:txBody>
+      </p:sp>
+      <p:sp>
+        <p:nvSpPr>
+          <p:cNvPr id="9" name="Text 7"/>
+          <p:cNvSpPr/>
+          <p:nvPr/>
+        </p:nvSpPr>
+        <p:spPr>
+          <a:xfrm>
+            <a:off x="877824" y="2249424"/>
+            <a:ext cx="2074088" cy="274320"/>
+          </a:xfrm>
+          <a:prstGeom prst="rect">
+            <a:avLst/>
+          </a:prstGeom>
+          <a:noFill/>
+          <a:ln/>
+        </p:spPr>
+        <p:txBody>
+          <a:bodyPr wrap="square" lIns="0" tIns="0" rIns="0" bIns="0" rtlCol="0" anchor="ctr"/>
+          <a:lstStyle/>
+          <a:p>
+            <a:pPr indent="0" marL="0">
+              <a:buNone/>
+            </a:pPr>
+            <a:r>
+              <a:rPr lang="en-US" sz="1450" b="1" dirty="0">
+                <a:solidFill>
+                  <a:srgbClr val="1D2B39"/>
+                </a:solidFill>
+                <a:latin typeface="Arial" pitchFamily="34" charset="0"/>
+                <a:ea typeface="Microsoft JhengHei"/>
+                <a:cs typeface="Microsoft JhengHei"/>
+                <a:ea typeface="Arial" pitchFamily="34" charset="-122"/>
+                <a:cs typeface="Arial" pitchFamily="34" charset="-120"/>
+              </a:rPr>
+              <a:t>小額採購逕洽</a:t>
+            </a:r>
+            <a:endParaRPr lang="en-US" sz="1450" dirty="0"/>
+          </a:p>
+        </p:txBody>
+      </p:sp>
+      <p:sp>
+        <p:nvSpPr>
+          <p:cNvPr id="10" name="Text 8"/>
+          <p:cNvSpPr/>
+          <p:nvPr/>
+        </p:nvSpPr>
+        <p:spPr>
+          <a:xfrm>
+            <a:off x="877824" y="2551176"/>
+            <a:ext cx="2074088" cy="685800"/>
+          </a:xfrm>
+          <a:prstGeom prst="rect">
+            <a:avLst/>
+          </a:prstGeom>
+          <a:noFill/>
+          <a:ln/>
+        </p:spPr>
+        <p:txBody>
+          <a:bodyPr wrap="square" lIns="0" tIns="0" rIns="0" bIns="0" rtlCol="0" anchor="t"/>
+          <a:lstStyle/>
+          <a:p>
+            <a:pPr indent="0" marL="0">
+              <a:lnSpc>
+                <a:spcPts val="1512"/>
+              </a:lnSpc>
+              <a:buNone/>
+            </a:pPr>
+            <a:r>
+              <a:rPr lang="en-US" sz="1050" dirty="0">
+                <a:solidFill>
+                  <a:srgbClr val="4E5F70"/>
+                </a:solidFill>
+                <a:latin typeface="Arial" pitchFamily="34" charset="0"/>
+                <a:ea typeface="Microsoft JhengHei"/>
+                <a:cs typeface="Microsoft JhengHei"/>
+                <a:ea typeface="Arial" pitchFamily="34" charset="-122"/>
+                <a:cs typeface="Arial" pitchFamily="34" charset="-120"/>
+              </a:rPr>
+              <a:t>15 萬元以下，得不經公告程序逕洽廠商，免提供報價或企劃書，亦無須三家比價。</a:t>
+            </a:r>
+            <a:endParaRPr lang="en-US" sz="1050" dirty="0"/>
+          </a:p>
+        </p:txBody>
+      </p:sp>
+      <p:sp>
+        <p:nvSpPr>
+          <p:cNvPr id="11" name="Shape 9"/>
+          <p:cNvSpPr/>
+          <p:nvPr/>
+        </p:nvSpPr>
+        <p:spPr>
+          <a:xfrm>
+            <a:off x="3445688" y="1810512"/>
+            <a:ext cx="2513000" cy="1572768"/>
+          </a:xfrm>
+          <a:prstGeom prst="roundRect">
+            <a:avLst>
+              <a:gd name="adj" fmla="val 2035"/>
+            </a:avLst>
+          </a:prstGeom>
+          <a:solidFill>
+            <a:srgbClr val="FFFFFF"/>
+          </a:solidFill>
+          <a:ln w="9525">
+            <a:solidFill>
+              <a:srgbClr val="E6EBF0"/>
+            </a:solidFill>
+            <a:prstDash val="solid"/>
+          </a:ln>
+          <a:effectLst>
+            <a:outerShdw sx="100000" sy="100000" kx="0" ky="0" algn="bl" rotWithShape="0" blurRad="88900" dist="445" dir="5400000">
+              <a:srgbClr val="93A3B2">
+                <a:alpha val="16000"/>
+              </a:srgbClr>
+            </a:outerShdw>
+          </a:effectLst>
+        </p:spPr>
+      </p:sp>
+      <p:sp>
+        <p:nvSpPr>
+          <p:cNvPr id="12" name="Text 10"/>
+          <p:cNvSpPr/>
+          <p:nvPr/>
+        </p:nvSpPr>
+        <p:spPr>
+          <a:xfrm>
+            <a:off x="3665144" y="1938528"/>
+            <a:ext cx="694944" cy="237744"/>
+          </a:xfrm>
+          <a:prstGeom prst="roundRect">
+            <a:avLst>
+              <a:gd name="adj" fmla="val 11538"/>
+            </a:avLst>
+          </a:prstGeom>
+          <a:solidFill>
+            <a:srgbClr val="E4EDF5"/>
+          </a:solidFill>
+          <a:ln>
+            <a:solidFill>
+              <a:srgbClr val="E4EDF5"/>
+            </a:solidFill>
+          </a:ln>
+        </p:spPr>
+        <p:txBody>
+          <a:bodyPr wrap="square" lIns="0" tIns="0" rIns="0" bIns="0" rtlCol="0" anchor="ctr"/>
+          <a:lstStyle/>
+          <a:p>
+            <a:pPr algn="ctr" indent="0" marL="0">
+              <a:buNone/>
+            </a:pPr>
+            <a:r>
+              <a:rPr lang="en-US" sz="900" b="1" spc="60" kern="0" dirty="0">
+                <a:solidFill>
+                  <a:srgbClr val="1B5480"/>
+                </a:solidFill>
+                <a:latin typeface="Arial" pitchFamily="34" charset="0"/>
+                <a:ea typeface="Microsoft JhengHei"/>
+                <a:cs typeface="Microsoft JhengHei"/>
+                <a:ea typeface="Arial" pitchFamily="34" charset="-122"/>
+                <a:cs typeface="Arial" pitchFamily="34" charset="-120"/>
+              </a:rPr>
+              <a:t>核定層級</a:t>
+            </a:r>
+            <a:endParaRPr lang="en-US" sz="900" dirty="0"/>
+          </a:p>
+        </p:txBody>
+      </p:sp>
+      <p:sp>
+        <p:nvSpPr>
+          <p:cNvPr id="13" name="Text 11"/>
+          <p:cNvSpPr/>
+          <p:nvPr/>
+        </p:nvSpPr>
+        <p:spPr>
+          <a:xfrm>
+            <a:off x="3665144" y="2249424"/>
+            <a:ext cx="2074088" cy="274320"/>
+          </a:xfrm>
+          <a:prstGeom prst="rect">
+            <a:avLst/>
+          </a:prstGeom>
+          <a:noFill/>
+          <a:ln/>
+        </p:spPr>
+        <p:txBody>
+          <a:bodyPr wrap="square" lIns="0" tIns="0" rIns="0" bIns="0" rtlCol="0" anchor="ctr"/>
+          <a:lstStyle/>
+          <a:p>
+            <a:pPr indent="0" marL="0">
+              <a:buNone/>
+            </a:pPr>
+            <a:r>
+              <a:rPr lang="en-US" sz="1450" b="1" dirty="0">
+                <a:solidFill>
+                  <a:srgbClr val="1D2B39"/>
+                </a:solidFill>
+                <a:latin typeface="Arial" pitchFamily="34" charset="0"/>
+                <a:ea typeface="Microsoft JhengHei"/>
+                <a:cs typeface="Microsoft JhengHei"/>
+                <a:ea typeface="Arial" pitchFamily="34" charset="-122"/>
+                <a:cs typeface="Arial" pitchFamily="34" charset="-120"/>
+              </a:rPr>
+              <a:t>應在組長權責內</a:t>
+            </a:r>
+            <a:endParaRPr lang="en-US" sz="1450" dirty="0"/>
+          </a:p>
+        </p:txBody>
+      </p:sp>
+      <p:sp>
+        <p:nvSpPr>
+          <p:cNvPr id="14" name="Text 12"/>
+          <p:cNvSpPr/>
+          <p:nvPr/>
+        </p:nvSpPr>
+        <p:spPr>
+          <a:xfrm>
+            <a:off x="3665144" y="2551176"/>
+            <a:ext cx="2074088" cy="685800"/>
+          </a:xfrm>
+          <a:prstGeom prst="rect">
+            <a:avLst/>
+          </a:prstGeom>
+          <a:noFill/>
+          <a:ln/>
+        </p:spPr>
+        <p:txBody>
+          <a:bodyPr wrap="square" lIns="0" tIns="0" rIns="0" bIns="0" rtlCol="0" anchor="t"/>
+          <a:lstStyle/>
+          <a:p>
+            <a:pPr indent="0" marL="0">
+              <a:lnSpc>
+                <a:spcPts val="1512"/>
+              </a:lnSpc>
+              <a:buNone/>
+            </a:pPr>
+            <a:r>
+              <a:rPr lang="en-US" sz="1050" dirty="0">
+                <a:solidFill>
+                  <a:srgbClr val="4E5F70"/>
+                </a:solidFill>
+                <a:latin typeface="Arial" pitchFamily="34" charset="0"/>
+                <a:ea typeface="Microsoft JhengHei"/>
+                <a:cs typeface="Microsoft JhengHei"/>
+                <a:ea typeface="Arial" pitchFamily="34" charset="-122"/>
+                <a:cs typeface="Arial" pitchFamily="34" charset="-120"/>
+              </a:rPr>
+              <a:t>屬小額採購，理解上本組即可核定；實際權責仍以貴校分層負責明細表為準。</a:t>
+            </a:r>
+            <a:endParaRPr lang="en-US" sz="1050" dirty="0"/>
+          </a:p>
+        </p:txBody>
+      </p:sp>
+      <p:sp>
+        <p:nvSpPr>
+          <p:cNvPr id="15" name="Shape 13"/>
+          <p:cNvSpPr/>
+          <p:nvPr/>
+        </p:nvSpPr>
+        <p:spPr>
+          <a:xfrm>
+            <a:off x="6233008" y="1810512"/>
+            <a:ext cx="2513000" cy="1572768"/>
+          </a:xfrm>
+          <a:prstGeom prst="roundRect">
+            <a:avLst>
+              <a:gd name="adj" fmla="val 2035"/>
+            </a:avLst>
+          </a:prstGeom>
+          <a:solidFill>
+            <a:srgbClr val="FFFFFF"/>
+          </a:solidFill>
+          <a:ln w="9525">
+            <a:solidFill>
+              <a:srgbClr val="E6EBF0"/>
+            </a:solidFill>
+            <a:prstDash val="solid"/>
+          </a:ln>
+          <a:effectLst>
+            <a:outerShdw sx="100000" sy="100000" kx="0" ky="0" algn="bl" rotWithShape="0" blurRad="88900" dist="445" dir="5400000">
+              <a:srgbClr val="93A3B2">
+                <a:alpha val="16000"/>
+              </a:srgbClr>
+            </a:outerShdw>
+          </a:effectLst>
+        </p:spPr>
+      </p:sp>
+      <p:sp>
+        <p:nvSpPr>
+          <p:cNvPr id="16" name="Text 14"/>
+          <p:cNvSpPr/>
+          <p:nvPr/>
+        </p:nvSpPr>
+        <p:spPr>
+          <a:xfrm>
+            <a:off x="6452464" y="1938528"/>
+            <a:ext cx="694944" cy="237744"/>
+          </a:xfrm>
+          <a:prstGeom prst="roundRect">
+            <a:avLst>
+              <a:gd name="adj" fmla="val 11538"/>
+            </a:avLst>
+          </a:prstGeom>
+          <a:solidFill>
+            <a:srgbClr val="E4EDF5"/>
+          </a:solidFill>
+          <a:ln>
+            <a:solidFill>
+              <a:srgbClr val="E4EDF5"/>
+            </a:solidFill>
+          </a:ln>
+        </p:spPr>
+        <p:txBody>
+          <a:bodyPr wrap="square" lIns="0" tIns="0" rIns="0" bIns="0" rtlCol="0" anchor="ctr"/>
+          <a:lstStyle/>
+          <a:p>
+            <a:pPr algn="ctr" indent="0" marL="0">
+              <a:buNone/>
+            </a:pPr>
+            <a:r>
+              <a:rPr lang="en-US" sz="900" b="1" spc="60" kern="0" dirty="0">
+                <a:solidFill>
+                  <a:srgbClr val="1B5480"/>
+                </a:solidFill>
+                <a:latin typeface="Arial" pitchFamily="34" charset="0"/>
+                <a:ea typeface="Microsoft JhengHei"/>
+                <a:cs typeface="Microsoft JhengHei"/>
+                <a:ea typeface="Arial" pitchFamily="34" charset="-122"/>
+                <a:cs typeface="Arial" pitchFamily="34" charset="-120"/>
+              </a:rPr>
+              <a:t>財產登記</a:t>
+            </a:r>
+            <a:endParaRPr lang="en-US" sz="900" dirty="0"/>
+          </a:p>
+        </p:txBody>
+      </p:sp>
+      <p:sp>
+        <p:nvSpPr>
+          <p:cNvPr id="17" name="Text 15"/>
+          <p:cNvSpPr/>
+          <p:nvPr/>
+        </p:nvSpPr>
+        <p:spPr>
+          <a:xfrm>
+            <a:off x="6452464" y="2249424"/>
+            <a:ext cx="2074088" cy="274320"/>
+          </a:xfrm>
+          <a:prstGeom prst="rect">
+            <a:avLst/>
+          </a:prstGeom>
+          <a:noFill/>
+          <a:ln/>
+        </p:spPr>
+        <p:txBody>
+          <a:bodyPr wrap="square" lIns="0" tIns="0" rIns="0" bIns="0" rtlCol="0" anchor="ctr"/>
+          <a:lstStyle/>
+          <a:p>
+            <a:pPr indent="0" marL="0">
+              <a:buNone/>
+            </a:pPr>
+            <a:r>
+              <a:rPr lang="en-US" sz="1450" b="1" dirty="0">
+                <a:solidFill>
+                  <a:srgbClr val="1D2B39"/>
+                </a:solidFill>
+                <a:latin typeface="Arial" pitchFamily="34" charset="0"/>
+                <a:ea typeface="Microsoft JhengHei"/>
+                <a:cs typeface="Microsoft JhengHei"/>
+                <a:ea typeface="Arial" pitchFamily="34" charset="-122"/>
+                <a:cs typeface="Arial" pitchFamily="34" charset="-120"/>
+              </a:rPr>
+              <a:t>應不涉財產登記</a:t>
+            </a:r>
+            <a:endParaRPr lang="en-US" sz="1450" dirty="0"/>
+          </a:p>
+        </p:txBody>
+      </p:sp>
+      <p:sp>
+        <p:nvSpPr>
+          <p:cNvPr id="18" name="Text 16"/>
+          <p:cNvSpPr/>
+          <p:nvPr/>
+        </p:nvSpPr>
+        <p:spPr>
+          <a:xfrm>
+            <a:off x="6452464" y="2551176"/>
+            <a:ext cx="2074088" cy="685800"/>
+          </a:xfrm>
+          <a:prstGeom prst="rect">
+            <a:avLst/>
+          </a:prstGeom>
+          <a:noFill/>
+          <a:ln/>
+        </p:spPr>
+        <p:txBody>
+          <a:bodyPr wrap="square" lIns="0" tIns="0" rIns="0" bIns="0" rtlCol="0" anchor="t"/>
+          <a:lstStyle/>
+          <a:p>
+            <a:pPr indent="0" marL="0">
+              <a:lnSpc>
+                <a:spcPts val="1512"/>
+              </a:lnSpc>
+              <a:buNone/>
+            </a:pPr>
+            <a:r>
+              <a:rPr lang="en-US" sz="1050" dirty="0">
+                <a:solidFill>
+                  <a:srgbClr val="4E5F70"/>
+                </a:solidFill>
+                <a:latin typeface="Arial" pitchFamily="34" charset="0"/>
+                <a:ea typeface="Microsoft JhengHei"/>
+                <a:cs typeface="Microsoft JhengHei"/>
+                <a:ea typeface="Arial" pitchFamily="34" charset="-122"/>
+                <a:cs typeface="Arial" pitchFamily="34" charset="-120"/>
+              </a:rPr>
+              <a:t>純訂閱服務，機關未取得軟硬體所有權。</a:t>
+            </a:r>
+            <a:endParaRPr lang="en-US" sz="1050" dirty="0"/>
+          </a:p>
+        </p:txBody>
+      </p:sp>
+      <p:sp>
+        <p:nvSpPr>
+          <p:cNvPr id="19" name="Shape 17"/>
+          <p:cNvSpPr/>
+          <p:nvPr/>
+        </p:nvSpPr>
+        <p:spPr>
+          <a:xfrm>
+            <a:off x="9020327" y="1810512"/>
+            <a:ext cx="2513000" cy="1572768"/>
+          </a:xfrm>
+          <a:prstGeom prst="roundRect">
+            <a:avLst>
+              <a:gd name="adj" fmla="val 2035"/>
+            </a:avLst>
+          </a:prstGeom>
+          <a:solidFill>
+            <a:srgbClr val="FFFFFF"/>
+          </a:solidFill>
+          <a:ln w="9525">
+            <a:solidFill>
+              <a:srgbClr val="E6EBF0"/>
+            </a:solidFill>
+            <a:prstDash val="solid"/>
+          </a:ln>
+          <a:effectLst>
+            <a:outerShdw sx="100000" sy="100000" kx="0" ky="0" algn="bl" rotWithShape="0" blurRad="88900" dist="445" dir="5400000">
+              <a:srgbClr val="93A3B2">
+                <a:alpha val="16000"/>
+              </a:srgbClr>
+            </a:outerShdw>
+          </a:effectLst>
+        </p:spPr>
+      </p:sp>
+      <p:sp>
+        <p:nvSpPr>
+          <p:cNvPr id="20" name="Text 18"/>
+          <p:cNvSpPr/>
+          <p:nvPr/>
+        </p:nvSpPr>
+        <p:spPr>
+          <a:xfrm>
+            <a:off x="9239783" y="1938528"/>
+            <a:ext cx="694944" cy="237744"/>
+          </a:xfrm>
+          <a:prstGeom prst="roundRect">
+            <a:avLst>
+              <a:gd name="adj" fmla="val 11538"/>
+            </a:avLst>
+          </a:prstGeom>
+          <a:solidFill>
+            <a:srgbClr val="E4EDF5"/>
+          </a:solidFill>
+          <a:ln>
+            <a:solidFill>
+              <a:srgbClr val="E4EDF5"/>
+            </a:solidFill>
+          </a:ln>
+        </p:spPr>
+        <p:txBody>
+          <a:bodyPr wrap="square" lIns="0" tIns="0" rIns="0" bIns="0" rtlCol="0" anchor="ctr"/>
+          <a:lstStyle/>
+          <a:p>
+            <a:pPr algn="ctr" indent="0" marL="0">
+              <a:buNone/>
+            </a:pPr>
+            <a:r>
+              <a:rPr lang="en-US" sz="900" b="1" spc="60" kern="0" dirty="0">
+                <a:solidFill>
+                  <a:srgbClr val="1B5480"/>
+                </a:solidFill>
+                <a:latin typeface="Arial" pitchFamily="34" charset="0"/>
+                <a:ea typeface="Microsoft JhengHei"/>
+                <a:cs typeface="Microsoft JhengHei"/>
+                <a:ea typeface="Arial" pitchFamily="34" charset="-122"/>
+                <a:cs typeface="Arial" pitchFamily="34" charset="-120"/>
+              </a:rPr>
+              <a:t>校內規定</a:t>
+            </a:r>
+            <a:endParaRPr lang="en-US" sz="900" dirty="0"/>
+          </a:p>
+        </p:txBody>
+      </p:sp>
+      <p:sp>
+        <p:nvSpPr>
+          <p:cNvPr id="21" name="Text 19"/>
+          <p:cNvSpPr/>
+          <p:nvPr/>
+        </p:nvSpPr>
+        <p:spPr>
+          <a:xfrm>
+            <a:off x="9239783" y="2249424"/>
+            <a:ext cx="2074088" cy="274320"/>
+          </a:xfrm>
+          <a:prstGeom prst="rect">
+            <a:avLst/>
+          </a:prstGeom>
+          <a:noFill/>
+          <a:ln/>
+        </p:spPr>
+        <p:txBody>
+          <a:bodyPr wrap="square" lIns="0" tIns="0" rIns="0" bIns="0" rtlCol="0" anchor="ctr"/>
+          <a:lstStyle/>
+          <a:p>
+            <a:pPr indent="0" marL="0">
+              <a:buNone/>
+            </a:pPr>
+            <a:r>
+              <a:rPr lang="en-US" sz="1450" b="1" dirty="0">
+                <a:solidFill>
+                  <a:srgbClr val="1D2B39"/>
+                </a:solidFill>
+                <a:latin typeface="Arial" pitchFamily="34" charset="0"/>
+                <a:ea typeface="Microsoft JhengHei"/>
+                <a:cs typeface="Microsoft JhengHei"/>
+                <a:ea typeface="Arial" pitchFamily="34" charset="-122"/>
+                <a:cs typeface="Arial" pitchFamily="34" charset="-120"/>
+              </a:rPr>
+              <a:t>未見加嚴規定</a:t>
+            </a:r>
+            <a:endParaRPr lang="en-US" sz="1450" dirty="0"/>
+          </a:p>
+        </p:txBody>
+      </p:sp>
+      <p:sp>
+        <p:nvSpPr>
+          <p:cNvPr id="22" name="Text 20"/>
+          <p:cNvSpPr/>
+          <p:nvPr/>
+        </p:nvSpPr>
+        <p:spPr>
+          <a:xfrm>
+            <a:off x="9239783" y="2551176"/>
+            <a:ext cx="2074088" cy="685800"/>
+          </a:xfrm>
+          <a:prstGeom prst="rect">
+            <a:avLst/>
+          </a:prstGeom>
+          <a:noFill/>
+          <a:ln/>
+        </p:spPr>
+        <p:txBody>
+          <a:bodyPr wrap="square" lIns="0" tIns="0" rIns="0" bIns="0" rtlCol="0" anchor="t"/>
+          <a:lstStyle/>
+          <a:p>
+            <a:pPr indent="0" marL="0">
+              <a:lnSpc>
+                <a:spcPts val="1512"/>
+              </a:lnSpc>
+              <a:buNone/>
+            </a:pPr>
+            <a:r>
+              <a:rPr lang="en-US" sz="1050" dirty="0">
+                <a:solidFill>
+                  <a:srgbClr val="4E5F70"/>
+                </a:solidFill>
+                <a:latin typeface="Arial" pitchFamily="34" charset="0"/>
+                <a:ea typeface="Microsoft JhengHei"/>
+                <a:cs typeface="Microsoft JhengHei"/>
+                <a:ea typeface="Arial" pitchFamily="34" charset="-122"/>
+                <a:cs typeface="Arial" pitchFamily="34" charset="-120"/>
+              </a:rPr>
+              <a:t>查詢所得貴校對 15 萬以下無額外加嚴要求；若有內規請組長告知。</a:t>
+            </a:r>
+            <a:endParaRPr lang="en-US" sz="1050" dirty="0"/>
+          </a:p>
+        </p:txBody>
+      </p:sp>
+      <p:sp>
+        <p:nvSpPr>
+          <p:cNvPr id="23" name="Text 21"/>
+          <p:cNvSpPr/>
+          <p:nvPr/>
+        </p:nvSpPr>
+        <p:spPr>
+          <a:xfrm>
+            <a:off x="658368" y="3584448"/>
+            <a:ext cx="10874959" cy="274320"/>
+          </a:xfrm>
+          <a:prstGeom prst="rect">
+            <a:avLst/>
+          </a:prstGeom>
+          <a:noFill/>
+          <a:ln/>
+        </p:spPr>
+        <p:txBody>
+          <a:bodyPr wrap="square" lIns="0" tIns="0" rIns="0" bIns="0" rtlCol="0" anchor="ctr"/>
+          <a:lstStyle/>
+          <a:p>
+            <a:pPr indent="0" marL="0">
+              <a:buNone/>
+            </a:pPr>
+            <a:r>
+              <a:rPr lang="en-US" sz="1450" b="1" dirty="0">
+                <a:solidFill>
+                  <a:srgbClr val="1D2B39"/>
+                </a:solidFill>
+                <a:latin typeface="Arial" pitchFamily="34" charset="0"/>
+                <a:ea typeface="Microsoft JhengHei"/>
+                <a:cs typeface="Microsoft JhengHei"/>
+                <a:ea typeface="Arial" pitchFamily="34" charset="-122"/>
+                <a:cs typeface="Arial" pitchFamily="34" charset="-120"/>
+              </a:rPr>
+              <a:t>會辦動線</a:t>
+            </a:r>
+            <a:endParaRPr lang="en-US" sz="1450" dirty="0"/>
+          </a:p>
+        </p:txBody>
+      </p:sp>
+      <p:sp>
+        <p:nvSpPr>
+          <p:cNvPr id="24" name="Shape 22"/>
+          <p:cNvSpPr/>
+          <p:nvPr/>
+        </p:nvSpPr>
+        <p:spPr>
+          <a:xfrm>
+            <a:off x="658368" y="3913632"/>
+            <a:ext cx="1926275" cy="804672"/>
+          </a:xfrm>
+          <a:prstGeom prst="roundRect">
+            <a:avLst>
+              <a:gd name="adj" fmla="val 3977"/>
+            </a:avLst>
+          </a:prstGeom>
+          <a:solidFill>
+            <a:srgbClr val="FFFFFF"/>
+          </a:solidFill>
+          <a:ln w="9525">
+            <a:solidFill>
+              <a:srgbClr val="E6EBF0"/>
+            </a:solidFill>
+            <a:prstDash val="solid"/>
+          </a:ln>
+        </p:spPr>
+      </p:sp>
+      <p:sp>
+        <p:nvSpPr>
+          <p:cNvPr id="25" name="Text 23"/>
+          <p:cNvSpPr/>
+          <p:nvPr/>
+        </p:nvSpPr>
+        <p:spPr>
+          <a:xfrm>
+            <a:off x="658368" y="4032504"/>
+            <a:ext cx="1926275" cy="201168"/>
+          </a:xfrm>
+          <a:prstGeom prst="rect">
+            <a:avLst/>
+          </a:prstGeom>
+          <a:noFill/>
+          <a:ln/>
+        </p:spPr>
+        <p:txBody>
+          <a:bodyPr wrap="square" lIns="0" tIns="0" rIns="0" bIns="0" rtlCol="0" anchor="ctr"/>
+          <a:lstStyle/>
+          <a:p>
+            <a:pPr algn="ctr" indent="0" marL="0">
+              <a:buNone/>
+            </a:pPr>
+            <a:r>
+              <a:rPr lang="en-US" sz="850" b="1" spc="140" kern="0" dirty="0">
+                <a:solidFill>
+                  <a:srgbClr val="7A8794"/>
+                </a:solidFill>
+                <a:latin typeface="Arial" pitchFamily="34" charset="0"/>
+                <a:ea typeface="Microsoft JhengHei"/>
+                <a:cs typeface="Microsoft JhengHei"/>
+                <a:ea typeface="Arial" pitchFamily="34" charset="-122"/>
+                <a:cs typeface="Arial" pitchFamily="34" charset="-120"/>
+              </a:rPr>
+              <a:t>使用單位</a:t>
+            </a:r>
+            <a:endParaRPr lang="en-US" sz="850" dirty="0"/>
+          </a:p>
+        </p:txBody>
+      </p:sp>
+      <p:sp>
+        <p:nvSpPr>
+          <p:cNvPr id="26" name="Text 24"/>
+          <p:cNvSpPr/>
+          <p:nvPr/>
+        </p:nvSpPr>
+        <p:spPr>
+          <a:xfrm>
+            <a:off x="658368" y="4251960"/>
+            <a:ext cx="1926275" cy="310896"/>
+          </a:xfrm>
+          <a:prstGeom prst="rect">
+            <a:avLst/>
+          </a:prstGeom>
+          <a:noFill/>
+          <a:ln/>
+        </p:spPr>
+        <p:txBody>
+          <a:bodyPr wrap="square" lIns="0" tIns="0" rIns="0" bIns="0" rtlCol="0" anchor="ctr"/>
+          <a:lstStyle/>
+          <a:p>
+            <a:pPr algn="ctr" indent="0" marL="0">
+              <a:buNone/>
+            </a:pPr>
+            <a:r>
+              <a:rPr lang="en-US" sz="1350" b="1" dirty="0">
+                <a:solidFill>
+                  <a:srgbClr val="1D2B39"/>
+                </a:solidFill>
+                <a:latin typeface="Arial" pitchFamily="34" charset="0"/>
+                <a:ea typeface="Microsoft JhengHei"/>
+                <a:cs typeface="Microsoft JhengHei"/>
+                <a:ea typeface="Arial" pitchFamily="34" charset="-122"/>
+                <a:cs typeface="Arial" pitchFamily="34" charset="-120"/>
+              </a:rPr>
+              <a:t>營繕組擬簽</a:t>
+            </a:r>
+            <a:endParaRPr lang="en-US" sz="1350" dirty="0"/>
+          </a:p>
+        </p:txBody>
+      </p:sp>
+      <p:sp>
+        <p:nvSpPr>
+          <p:cNvPr id="27" name="Shape 25"/>
+          <p:cNvSpPr/>
+          <p:nvPr/>
+        </p:nvSpPr>
+        <p:spPr>
+          <a:xfrm>
+            <a:off x="2639507" y="4315968"/>
+            <a:ext cx="201168" cy="0"/>
+          </a:xfrm>
+          <a:prstGeom prst="line">
+            <a:avLst/>
+          </a:prstGeom>
+          <a:noFill/>
+          <a:ln w="15875">
+            <a:solidFill>
+              <a:srgbClr val="1E5A85"/>
+            </a:solidFill>
+            <a:prstDash val="solid"/>
+            <a:tailEnd type="triangle"/>
+          </a:ln>
+        </p:spPr>
+      </p:sp>
+      <p:sp>
+        <p:nvSpPr>
+          <p:cNvPr id="28" name="Shape 26"/>
+          <p:cNvSpPr/>
+          <p:nvPr/>
+        </p:nvSpPr>
+        <p:spPr>
+          <a:xfrm>
+            <a:off x="2895539" y="3913632"/>
+            <a:ext cx="1926275" cy="804672"/>
+          </a:xfrm>
+          <a:prstGeom prst="roundRect">
+            <a:avLst>
+              <a:gd name="adj" fmla="val 3977"/>
+            </a:avLst>
+          </a:prstGeom>
+          <a:solidFill>
+            <a:srgbClr val="FCE9DC"/>
+          </a:solidFill>
+          <a:ln w="19050">
+            <a:solidFill>
+              <a:srgbClr val="E8630C"/>
+            </a:solidFill>
+            <a:prstDash val="solid"/>
+          </a:ln>
+        </p:spPr>
+      </p:sp>
+      <p:sp>
+        <p:nvSpPr>
+          <p:cNvPr id="29" name="Text 27"/>
+          <p:cNvSpPr/>
+          <p:nvPr/>
+        </p:nvSpPr>
+        <p:spPr>
+          <a:xfrm>
+            <a:off x="2895539" y="4032504"/>
+            <a:ext cx="1926275" cy="201168"/>
+          </a:xfrm>
+          <a:prstGeom prst="rect">
+            <a:avLst/>
+          </a:prstGeom>
+          <a:noFill/>
+          <a:ln/>
+        </p:spPr>
+        <p:txBody>
+          <a:bodyPr wrap="square" lIns="0" tIns="0" rIns="0" bIns="0" rtlCol="0" anchor="ctr"/>
+          <a:lstStyle/>
+          <a:p>
+            <a:pPr algn="ctr" indent="0" marL="0">
+              <a:buNone/>
+            </a:pPr>
+            <a:r>
+              <a:rPr lang="en-US" sz="850" b="1" spc="140" kern="0" dirty="0">
+                <a:solidFill>
+                  <a:srgbClr val="C05209"/>
+                </a:solidFill>
+                <a:latin typeface="Arial" pitchFamily="34" charset="0"/>
+                <a:ea typeface="Microsoft JhengHei"/>
+                <a:cs typeface="Microsoft JhengHei"/>
+                <a:ea typeface="Arial" pitchFamily="34" charset="-122"/>
+                <a:cs typeface="Arial" pitchFamily="34" charset="-120"/>
+              </a:rPr>
+              <a:t>會辦 · 資安</a:t>
+            </a:r>
+            <a:endParaRPr lang="en-US" sz="850" dirty="0"/>
+          </a:p>
+        </p:txBody>
+      </p:sp>
+      <p:sp>
+        <p:nvSpPr>
+          <p:cNvPr id="30" name="Text 28"/>
+          <p:cNvSpPr/>
+          <p:nvPr/>
+        </p:nvSpPr>
+        <p:spPr>
+          <a:xfrm>
+            <a:off x="2895539" y="4251960"/>
+            <a:ext cx="1926275" cy="310896"/>
+          </a:xfrm>
+          <a:prstGeom prst="rect">
+            <a:avLst/>
+          </a:prstGeom>
+          <a:noFill/>
+          <a:ln/>
+        </p:spPr>
+        <p:txBody>
+          <a:bodyPr wrap="square" lIns="0" tIns="0" rIns="0" bIns="0" rtlCol="0" anchor="ctr"/>
+          <a:lstStyle/>
+          <a:p>
+            <a:pPr algn="ctr" indent="0" marL="0">
+              <a:buNone/>
+            </a:pPr>
+            <a:r>
+              <a:rPr lang="en-US" sz="1350" b="1" dirty="0">
+                <a:solidFill>
+                  <a:srgbClr val="1D2B39"/>
+                </a:solidFill>
+                <a:latin typeface="Arial" pitchFamily="34" charset="0"/>
+                <a:ea typeface="Microsoft JhengHei"/>
+                <a:cs typeface="Microsoft JhengHei"/>
+                <a:ea typeface="Arial" pitchFamily="34" charset="-122"/>
+                <a:cs typeface="Arial" pitchFamily="34" charset="-120"/>
+              </a:rPr>
+              <a:t>電子計算機中心</a:t>
+            </a:r>
+            <a:endParaRPr lang="en-US" sz="1350" dirty="0"/>
+          </a:p>
+        </p:txBody>
+      </p:sp>
+      <p:sp>
+        <p:nvSpPr>
+          <p:cNvPr id="31" name="Shape 29"/>
+          <p:cNvSpPr/>
+          <p:nvPr/>
+        </p:nvSpPr>
+        <p:spPr>
+          <a:xfrm>
+            <a:off x="4876678" y="4315968"/>
+            <a:ext cx="201168" cy="0"/>
+          </a:xfrm>
+          <a:prstGeom prst="line">
+            <a:avLst/>
+          </a:prstGeom>
+          <a:noFill/>
+          <a:ln w="15875">
+            <a:solidFill>
+              <a:srgbClr val="1E5A85"/>
+            </a:solidFill>
+            <a:prstDash val="solid"/>
+            <a:tailEnd type="triangle"/>
+          </a:ln>
+        </p:spPr>
+      </p:sp>
+      <p:sp>
+        <p:nvSpPr>
+          <p:cNvPr id="32" name="Shape 30"/>
+          <p:cNvSpPr/>
+          <p:nvPr/>
+        </p:nvSpPr>
+        <p:spPr>
+          <a:xfrm>
+            <a:off x="5132710" y="3913632"/>
+            <a:ext cx="1926275" cy="804672"/>
+          </a:xfrm>
+          <a:prstGeom prst="roundRect">
+            <a:avLst>
+              <a:gd name="adj" fmla="val 3977"/>
+            </a:avLst>
+          </a:prstGeom>
+          <a:solidFill>
+            <a:srgbClr val="FFFFFF"/>
+          </a:solidFill>
+          <a:ln w="9525">
+            <a:solidFill>
+              <a:srgbClr val="E6EBF0"/>
+            </a:solidFill>
+            <a:prstDash val="solid"/>
+          </a:ln>
+        </p:spPr>
+      </p:sp>
+      <p:sp>
+        <p:nvSpPr>
+          <p:cNvPr id="33" name="Text 31"/>
+          <p:cNvSpPr/>
+          <p:nvPr/>
+        </p:nvSpPr>
+        <p:spPr>
+          <a:xfrm>
+            <a:off x="5132710" y="4032504"/>
+            <a:ext cx="1926275" cy="201168"/>
+          </a:xfrm>
+          <a:prstGeom prst="rect">
+            <a:avLst/>
+          </a:prstGeom>
+          <a:noFill/>
+          <a:ln/>
+        </p:spPr>
+        <p:txBody>
+          <a:bodyPr wrap="square" lIns="0" tIns="0" rIns="0" bIns="0" rtlCol="0" anchor="ctr"/>
+          <a:lstStyle/>
+          <a:p>
+            <a:pPr algn="ctr" indent="0" marL="0">
+              <a:buNone/>
+            </a:pPr>
+            <a:r>
+              <a:rPr lang="en-US" sz="850" b="1" spc="140" kern="0" dirty="0">
+                <a:solidFill>
+                  <a:srgbClr val="7A8794"/>
+                </a:solidFill>
+                <a:latin typeface="Arial" pitchFamily="34" charset="0"/>
+                <a:ea typeface="Microsoft JhengHei"/>
+                <a:cs typeface="Microsoft JhengHei"/>
+                <a:ea typeface="Arial" pitchFamily="34" charset="-122"/>
+                <a:cs typeface="Arial" pitchFamily="34" charset="-120"/>
+              </a:rPr>
+              <a:t>會辦 · 個資</a:t>
+            </a:r>
+            <a:endParaRPr lang="en-US" sz="850" dirty="0"/>
+          </a:p>
+        </p:txBody>
+      </p:sp>
+      <p:sp>
+        <p:nvSpPr>
+          <p:cNvPr id="34" name="Text 32"/>
+          <p:cNvSpPr/>
+          <p:nvPr/>
+        </p:nvSpPr>
+        <p:spPr>
+          <a:xfrm>
+            <a:off x="5132710" y="4251960"/>
+            <a:ext cx="1926275" cy="310896"/>
+          </a:xfrm>
+          <a:prstGeom prst="rect">
+            <a:avLst/>
+          </a:prstGeom>
+          <a:noFill/>
+          <a:ln/>
+        </p:spPr>
+        <p:txBody>
+          <a:bodyPr wrap="square" lIns="0" tIns="0" rIns="0" bIns="0" rtlCol="0" anchor="ctr"/>
+          <a:lstStyle/>
+          <a:p>
+            <a:pPr algn="ctr" indent="0" marL="0">
+              <a:buNone/>
+            </a:pPr>
+            <a:r>
+              <a:rPr lang="en-US" sz="1350" b="1" dirty="0">
+                <a:solidFill>
+                  <a:srgbClr val="1D2B39"/>
+                </a:solidFill>
+                <a:latin typeface="Arial" pitchFamily="34" charset="0"/>
+                <a:ea typeface="Microsoft JhengHei"/>
+                <a:cs typeface="Microsoft JhengHei"/>
+                <a:ea typeface="Arial" pitchFamily="34" charset="-122"/>
+                <a:cs typeface="Arial" pitchFamily="34" charset="-120"/>
+              </a:rPr>
+              <a:t>個資／法制單位</a:t>
+            </a:r>
+            <a:endParaRPr lang="en-US" sz="1350" dirty="0"/>
+          </a:p>
+        </p:txBody>
+      </p:sp>
+      <p:sp>
+        <p:nvSpPr>
+          <p:cNvPr id="35" name="Shape 33"/>
+          <p:cNvSpPr/>
+          <p:nvPr/>
+        </p:nvSpPr>
+        <p:spPr>
+          <a:xfrm>
+            <a:off x="7113849" y="4315968"/>
+            <a:ext cx="201168" cy="0"/>
+          </a:xfrm>
+          <a:prstGeom prst="line">
+            <a:avLst/>
+          </a:prstGeom>
+          <a:noFill/>
+          <a:ln w="15875">
+            <a:solidFill>
+              <a:srgbClr val="1E5A85"/>
+            </a:solidFill>
+            <a:prstDash val="solid"/>
+            <a:tailEnd type="triangle"/>
+          </a:ln>
+        </p:spPr>
+      </p:sp>
+      <p:sp>
+        <p:nvSpPr>
+          <p:cNvPr id="36" name="Shape 34"/>
+          <p:cNvSpPr/>
+          <p:nvPr/>
+        </p:nvSpPr>
+        <p:spPr>
+          <a:xfrm>
+            <a:off x="7369881" y="3913632"/>
+            <a:ext cx="1926275" cy="804672"/>
+          </a:xfrm>
+          <a:prstGeom prst="roundRect">
+            <a:avLst>
+              <a:gd name="adj" fmla="val 3977"/>
+            </a:avLst>
+          </a:prstGeom>
+          <a:solidFill>
+            <a:srgbClr val="FFFFFF"/>
+          </a:solidFill>
+          <a:ln w="9525">
+            <a:solidFill>
+              <a:srgbClr val="E6EBF0"/>
+            </a:solidFill>
+            <a:prstDash val="solid"/>
+          </a:ln>
+        </p:spPr>
+      </p:sp>
+      <p:sp>
+        <p:nvSpPr>
+          <p:cNvPr id="37" name="Text 35"/>
+          <p:cNvSpPr/>
+          <p:nvPr/>
+        </p:nvSpPr>
+        <p:spPr>
+          <a:xfrm>
+            <a:off x="7369881" y="4032504"/>
+            <a:ext cx="1926275" cy="201168"/>
+          </a:xfrm>
+          <a:prstGeom prst="rect">
+            <a:avLst/>
+          </a:prstGeom>
+          <a:noFill/>
+          <a:ln/>
+        </p:spPr>
+        <p:txBody>
+          <a:bodyPr wrap="square" lIns="0" tIns="0" rIns="0" bIns="0" rtlCol="0" anchor="ctr"/>
+          <a:lstStyle/>
+          <a:p>
+            <a:pPr algn="ctr" indent="0" marL="0">
+              <a:buNone/>
+            </a:pPr>
+            <a:r>
+              <a:rPr lang="en-US" sz="850" b="1" spc="140" kern="0" dirty="0">
+                <a:solidFill>
+                  <a:srgbClr val="7A8794"/>
+                </a:solidFill>
+                <a:latin typeface="Arial" pitchFamily="34" charset="0"/>
+                <a:ea typeface="Microsoft JhengHei"/>
+                <a:cs typeface="Microsoft JhengHei"/>
+                <a:ea typeface="Arial" pitchFamily="34" charset="-122"/>
+                <a:cs typeface="Arial" pitchFamily="34" charset="-120"/>
+              </a:rPr>
+              <a:t>核定</a:t>
+            </a:r>
+            <a:endParaRPr lang="en-US" sz="850" dirty="0"/>
+          </a:p>
+        </p:txBody>
+      </p:sp>
+      <p:sp>
+        <p:nvSpPr>
+          <p:cNvPr id="38" name="Text 36"/>
+          <p:cNvSpPr/>
+          <p:nvPr/>
+        </p:nvSpPr>
+        <p:spPr>
+          <a:xfrm>
+            <a:off x="7369881" y="4251960"/>
+            <a:ext cx="1926275" cy="310896"/>
+          </a:xfrm>
+          <a:prstGeom prst="rect">
+            <a:avLst/>
+          </a:prstGeom>
+          <a:noFill/>
+          <a:ln/>
+        </p:spPr>
+        <p:txBody>
+          <a:bodyPr wrap="square" lIns="0" tIns="0" rIns="0" bIns="0" rtlCol="0" anchor="ctr"/>
+          <a:lstStyle/>
+          <a:p>
+            <a:pPr algn="ctr" indent="0" marL="0">
+              <a:buNone/>
+            </a:pPr>
+            <a:r>
+              <a:rPr lang="en-US" sz="1350" b="1" dirty="0">
+                <a:solidFill>
+                  <a:srgbClr val="1D2B39"/>
+                </a:solidFill>
+                <a:latin typeface="Arial" pitchFamily="34" charset="0"/>
+                <a:ea typeface="Microsoft JhengHei"/>
+                <a:cs typeface="Microsoft JhengHei"/>
+                <a:ea typeface="Arial" pitchFamily="34" charset="-122"/>
+                <a:cs typeface="Arial" pitchFamily="34" charset="-120"/>
+              </a:rPr>
+              <a:t>依校內權責</a:t>
+            </a:r>
+            <a:endParaRPr lang="en-US" sz="1350" dirty="0"/>
+          </a:p>
+        </p:txBody>
+      </p:sp>
+      <p:sp>
+        <p:nvSpPr>
+          <p:cNvPr id="39" name="Shape 37"/>
+          <p:cNvSpPr/>
+          <p:nvPr/>
+        </p:nvSpPr>
+        <p:spPr>
+          <a:xfrm>
+            <a:off x="9351020" y="4315968"/>
+            <a:ext cx="201168" cy="0"/>
+          </a:xfrm>
+          <a:prstGeom prst="line">
+            <a:avLst/>
+          </a:prstGeom>
+          <a:noFill/>
+          <a:ln w="15875">
+            <a:solidFill>
+              <a:srgbClr val="1E5A85"/>
+            </a:solidFill>
+            <a:prstDash val="solid"/>
+            <a:tailEnd type="triangle"/>
+          </a:ln>
+        </p:spPr>
+      </p:sp>
+      <p:sp>
+        <p:nvSpPr>
+          <p:cNvPr id="40" name="Shape 38"/>
+          <p:cNvSpPr/>
+          <p:nvPr/>
+        </p:nvSpPr>
+        <p:spPr>
+          <a:xfrm>
+            <a:off x="9607052" y="3913632"/>
+            <a:ext cx="1926275" cy="804672"/>
+          </a:xfrm>
+          <a:prstGeom prst="roundRect">
+            <a:avLst>
+              <a:gd name="adj" fmla="val 3977"/>
+            </a:avLst>
+          </a:prstGeom>
+          <a:solidFill>
+            <a:srgbClr val="FFFFFF"/>
+          </a:solidFill>
+          <a:ln w="9525">
+            <a:solidFill>
+              <a:srgbClr val="E6EBF0"/>
+            </a:solidFill>
+            <a:prstDash val="solid"/>
+          </a:ln>
+        </p:spPr>
+      </p:sp>
+      <p:sp>
+        <p:nvSpPr>
+          <p:cNvPr id="41" name="Text 39"/>
+          <p:cNvSpPr/>
+          <p:nvPr/>
+        </p:nvSpPr>
+        <p:spPr>
+          <a:xfrm>
+            <a:off x="9607052" y="4032504"/>
+            <a:ext cx="1926275" cy="201168"/>
+          </a:xfrm>
+          <a:prstGeom prst="rect">
+            <a:avLst/>
+          </a:prstGeom>
+          <a:noFill/>
+          <a:ln/>
+        </p:spPr>
+        <p:txBody>
+          <a:bodyPr wrap="square" lIns="0" tIns="0" rIns="0" bIns="0" rtlCol="0" anchor="ctr"/>
+          <a:lstStyle/>
+          <a:p>
+            <a:pPr algn="ctr" indent="0" marL="0">
+              <a:buNone/>
+            </a:pPr>
+            <a:r>
+              <a:rPr lang="en-US" sz="850" b="1" spc="140" kern="0" dirty="0">
+                <a:solidFill>
+                  <a:srgbClr val="7A8794"/>
+                </a:solidFill>
+                <a:latin typeface="Arial" pitchFamily="34" charset="0"/>
+                <a:ea typeface="Microsoft JhengHei"/>
+                <a:cs typeface="Microsoft JhengHei"/>
+                <a:ea typeface="Arial" pitchFamily="34" charset="-122"/>
+                <a:cs typeface="Arial" pitchFamily="34" charset="-120"/>
+              </a:rPr>
+              <a:t>續辦</a:t>
+            </a:r>
+            <a:endParaRPr lang="en-US" sz="850" dirty="0"/>
+          </a:p>
+        </p:txBody>
+      </p:sp>
+      <p:sp>
+        <p:nvSpPr>
+          <p:cNvPr id="42" name="Text 40"/>
+          <p:cNvSpPr/>
+          <p:nvPr/>
+        </p:nvSpPr>
+        <p:spPr>
+          <a:xfrm>
+            <a:off x="9607052" y="4251960"/>
+            <a:ext cx="1926275" cy="310896"/>
+          </a:xfrm>
+          <a:prstGeom prst="rect">
+            <a:avLst/>
+          </a:prstGeom>
+          <a:noFill/>
+          <a:ln/>
+        </p:spPr>
+        <p:txBody>
+          <a:bodyPr wrap="square" lIns="0" tIns="0" rIns="0" bIns="0" rtlCol="0" anchor="ctr"/>
+          <a:lstStyle/>
+          <a:p>
+            <a:pPr algn="ctr" indent="0" marL="0">
+              <a:buNone/>
+            </a:pPr>
+            <a:r>
+              <a:rPr lang="en-US" sz="1350" b="1" dirty="0">
+                <a:solidFill>
+                  <a:srgbClr val="1D2B39"/>
+                </a:solidFill>
+                <a:latin typeface="Arial" pitchFamily="34" charset="0"/>
+                <a:ea typeface="Microsoft JhengHei"/>
+                <a:cs typeface="Microsoft JhengHei"/>
+                <a:ea typeface="Arial" pitchFamily="34" charset="-122"/>
+                <a:cs typeface="Arial" pitchFamily="34" charset="-120"/>
+              </a:rPr>
+              <a:t>請購 · 簽約</a:t>
+            </a:r>
+            <a:endParaRPr lang="en-US" sz="1350" dirty="0"/>
+          </a:p>
+        </p:txBody>
+      </p:sp>
+      <p:sp>
+        <p:nvSpPr>
+          <p:cNvPr id="43" name="Shape 41"/>
+          <p:cNvSpPr/>
+          <p:nvPr/>
+        </p:nvSpPr>
+        <p:spPr>
+          <a:xfrm>
+            <a:off x="658368" y="4919472"/>
+            <a:ext cx="10874959" cy="777240"/>
+          </a:xfrm>
+          <a:prstGeom prst="roundRect">
+            <a:avLst>
+              <a:gd name="adj" fmla="val 4118"/>
+            </a:avLst>
+          </a:prstGeom>
+          <a:solidFill>
+            <a:srgbClr val="FCE9DC"/>
+          </a:solidFill>
+          <a:ln w="12700">
+            <a:solidFill>
+              <a:srgbClr val="FCE9DC"/>
+            </a:solidFill>
+            <a:prstDash val="solid"/>
+          </a:ln>
+        </p:spPr>
+      </p:sp>
+      <p:sp>
+        <p:nvSpPr>
+          <p:cNvPr id="44" name="Text 42"/>
+          <p:cNvSpPr/>
+          <p:nvPr/>
+        </p:nvSpPr>
+        <p:spPr>
+          <a:xfrm>
+            <a:off x="932688" y="4919472"/>
+            <a:ext cx="10326319" cy="777240"/>
+          </a:xfrm>
+          <a:prstGeom prst="rect">
+            <a:avLst/>
+          </a:prstGeom>
+          <a:noFill/>
+          <a:ln/>
+        </p:spPr>
+        <p:txBody>
+          <a:bodyPr wrap="square" lIns="0" tIns="0" rIns="0" bIns="0" rtlCol="0" anchor="ctr"/>
+          <a:lstStyle/>
+          <a:p>
+            <a:pPr indent="0" marL="0">
+              <a:lnSpc>
+                <a:spcPts val="1800"/>
+              </a:lnSpc>
+              <a:buNone/>
+            </a:pPr>
+            <a:r>
+              <a:rPr lang="en-US" sz="1200" dirty="0">
+                <a:solidFill>
+                  <a:srgbClr val="4E5F70"/>
+                </a:solidFill>
+                <a:latin typeface="Arial" pitchFamily="34" charset="0"/>
+                <a:ea typeface="Microsoft JhengHei"/>
+                <a:cs typeface="Microsoft JhengHei"/>
+                <a:ea typeface="Arial" pitchFamily="34" charset="-122"/>
+                <a:cs typeface="Arial" pitchFamily="34" charset="-120"/>
+              </a:rPr>
+              <a:t>資訊類採購會會辦計網中心，所以簽送出去的那一刻資安文件就要完整——</a:t>
+            </a:r>
+            <a:pPr indent="0" marL="0">
+              <a:lnSpc>
+                <a:spcPts val="1800"/>
+              </a:lnSpc>
+              <a:buNone/>
+            </a:pPr>
+            <a:r>
+              <a:rPr lang="en-US" sz="1200" b="1" dirty="0">
+                <a:solidFill>
+                  <a:srgbClr val="1D2B39"/>
+                </a:solidFill>
+                <a:latin typeface="Arial" pitchFamily="34" charset="0"/>
+                <a:ea typeface="Microsoft JhengHei"/>
+                <a:cs typeface="Microsoft JhengHei"/>
+                <a:ea typeface="Arial" pitchFamily="34" charset="-122"/>
+                <a:cs typeface="Arial" pitchFamily="34" charset="-120"/>
+              </a:rPr>
+              <a:t>不能先簽再補，一退件就是一輪時間。</a:t>
+            </a:r>
+            <a:pPr indent="0" marL="0">
+              <a:lnSpc>
+                <a:spcPts val="1800"/>
+              </a:lnSpc>
+              <a:buNone/>
+            </a:pPr>
+            <a:r>
+              <a:rPr lang="en-US" sz="1200" dirty="0">
+                <a:solidFill>
+                  <a:srgbClr val="4E5F70"/>
+                </a:solidFill>
+                <a:latin typeface="Arial" pitchFamily="34" charset="0"/>
+                <a:ea typeface="Microsoft JhengHei"/>
+                <a:cs typeface="Microsoft JhengHei"/>
+                <a:ea typeface="Arial" pitchFamily="34" charset="-122"/>
+                <a:cs typeface="Arial" pitchFamily="34" charset="-120"/>
+              </a:rPr>
+              <a:t>這也是為什麼我把第貳部分的文件先備齊。</a:t>
+            </a:r>
+            <a:endParaRPr lang="en-US" sz="1200" dirty="0"/>
+          </a:p>
+        </p:txBody>
+      </p:sp>
+    </p:spTree>
+  </p:cSld>
+  <p:clrMapOvr>
+    <a:masterClrMapping/>
+  </p:clrMapOvr>
+</p:sld>
+</file>
+
+<file path=ppt/slides/slide21.xml><?xml version="1.0" encoding="utf-8"?>
+<p:sld xmlns:a="http://schemas.openxmlformats.org/drawingml/2006/main" xmlns:r="http://schemas.openxmlformats.org/officeDocument/2006/relationships" xmlns:p="http://schemas.openxmlformats.org/presentationml/2006/main">
+  <p:cSld name="Slide 21">
+    <p:bg>
+      <p:bgPr>
+        <a:solidFill>
+          <a:srgbClr val="F2F5F8"/>
+        </a:solidFill>
+      </p:bgPr>
+    </p:bg>
+    <p:spTree>
+      <p:nvGrpSpPr>
+        <p:cNvPr id="1" name=""/>
+        <p:cNvGrpSpPr/>
+        <p:nvPr/>
+      </p:nvGrpSpPr>
+      <p:grpSpPr>
+        <a:xfrm>
+          <a:off x="0" y="0"/>
+          <a:ext cx="0" cy="0"/>
+          <a:chOff x="0" y="0"/>
+          <a:chExt cx="0" cy="0"/>
+        </a:xfrm>
+      </p:grpSpPr>
+      <p:sp>
+        <p:nvSpPr>
+          <p:cNvPr id="2" name="Text 0"/>
+          <p:cNvSpPr/>
+          <p:nvPr/>
+        </p:nvSpPr>
+        <p:spPr>
+          <a:xfrm>
+            <a:off x="658368" y="6327648"/>
+            <a:ext cx="6400800" cy="274320"/>
+          </a:xfrm>
+          <a:prstGeom prst="rect">
+            <a:avLst/>
+          </a:prstGeom>
+          <a:noFill/>
+          <a:ln/>
+        </p:spPr>
+        <p:txBody>
+          <a:bodyPr wrap="square" lIns="0" tIns="0" rIns="0" bIns="0" rtlCol="0" anchor="ctr"/>
+          <a:lstStyle/>
+          <a:p>
+            <a:pPr algn="l" indent="0" marL="0">
+              <a:buNone/>
+            </a:pPr>
+            <a:r>
+              <a:rPr lang="en-US" sz="900" spc="180" kern="0" dirty="0">
+                <a:solidFill>
+                  <a:srgbClr val="7A8794"/>
+                </a:solidFill>
+                <a:latin typeface="Arial" pitchFamily="34" charset="0"/>
+                <a:ea typeface="Microsoft JhengHei"/>
+                <a:cs typeface="Microsoft JhengHei"/>
+                <a:ea typeface="Arial" pitchFamily="34" charset="-122"/>
+                <a:cs typeface="Arial" pitchFamily="34" charset="-120"/>
+              </a:rPr>
+              <a:t>參 · 行政</a:t>
+            </a:r>
+            <a:endParaRPr lang="en-US" sz="900" dirty="0"/>
+          </a:p>
+        </p:txBody>
+      </p:sp>
+      <p:sp>
+        <p:nvSpPr>
+          <p:cNvPr id="3" name="Text 1"/>
+          <p:cNvSpPr/>
+          <p:nvPr/>
+        </p:nvSpPr>
+        <p:spPr>
+          <a:xfrm>
+            <a:off x="9704527" y="6327648"/>
+            <a:ext cx="1828800" cy="274320"/>
+          </a:xfrm>
+          <a:prstGeom prst="rect">
+            <a:avLst/>
+          </a:prstGeom>
+          <a:noFill/>
+          <a:ln/>
+        </p:spPr>
+        <p:txBody>
+          <a:bodyPr wrap="square" lIns="0" tIns="0" rIns="0" bIns="0" rtlCol="0" anchor="ctr"/>
+          <a:lstStyle/>
+          <a:p>
+            <a:pPr algn="r" indent="0" marL="0">
+              <a:buNone/>
+            </a:pPr>
+            <a:r>
+              <a:rPr lang="en-US" sz="900" spc="180" kern="0" dirty="0">
+                <a:solidFill>
+                  <a:srgbClr val="7A8794"/>
+                </a:solidFill>
+                <a:latin typeface="Arial" pitchFamily="34" charset="0"/>
+                <a:ea typeface="Microsoft JhengHei"/>
+                <a:cs typeface="Microsoft JhengHei"/>
+                <a:ea typeface="Arial" pitchFamily="34" charset="-122"/>
+                <a:cs typeface="Arial" pitchFamily="34" charset="-120"/>
+              </a:rPr>
+              <a:t>21 / 25</a:t>
+            </a:r>
+            <a:endParaRPr lang="en-US" sz="900" dirty="0"/>
+          </a:p>
+        </p:txBody>
+      </p:sp>
+      <p:sp>
+        <p:nvSpPr>
+          <p:cNvPr id="4" name="Text 2"/>
+          <p:cNvSpPr/>
+          <p:nvPr/>
+        </p:nvSpPr>
+        <p:spPr>
+          <a:xfrm>
+            <a:off x="658368" y="475488"/>
+            <a:ext cx="10874959" cy="237744"/>
+          </a:xfrm>
+          <a:prstGeom prst="rect">
+            <a:avLst/>
+          </a:prstGeom>
+          <a:noFill/>
+          <a:ln/>
+        </p:spPr>
+        <p:txBody>
+          <a:bodyPr wrap="square" lIns="0" tIns="0" rIns="0" bIns="0" rtlCol="0" anchor="ctr"/>
+          <a:lstStyle/>
+          <a:p>
+            <a:pPr indent="0" marL="0">
+              <a:buNone/>
+            </a:pPr>
+            <a:r>
+              <a:rPr lang="en-US" sz="950" b="1" spc="240" kern="0" dirty="0">
+                <a:solidFill>
+                  <a:srgbClr val="C05209"/>
+                </a:solidFill>
+                <a:latin typeface="Arial" pitchFamily="34" charset="0"/>
+                <a:ea typeface="Microsoft JhengHei"/>
+                <a:cs typeface="Microsoft JhengHei"/>
+                <a:ea typeface="Arial" pitchFamily="34" charset="-122"/>
+                <a:cs typeface="Arial" pitchFamily="34" charset="-120"/>
+              </a:rPr>
+              <a:t>屆時的行政細節</a:t>
+            </a:r>
+            <a:endParaRPr lang="en-US" sz="950" dirty="0"/>
+          </a:p>
+        </p:txBody>
+      </p:sp>
+      <p:sp>
+        <p:nvSpPr>
+          <p:cNvPr id="5" name="Text 3"/>
+          <p:cNvSpPr/>
+          <p:nvPr/>
+        </p:nvSpPr>
+        <p:spPr>
+          <a:xfrm>
+            <a:off x="658368" y="768096"/>
+            <a:ext cx="10874959" cy="585216"/>
+          </a:xfrm>
+          <a:prstGeom prst="rect">
+            <a:avLst/>
+          </a:prstGeom>
+          <a:noFill/>
+          <a:ln/>
+        </p:spPr>
+        <p:txBody>
+          <a:bodyPr wrap="square" lIns="0" tIns="0" rIns="0" bIns="0" rtlCol="0" anchor="ctr"/>
+          <a:lstStyle/>
+          <a:p>
+            <a:pPr indent="0" marL="0">
+              <a:buNone/>
+            </a:pPr>
+            <a:r>
+              <a:rPr lang="en-US" sz="3100" b="1" dirty="0">
+                <a:solidFill>
+                  <a:srgbClr val="1D2B39"/>
+                </a:solidFill>
+                <a:latin typeface="Arial" pitchFamily="34" charset="0"/>
+                <a:ea typeface="Microsoft JhengHei"/>
+                <a:cs typeface="Microsoft JhengHei"/>
+                <a:ea typeface="Arial" pitchFamily="34" charset="-122"/>
+                <a:cs typeface="Arial" pitchFamily="34" charset="-120"/>
+              </a:rPr>
+              <a:t>如果走到採購，驗收怎麼訂。</a:t>
+            </a:r>
+            <a:endParaRPr lang="en-US" sz="3100" dirty="0"/>
+          </a:p>
+        </p:txBody>
+      </p:sp>
+      <p:sp>
+        <p:nvSpPr>
+          <p:cNvPr id="6" name="Text 4"/>
+          <p:cNvSpPr/>
+          <p:nvPr/>
+        </p:nvSpPr>
+        <p:spPr>
+          <a:xfrm>
+            <a:off x="658368" y="1481328"/>
+            <a:ext cx="10874959" cy="274320"/>
+          </a:xfrm>
+          <a:prstGeom prst="rect">
+            <a:avLst/>
+          </a:prstGeom>
+          <a:noFill/>
+          <a:ln/>
+        </p:spPr>
+        <p:txBody>
+          <a:bodyPr wrap="square" lIns="0" tIns="0" rIns="0" bIns="0" rtlCol="0" anchor="ctr"/>
+          <a:lstStyle/>
+          <a:p>
+            <a:pPr indent="0" marL="0">
+              <a:buNone/>
+            </a:pPr>
+            <a:r>
+              <a:rPr lang="en-US" sz="1250" dirty="0">
+                <a:solidFill>
+                  <a:srgbClr val="4E5F70"/>
+                </a:solidFill>
+                <a:latin typeface="Arial" pitchFamily="34" charset="0"/>
+                <a:ea typeface="Microsoft JhengHei"/>
+                <a:cs typeface="Microsoft JhengHei"/>
+                <a:ea typeface="Arial" pitchFamily="34" charset="-122"/>
+                <a:cs typeface="Arial" pitchFamily="34" charset="-120"/>
+              </a:rPr>
+              <a:t>這頁不是現在要決定的事，是先讓組長知道這一格不會卡。三種方式我方都接受。</a:t>
+            </a:r>
+            <a:endParaRPr lang="en-US" sz="1250" dirty="0"/>
+          </a:p>
+        </p:txBody>
+      </p:sp>
+      <p:sp>
+        <p:nvSpPr>
+          <p:cNvPr id="7" name="Shape 5"/>
+          <p:cNvSpPr/>
+          <p:nvPr/>
+        </p:nvSpPr>
+        <p:spPr>
+          <a:xfrm>
+            <a:off x="658368" y="1865376"/>
+            <a:ext cx="10874959" cy="713232"/>
+          </a:xfrm>
+          <a:prstGeom prst="roundRect">
+            <a:avLst>
+              <a:gd name="adj" fmla="val 4487"/>
+            </a:avLst>
+          </a:prstGeom>
+          <a:solidFill>
+            <a:srgbClr val="FFFFFF"/>
+          </a:solidFill>
+          <a:ln w="9525">
+            <a:solidFill>
+              <a:srgbClr val="E6EBF0"/>
+            </a:solidFill>
+            <a:prstDash val="solid"/>
+          </a:ln>
+        </p:spPr>
+      </p:sp>
+      <p:sp>
+        <p:nvSpPr>
+          <p:cNvPr id="8" name="Text 6"/>
+          <p:cNvSpPr/>
+          <p:nvPr/>
+        </p:nvSpPr>
+        <p:spPr>
+          <a:xfrm>
+            <a:off x="896112" y="1920240"/>
             <a:ext cx="10399471" cy="603504"/>
           </a:xfrm>
           <a:prstGeom prst="rect">
@@ -18137,50 +20499,9 @@
           </a:p>
         </p:txBody>
       </p:sp>
-      <p:sp>
-        <p:nvSpPr>
-          <p:cNvPr id="8" name="Text 6"/>
-          <p:cNvSpPr/>
-          <p:nvPr/>
-        </p:nvSpPr>
-        <p:spPr>
-          <a:xfrm>
-            <a:off x="658368" y="2340864"/>
-            <a:ext cx="10874959" cy="292608"/>
-          </a:xfrm>
-          <a:prstGeom prst="rect">
-            <a:avLst/>
-          </a:prstGeom>
-          <a:noFill/>
-          <a:ln/>
-        </p:spPr>
-        <p:txBody>
-          <a:bodyPr wrap="square" lIns="0" tIns="0" rIns="0" bIns="0" rtlCol="0" anchor="ctr"/>
-          <a:lstStyle/>
-          <a:p>
-            <a:pPr indent="0" marL="0">
-              <a:buNone/>
-            </a:pPr>
-            <a:r>
-              <a:rPr lang="en-US" sz="1250" dirty="0">
-                <a:solidFill>
-                  <a:srgbClr val="4E5F70"/>
-                </a:solidFill>
-                <a:latin typeface="Arial" pitchFamily="34" charset="0"/>
-                <a:ea typeface="Microsoft JhengHei"/>
-                <a:cs typeface="Microsoft JhengHei"/>
-                <a:ea typeface="Arial" pitchFamily="34" charset="-122"/>
-                <a:cs typeface="Arial" pitchFamily="34" charset="-120"/>
-              </a:rPr>
-              <a:t>本案是勞務採購，所以可以書面驗收、不必到場查驗、不辦資產點交。要在簽裡寫死的只有一件事：什麼事件觸發驗收。</a:t>
-            </a:r>
-            <a:endParaRPr lang="en-US" sz="1250" dirty="0"/>
-          </a:p>
-        </p:txBody>
-      </p:sp>
       <p:graphicFrame>
         <p:nvGraphicFramePr>
-          <p:cNvPr id="21" name="Table 0"/>
+          <p:cNvPr id="22" name="Table 0"/>
           <p:cNvGraphicFramePr>
             <a:graphicFrameLocks noGrp="1"/>
           </p:cNvGraphicFramePr>
@@ -18193,7 +20514,7 @@
           </p:nvPr>
         </p:nvGraphicFramePr>
         <p:xfrm>
-          <a:off x="658368" y="2761488"/>
+          <a:off x="658368" y="2779776"/>
           <a:ext cx="10874959" cy="914400"/>
         </p:xfrm>
         <a:graphic>
@@ -18227,7 +20548,7 @@
                           <a:ea typeface="Arial" pitchFamily="34" charset="-122"/>
                           <a:cs typeface="Arial" pitchFamily="34" charset="-120"/>
                         </a:rPr>
-                        <a:t>方案</a:t>
+                        <a:t>方式</a:t>
                       </a:r>
                       <a:endParaRPr lang="en-US" sz="950" dirty="0">
                         <a:latin typeface="Arial" charset="0"/>
@@ -18792,7 +21113,7 @@
                           <a:ea typeface="Arial" pitchFamily="34" charset="-122"/>
                           <a:cs typeface="Arial" pitchFamily="34" charset="-120"/>
                         </a:rPr>
-                        <a:t>最保守，但整個服務期間沒有檢核點，出問題只能到期末處理</a:t>
+                        <a:t>最保守，但整個服務期間沒有檢核點</a:t>
                       </a:r>
                       <a:endParaRPr lang="en-US" sz="1050" dirty="0">
                         <a:latin typeface="Arial" charset="0"/>
@@ -18864,7 +21185,7 @@
                           <a:ea typeface="Arial" pitchFamily="34" charset="-122"/>
                           <a:cs typeface="Arial" pitchFamily="34" charset="-120"/>
                         </a:rPr>
-                        <a:t>可接受</a:t>
+                        <a:t>可以</a:t>
                       </a:r>
                       <a:endParaRPr lang="en-US" sz="1050" dirty="0">
                         <a:latin typeface="Arial" charset="0"/>
@@ -19154,7 +21475,7 @@
                           <a:ea typeface="Arial" pitchFamily="34" charset="-122"/>
                           <a:cs typeface="Arial" pitchFamily="34" charset="-120"/>
                         </a:rPr>
-                        <a:t>一次驗收一次核銷，作業最省；履約保障改由服務承諾條款負責（下頁）</a:t>
+                        <a:t>一次驗收一次核銷，作業最省</a:t>
                       </a:r>
                       <a:endParaRPr lang="en-US" sz="1050" dirty="0">
                         <a:latin typeface="Arial" charset="0"/>
@@ -19218,7 +21539,7 @@
                       <a:r>
                         <a:rPr lang="en-US" sz="1050" b="1" dirty="0">
                           <a:solidFill>
-                            <a:srgbClr val="1A7F4E"/>
+                            <a:srgbClr val="1B5480"/>
                           </a:solidFill>
                           <a:latin typeface="Arial" pitchFamily="34" charset="0"/>
                           <a:ea typeface="Microsoft JhengHei"/>
@@ -19226,7 +21547,7 @@
                           <a:ea typeface="Arial" pitchFamily="34" charset="-122"/>
                           <a:cs typeface="Arial" pitchFamily="34" charset="-120"/>
                         </a:rPr>
-                        <a:t>建議</a:t>
+                        <a:t>實務常見</a:t>
                       </a:r>
                       <a:endParaRPr lang="en-US" sz="1050" dirty="0">
                         <a:latin typeface="Arial" charset="0"/>
@@ -19275,7 +21596,7 @@
                       <a:tailEnd type="none" w="med" len="med"/>
                     </a:lnB>
                     <a:solidFill>
-                      <a:srgbClr val="E1F1E9"/>
+                      <a:srgbClr val="E4EDF5"/>
                     </a:solidFill>
                   </a:tcPr>
                 </a:tc>
@@ -19516,7 +21837,7 @@
                           <a:ea typeface="Arial" pitchFamily="34" charset="-122"/>
                           <a:cs typeface="Arial" pitchFamily="34" charset="-120"/>
                         </a:rPr>
-                        <a:t>多一個檢核點，但要跑兩次驗收與兩次核銷</a:t>
+                        <a:t>多一個檢核點，但要跑兩次驗收與核銷</a:t>
                       </a:r>
                       <a:endParaRPr lang="en-US" sz="1050" dirty="0">
                         <a:latin typeface="Arial" charset="0"/>
@@ -19588,7 +21909,7 @@
                           <a:ea typeface="Arial" pitchFamily="34" charset="-122"/>
                           <a:cs typeface="Arial" pitchFamily="34" charset="-120"/>
                         </a:rPr>
-                        <a:t>也可以</a:t>
+                        <a:t>可以</a:t>
                       </a:r>
                       <a:endParaRPr lang="en-US" sz="1050" dirty="0">
                         <a:latin typeface="Arial" charset="0"/>
@@ -19654,12 +21975,12 @@
         </p:nvSpPr>
         <p:spPr>
           <a:xfrm>
-            <a:off x="658368" y="5029200"/>
-            <a:ext cx="10874959" cy="914400"/>
+            <a:off x="658368" y="5157216"/>
+            <a:ext cx="10874959" cy="786384"/>
           </a:xfrm>
           <a:prstGeom prst="roundRect">
             <a:avLst>
-              <a:gd name="adj" fmla="val 3500"/>
+              <a:gd name="adj" fmla="val 4070"/>
             </a:avLst>
           </a:prstGeom>
           <a:solidFill>
@@ -19681,8 +22002,8 @@
         </p:nvSpPr>
         <p:spPr>
           <a:xfrm>
-            <a:off x="932688" y="5029200"/>
-            <a:ext cx="10326319" cy="914400"/>
+            <a:off x="932688" y="5157216"/>
+            <a:ext cx="10326319" cy="786384"/>
           </a:xfrm>
           <a:prstGeom prst="rect">
             <a:avLst/>
@@ -19696,227 +22017,31 @@
           <a:p>
             <a:pPr indent="0" marL="0">
               <a:lnSpc>
-                <a:spcPts val="1900"/>
+                <a:spcPts val="1800"/>
               </a:lnSpc>
               <a:buNone/>
             </a:pPr>
             <a:r>
-              <a:rPr lang="en-US" sz="1250" b="1" dirty="0">
-                <a:solidFill>
-                  <a:srgbClr val="1D2B39"/>
-                </a:solidFill>
-                <a:latin typeface="Arial" pitchFamily="34" charset="0"/>
-                <a:ea typeface="Microsoft JhengHei"/>
-                <a:cs typeface="Microsoft JhengHei"/>
-                <a:ea typeface="Arial" pitchFamily="34" charset="-122"/>
-                <a:cs typeface="Arial" pitchFamily="34" charset="-120"/>
-              </a:rPr>
-              <a:t>建議方案乙，理由：</a:t>
+              <a:rPr lang="en-US" sz="1200" dirty="0">
+                <a:solidFill>
+                  <a:srgbClr val="4E5F70"/>
+                </a:solidFill>
+                <a:latin typeface="Arial" pitchFamily="34" charset="0"/>
+                <a:ea typeface="Microsoft JhengHei"/>
+                <a:cs typeface="Microsoft JhengHei"/>
+                <a:ea typeface="Arial" pitchFamily="34" charset="-122"/>
+                <a:cs typeface="Arial" pitchFamily="34" charset="-120"/>
+              </a:rPr>
+              <a:t>訂閱服務實務上多採乙（開通驗收），因為服務的價值在期間內持續提供，把驗收拖到期末並不會多一分保障；真正的保障是下一頁那六項寫進契約的承諾。</a:t>
             </a:r>
             <a:pPr indent="0" marL="0">
               <a:lnSpc>
-                <a:spcPts val="1900"/>
+                <a:spcPts val="1800"/>
               </a:lnSpc>
               <a:buNone/>
             </a:pPr>
             <a:r>
-              <a:rPr lang="en-US" sz="1250" dirty="0">
-                <a:solidFill>
-                  <a:srgbClr val="4E5F70"/>
-                </a:solidFill>
-                <a:latin typeface="Arial" pitchFamily="34" charset="0"/>
-                <a:ea typeface="Microsoft JhengHei"/>
-                <a:cs typeface="Microsoft JhengHei"/>
-                <a:ea typeface="Arial" pitchFamily="34" charset="-122"/>
-                <a:cs typeface="Arial" pitchFamily="34" charset="-120"/>
-              </a:rPr>
-              <a:t>訂閱服務的價值是在期間內持續提供，把驗收拖到期末並不會讓貴組多一分保障；真正的保障是寫進契約的服務承諾。若貴組偏好保守，我方完全接受方案丙，服務內容不變。</a:t>
-            </a:r>
-            <a:endParaRPr lang="en-US" sz="1250" dirty="0"/>
-          </a:p>
-        </p:txBody>
-      </p:sp>
-    </p:spTree>
-  </p:cSld>
-  <p:clrMapOvr>
-    <a:masterClrMapping/>
-  </p:clrMapOvr>
-</p:sld>
-</file>
-
-<file path=ppt/slides/slide21.xml><?xml version="1.0" encoding="utf-8"?>
-<p:sld xmlns:a="http://schemas.openxmlformats.org/drawingml/2006/main" xmlns:r="http://schemas.openxmlformats.org/officeDocument/2006/relationships" xmlns:p="http://schemas.openxmlformats.org/presentationml/2006/main">
-  <p:cSld name="Slide 21">
-    <p:bg>
-      <p:bgPr>
-        <a:solidFill>
-          <a:srgbClr val="F2F5F8"/>
-        </a:solidFill>
-      </p:bgPr>
-    </p:bg>
-    <p:spTree>
-      <p:nvGrpSpPr>
-        <p:cNvPr id="1" name=""/>
-        <p:cNvGrpSpPr/>
-        <p:nvPr/>
-      </p:nvGrpSpPr>
-      <p:grpSpPr>
-        <a:xfrm>
-          <a:off x="0" y="0"/>
-          <a:ext cx="0" cy="0"/>
-          <a:chOff x="0" y="0"/>
-          <a:chExt cx="0" cy="0"/>
-        </a:xfrm>
-      </p:grpSpPr>
-      <p:sp>
-        <p:nvSpPr>
-          <p:cNvPr id="2" name="Text 0"/>
-          <p:cNvSpPr/>
-          <p:nvPr/>
-        </p:nvSpPr>
-        <p:spPr>
-          <a:xfrm>
-            <a:off x="658368" y="6327648"/>
-            <a:ext cx="6400800" cy="274320"/>
-          </a:xfrm>
-          <a:prstGeom prst="rect">
-            <a:avLst/>
-          </a:prstGeom>
-          <a:noFill/>
-          <a:ln/>
-        </p:spPr>
-        <p:txBody>
-          <a:bodyPr wrap="square" lIns="0" tIns="0" rIns="0" bIns="0" rtlCol="0" anchor="ctr"/>
-          <a:lstStyle/>
-          <a:p>
-            <a:pPr algn="l" indent="0" marL="0">
-              <a:buNone/>
-            </a:pPr>
-            <a:r>
-              <a:rPr lang="en-US" sz="900" spc="180" kern="0" dirty="0">
-                <a:solidFill>
-                  <a:srgbClr val="7A8794"/>
-                </a:solidFill>
-                <a:latin typeface="Arial" pitchFamily="34" charset="0"/>
-                <a:ea typeface="Microsoft JhengHei"/>
-                <a:cs typeface="Microsoft JhengHei"/>
-                <a:ea typeface="Arial" pitchFamily="34" charset="-122"/>
-                <a:cs typeface="Arial" pitchFamily="34" charset="-120"/>
-              </a:rPr>
-              <a:t>參 · 簽辦</a:t>
-            </a:r>
-            <a:endParaRPr lang="en-US" sz="900" dirty="0"/>
-          </a:p>
-        </p:txBody>
-      </p:sp>
-      <p:sp>
-        <p:nvSpPr>
-          <p:cNvPr id="3" name="Text 1"/>
-          <p:cNvSpPr/>
-          <p:nvPr/>
-        </p:nvSpPr>
-        <p:spPr>
-          <a:xfrm>
-            <a:off x="9704527" y="6327648"/>
-            <a:ext cx="1828800" cy="274320"/>
-          </a:xfrm>
-          <a:prstGeom prst="rect">
-            <a:avLst/>
-          </a:prstGeom>
-          <a:noFill/>
-          <a:ln/>
-        </p:spPr>
-        <p:txBody>
-          <a:bodyPr wrap="square" lIns="0" tIns="0" rIns="0" bIns="0" rtlCol="0" anchor="ctr"/>
-          <a:lstStyle/>
-          <a:p>
-            <a:pPr algn="r" indent="0" marL="0">
-              <a:buNone/>
-            </a:pPr>
-            <a:r>
-              <a:rPr lang="en-US" sz="900" spc="180" kern="0" dirty="0">
-                <a:solidFill>
-                  <a:srgbClr val="7A8794"/>
-                </a:solidFill>
-                <a:latin typeface="Arial" pitchFamily="34" charset="0"/>
-                <a:ea typeface="Microsoft JhengHei"/>
-                <a:cs typeface="Microsoft JhengHei"/>
-                <a:ea typeface="Arial" pitchFamily="34" charset="-122"/>
-                <a:cs typeface="Arial" pitchFamily="34" charset="-120"/>
-              </a:rPr>
-              <a:t>21 / 25</a:t>
-            </a:r>
-            <a:endParaRPr lang="en-US" sz="900" dirty="0"/>
-          </a:p>
-        </p:txBody>
-      </p:sp>
-      <p:sp>
-        <p:nvSpPr>
-          <p:cNvPr id="4" name="Text 2"/>
-          <p:cNvSpPr/>
-          <p:nvPr/>
-        </p:nvSpPr>
-        <p:spPr>
-          <a:xfrm>
-            <a:off x="658368" y="475488"/>
-            <a:ext cx="10874959" cy="237744"/>
-          </a:xfrm>
-          <a:prstGeom prst="rect">
-            <a:avLst/>
-          </a:prstGeom>
-          <a:noFill/>
-          <a:ln/>
-        </p:spPr>
-        <p:txBody>
-          <a:bodyPr wrap="square" lIns="0" tIns="0" rIns="0" bIns="0" rtlCol="0" anchor="ctr"/>
-          <a:lstStyle/>
-          <a:p>
-            <a:pPr indent="0" marL="0">
-              <a:buNone/>
-            </a:pPr>
-            <a:r>
-              <a:rPr lang="en-US" sz="950" b="1" spc="240" kern="0" dirty="0">
-                <a:solidFill>
-                  <a:srgbClr val="C05209"/>
-                </a:solidFill>
-                <a:latin typeface="Arial" pitchFamily="34" charset="0"/>
-                <a:ea typeface="Microsoft JhengHei"/>
-                <a:cs typeface="Microsoft JhengHei"/>
-                <a:ea typeface="Arial" pitchFamily="34" charset="-122"/>
-                <a:cs typeface="Arial" pitchFamily="34" charset="-120"/>
-              </a:rPr>
-              <a:t>要決定的第一件事之二</a:t>
-            </a:r>
-            <a:endParaRPr lang="en-US" sz="950" dirty="0"/>
-          </a:p>
-        </p:txBody>
-      </p:sp>
-      <p:sp>
-        <p:nvSpPr>
-          <p:cNvPr id="5" name="Text 3"/>
-          <p:cNvSpPr/>
-          <p:nvPr/>
-        </p:nvSpPr>
-        <p:spPr>
-          <a:xfrm>
-            <a:off x="658368" y="768096"/>
-            <a:ext cx="10874959" cy="585216"/>
-          </a:xfrm>
-          <a:prstGeom prst="rect">
-            <a:avLst/>
-          </a:prstGeom>
-          <a:noFill/>
-          <a:ln/>
-        </p:spPr>
-        <p:txBody>
-          <a:bodyPr wrap="square" lIns="0" tIns="0" rIns="0" bIns="0" rtlCol="0" anchor="ctr"/>
-          <a:lstStyle/>
-          <a:p>
-            <a:pPr indent="0" marL="0">
-              <a:buNone/>
-            </a:pPr>
-            <a:r>
-              <a:rPr lang="en-US" sz="3100" b="1" dirty="0">
+              <a:rPr lang="en-US" sz="1200" b="1" dirty="0">
                 <a:solidFill>
                   <a:srgbClr val="1D2B39"/>
                 </a:solidFill>
@@ -19926,854 +22051,9 @@
                 <a:ea typeface="Arial" pitchFamily="34" charset="-122"/>
                 <a:cs typeface="Arial" pitchFamily="34" charset="-120"/>
               </a:rPr>
-              <a:t>這不是試用，是有驗收標準的履約。</a:t>
-            </a:r>
-            <a:endParaRPr lang="en-US" sz="3100" dirty="0"/>
-          </a:p>
-        </p:txBody>
-      </p:sp>
-      <p:sp>
-        <p:nvSpPr>
-          <p:cNvPr id="6" name="Text 4"/>
-          <p:cNvSpPr/>
-          <p:nvPr/>
-        </p:nvSpPr>
-        <p:spPr>
-          <a:xfrm>
-            <a:off x="658368" y="1481328"/>
-            <a:ext cx="10874959" cy="292608"/>
-          </a:xfrm>
-          <a:prstGeom prst="rect">
-            <a:avLst/>
-          </a:prstGeom>
-          <a:noFill/>
-          <a:ln/>
-        </p:spPr>
-        <p:txBody>
-          <a:bodyPr wrap="square" lIns="0" tIns="0" rIns="0" bIns="0" rtlCol="0" anchor="ctr"/>
-          <a:lstStyle/>
-          <a:p>
-            <a:pPr indent="0" marL="0">
-              <a:buNone/>
-            </a:pPr>
-            <a:r>
-              <a:rPr lang="en-US" sz="1250" dirty="0">
-                <a:solidFill>
-                  <a:srgbClr val="4E5F70"/>
-                </a:solidFill>
-                <a:latin typeface="Arial" pitchFamily="34" charset="0"/>
-                <a:ea typeface="Microsoft JhengHei"/>
-                <a:cs typeface="Microsoft JhengHei"/>
-                <a:ea typeface="Arial" pitchFamily="34" charset="-122"/>
-                <a:cs typeface="Arial" pitchFamily="34" charset="-120"/>
-              </a:rPr>
-              <a:t>政府採購沒有「不想用就退掉」這種事。以下六項擬全部寫進服務契約，成為可被檢核的義務。</a:t>
-            </a:r>
-            <a:endParaRPr lang="en-US" sz="1250" dirty="0"/>
-          </a:p>
-        </p:txBody>
-      </p:sp>
-      <p:sp>
-        <p:nvSpPr>
-          <p:cNvPr id="7" name="Shape 5"/>
-          <p:cNvSpPr/>
-          <p:nvPr/>
-        </p:nvSpPr>
-        <p:spPr>
-          <a:xfrm>
-            <a:off x="658368" y="1883664"/>
-            <a:ext cx="3442106" cy="1298448"/>
-          </a:xfrm>
-          <a:prstGeom prst="roundRect">
-            <a:avLst>
-              <a:gd name="adj" fmla="val 2465"/>
-            </a:avLst>
-          </a:prstGeom>
-          <a:solidFill>
-            <a:srgbClr val="FFFFFF"/>
-          </a:solidFill>
-          <a:ln w="9525">
-            <a:solidFill>
-              <a:srgbClr val="E6EBF0"/>
-            </a:solidFill>
-            <a:prstDash val="solid"/>
-          </a:ln>
-          <a:effectLst>
-            <a:outerShdw sx="100000" sy="100000" kx="0" ky="0" algn="bl" rotWithShape="0" blurRad="88900" dist="445" dir="5400000">
-              <a:srgbClr val="93A3B2">
-                <a:alpha val="16000"/>
-              </a:srgbClr>
-            </a:outerShdw>
-          </a:effectLst>
-        </p:spPr>
-      </p:sp>
-      <p:sp>
-        <p:nvSpPr>
-          <p:cNvPr id="8" name="Text 6"/>
-          <p:cNvSpPr/>
-          <p:nvPr/>
-        </p:nvSpPr>
-        <p:spPr>
-          <a:xfrm>
-            <a:off x="877824" y="2048256"/>
-            <a:ext cx="3003194" cy="274320"/>
-          </a:xfrm>
-          <a:prstGeom prst="rect">
-            <a:avLst/>
-          </a:prstGeom>
-          <a:noFill/>
-          <a:ln/>
-        </p:spPr>
-        <p:txBody>
-          <a:bodyPr wrap="square" lIns="0" tIns="0" rIns="0" bIns="0" rtlCol="0" anchor="ctr"/>
-          <a:lstStyle/>
-          <a:p>
-            <a:pPr indent="0" marL="0">
-              <a:buNone/>
-            </a:pPr>
-            <a:r>
-              <a:rPr lang="en-US" sz="1450" b="1" dirty="0">
-                <a:solidFill>
-                  <a:srgbClr val="1D2B39"/>
-                </a:solidFill>
-                <a:latin typeface="Arial" pitchFamily="34" charset="0"/>
-                <a:ea typeface="Microsoft JhengHei"/>
-                <a:cs typeface="Microsoft JhengHei"/>
-                <a:ea typeface="Arial" pitchFamily="34" charset="-122"/>
-                <a:cs typeface="Arial" pitchFamily="34" charset="-120"/>
-              </a:rPr>
-              <a:t>服務可用率</a:t>
-            </a:r>
-            <a:endParaRPr lang="en-US" sz="1450" dirty="0"/>
-          </a:p>
-        </p:txBody>
-      </p:sp>
-      <p:sp>
-        <p:nvSpPr>
-          <p:cNvPr id="9" name="Text 7"/>
-          <p:cNvSpPr/>
-          <p:nvPr/>
-        </p:nvSpPr>
-        <p:spPr>
-          <a:xfrm>
-            <a:off x="877824" y="2395728"/>
-            <a:ext cx="3003194" cy="640080"/>
-          </a:xfrm>
-          <a:prstGeom prst="rect">
-            <a:avLst/>
-          </a:prstGeom>
-          <a:noFill/>
-          <a:ln/>
-        </p:spPr>
-        <p:txBody>
-          <a:bodyPr wrap="square" lIns="0" tIns="0" rIns="0" bIns="0" rtlCol="0" anchor="t"/>
-          <a:lstStyle/>
-          <a:p>
-            <a:pPr indent="0" marL="0">
-              <a:lnSpc>
-                <a:spcPts val="1584"/>
-              </a:lnSpc>
-              <a:buNone/>
-            </a:pPr>
-            <a:r>
-              <a:rPr lang="en-US" sz="1100" dirty="0">
-                <a:solidFill>
-                  <a:srgbClr val="4E5F70"/>
-                </a:solidFill>
-                <a:latin typeface="Arial" pitchFamily="34" charset="0"/>
-                <a:ea typeface="Microsoft JhengHei"/>
-                <a:cs typeface="Microsoft JhengHei"/>
-                <a:ea typeface="Arial" pitchFamily="34" charset="-122"/>
-                <a:cs typeface="Arial" pitchFamily="34" charset="-120"/>
-              </a:rPr>
-              <a:t>月可用率 99% 以上（不含預告維護）。未達標時，當月服務費按比例折抵次期費用。</a:t>
-            </a:r>
-            <a:endParaRPr lang="en-US" sz="1100" dirty="0"/>
-          </a:p>
-        </p:txBody>
-      </p:sp>
-      <p:sp>
-        <p:nvSpPr>
-          <p:cNvPr id="10" name="Shape 8"/>
-          <p:cNvSpPr/>
-          <p:nvPr/>
-        </p:nvSpPr>
-        <p:spPr>
-          <a:xfrm>
-            <a:off x="4374794" y="1883664"/>
-            <a:ext cx="3442106" cy="1298448"/>
-          </a:xfrm>
-          <a:prstGeom prst="roundRect">
-            <a:avLst>
-              <a:gd name="adj" fmla="val 2465"/>
-            </a:avLst>
-          </a:prstGeom>
-          <a:solidFill>
-            <a:srgbClr val="FFFFFF"/>
-          </a:solidFill>
-          <a:ln w="9525">
-            <a:solidFill>
-              <a:srgbClr val="E6EBF0"/>
-            </a:solidFill>
-            <a:prstDash val="solid"/>
-          </a:ln>
-          <a:effectLst>
-            <a:outerShdw sx="100000" sy="100000" kx="0" ky="0" algn="bl" rotWithShape="0" blurRad="88900" dist="445" dir="5400000">
-              <a:srgbClr val="93A3B2">
-                <a:alpha val="16000"/>
-              </a:srgbClr>
-            </a:outerShdw>
-          </a:effectLst>
-        </p:spPr>
-      </p:sp>
-      <p:sp>
-        <p:nvSpPr>
-          <p:cNvPr id="11" name="Text 9"/>
-          <p:cNvSpPr/>
-          <p:nvPr/>
-        </p:nvSpPr>
-        <p:spPr>
-          <a:xfrm>
-            <a:off x="4594250" y="2048256"/>
-            <a:ext cx="3003194" cy="274320"/>
-          </a:xfrm>
-          <a:prstGeom prst="rect">
-            <a:avLst/>
-          </a:prstGeom>
-          <a:noFill/>
-          <a:ln/>
-        </p:spPr>
-        <p:txBody>
-          <a:bodyPr wrap="square" lIns="0" tIns="0" rIns="0" bIns="0" rtlCol="0" anchor="ctr"/>
-          <a:lstStyle/>
-          <a:p>
-            <a:pPr indent="0" marL="0">
-              <a:buNone/>
-            </a:pPr>
-            <a:r>
-              <a:rPr lang="en-US" sz="1450" b="1" dirty="0">
-                <a:solidFill>
-                  <a:srgbClr val="1D2B39"/>
-                </a:solidFill>
-                <a:latin typeface="Arial" pitchFamily="34" charset="0"/>
-                <a:ea typeface="Microsoft JhengHei"/>
-                <a:cs typeface="Microsoft JhengHei"/>
-                <a:ea typeface="Arial" pitchFamily="34" charset="-122"/>
-                <a:cs typeface="Arial" pitchFamily="34" charset="-120"/>
-              </a:rPr>
-              <a:t>回應時限</a:t>
-            </a:r>
-            <a:endParaRPr lang="en-US" sz="1450" dirty="0"/>
-          </a:p>
-        </p:txBody>
-      </p:sp>
-      <p:sp>
-        <p:nvSpPr>
-          <p:cNvPr id="12" name="Text 10"/>
-          <p:cNvSpPr/>
-          <p:nvPr/>
-        </p:nvSpPr>
-        <p:spPr>
-          <a:xfrm>
-            <a:off x="4594250" y="2395728"/>
-            <a:ext cx="3003194" cy="640080"/>
-          </a:xfrm>
-          <a:prstGeom prst="rect">
-            <a:avLst/>
-          </a:prstGeom>
-          <a:noFill/>
-          <a:ln/>
-        </p:spPr>
-        <p:txBody>
-          <a:bodyPr wrap="square" lIns="0" tIns="0" rIns="0" bIns="0" rtlCol="0" anchor="t"/>
-          <a:lstStyle/>
-          <a:p>
-            <a:pPr indent="0" marL="0">
-              <a:lnSpc>
-                <a:spcPts val="1584"/>
-              </a:lnSpc>
-              <a:buNone/>
-            </a:pPr>
-            <a:r>
-              <a:rPr lang="en-US" sz="1100" dirty="0">
-                <a:solidFill>
-                  <a:srgbClr val="4E5F70"/>
-                </a:solidFill>
-                <a:latin typeface="Arial" pitchFamily="34" charset="0"/>
-                <a:ea typeface="Microsoft JhengHei"/>
-                <a:cs typeface="Microsoft JhengHei"/>
-                <a:ea typeface="Arial" pitchFamily="34" charset="-122"/>
-                <a:cs typeface="Arial" pitchFamily="34" charset="-120"/>
-              </a:rPr>
-              <a:t>一般問題一個工作日內回覆；影響貴組作業之障礙四小時內回應，並於當日提出處置方式。</a:t>
-            </a:r>
-            <a:endParaRPr lang="en-US" sz="1100" dirty="0"/>
-          </a:p>
-        </p:txBody>
-      </p:sp>
-      <p:sp>
-        <p:nvSpPr>
-          <p:cNvPr id="13" name="Shape 11"/>
-          <p:cNvSpPr/>
-          <p:nvPr/>
-        </p:nvSpPr>
-        <p:spPr>
-          <a:xfrm>
-            <a:off x="8091221" y="1883664"/>
-            <a:ext cx="3442106" cy="1298448"/>
-          </a:xfrm>
-          <a:prstGeom prst="roundRect">
-            <a:avLst>
-              <a:gd name="adj" fmla="val 2465"/>
-            </a:avLst>
-          </a:prstGeom>
-          <a:solidFill>
-            <a:srgbClr val="FFFFFF"/>
-          </a:solidFill>
-          <a:ln w="9525">
-            <a:solidFill>
-              <a:srgbClr val="E6EBF0"/>
-            </a:solidFill>
-            <a:prstDash val="solid"/>
-          </a:ln>
-          <a:effectLst>
-            <a:outerShdw sx="100000" sy="100000" kx="0" ky="0" algn="bl" rotWithShape="0" blurRad="88900" dist="445" dir="5400000">
-              <a:srgbClr val="93A3B2">
-                <a:alpha val="16000"/>
-              </a:srgbClr>
-            </a:outerShdw>
-          </a:effectLst>
-        </p:spPr>
-      </p:sp>
-      <p:sp>
-        <p:nvSpPr>
-          <p:cNvPr id="14" name="Text 12"/>
-          <p:cNvSpPr/>
-          <p:nvPr/>
-        </p:nvSpPr>
-        <p:spPr>
-          <a:xfrm>
-            <a:off x="8310677" y="2048256"/>
-            <a:ext cx="3003194" cy="274320"/>
-          </a:xfrm>
-          <a:prstGeom prst="rect">
-            <a:avLst/>
-          </a:prstGeom>
-          <a:noFill/>
-          <a:ln/>
-        </p:spPr>
-        <p:txBody>
-          <a:bodyPr wrap="square" lIns="0" tIns="0" rIns="0" bIns="0" rtlCol="0" anchor="ctr"/>
-          <a:lstStyle/>
-          <a:p>
-            <a:pPr indent="0" marL="0">
-              <a:buNone/>
-            </a:pPr>
-            <a:r>
-              <a:rPr lang="en-US" sz="1450" b="1" dirty="0">
-                <a:solidFill>
-                  <a:srgbClr val="1D2B39"/>
-                </a:solidFill>
-                <a:latin typeface="Arial" pitchFamily="34" charset="0"/>
-                <a:ea typeface="Microsoft JhengHei"/>
-                <a:cs typeface="Microsoft JhengHei"/>
-                <a:ea typeface="Arial" pitchFamily="34" charset="-122"/>
-                <a:cs typeface="Arial" pitchFamily="34" charset="-120"/>
-              </a:rPr>
-              <a:t>資料可攜</a:t>
-            </a:r>
-            <a:endParaRPr lang="en-US" sz="1450" dirty="0"/>
-          </a:p>
-        </p:txBody>
-      </p:sp>
-      <p:sp>
-        <p:nvSpPr>
-          <p:cNvPr id="15" name="Text 13"/>
-          <p:cNvSpPr/>
-          <p:nvPr/>
-        </p:nvSpPr>
-        <p:spPr>
-          <a:xfrm>
-            <a:off x="8310677" y="2395728"/>
-            <a:ext cx="3003194" cy="640080"/>
-          </a:xfrm>
-          <a:prstGeom prst="rect">
-            <a:avLst/>
-          </a:prstGeom>
-          <a:noFill/>
-          <a:ln/>
-        </p:spPr>
-        <p:txBody>
-          <a:bodyPr wrap="square" lIns="0" tIns="0" rIns="0" bIns="0" rtlCol="0" anchor="t"/>
-          <a:lstStyle/>
-          <a:p>
-            <a:pPr indent="0" marL="0">
-              <a:lnSpc>
-                <a:spcPts val="1584"/>
-              </a:lnSpc>
-              <a:buNone/>
-            </a:pPr>
-            <a:r>
-              <a:rPr lang="en-US" sz="1100" dirty="0">
-                <a:solidFill>
-                  <a:srgbClr val="4E5F70"/>
-                </a:solidFill>
-                <a:latin typeface="Arial" pitchFamily="34" charset="0"/>
-                <a:ea typeface="Microsoft JhengHei"/>
-                <a:cs typeface="Microsoft JhengHei"/>
-                <a:ea typeface="Arial" pitchFamily="34" charset="-122"/>
-                <a:cs typeface="Arial" pitchFamily="34" charset="-120"/>
-              </a:rPr>
-              <a:t>貴組隨時可自行完整匯出（含工項、估驗、日誌、佐證與 agent 動作紀錄），格式為通用試算表。</a:t>
-            </a:r>
-            <a:endParaRPr lang="en-US" sz="1100" dirty="0"/>
-          </a:p>
-        </p:txBody>
-      </p:sp>
-      <p:sp>
-        <p:nvSpPr>
-          <p:cNvPr id="16" name="Shape 14"/>
-          <p:cNvSpPr/>
-          <p:nvPr/>
-        </p:nvSpPr>
-        <p:spPr>
-          <a:xfrm>
-            <a:off x="658368" y="3346704"/>
-            <a:ext cx="3442106" cy="1298448"/>
-          </a:xfrm>
-          <a:prstGeom prst="roundRect">
-            <a:avLst>
-              <a:gd name="adj" fmla="val 2465"/>
-            </a:avLst>
-          </a:prstGeom>
-          <a:solidFill>
-            <a:srgbClr val="FFFFFF"/>
-          </a:solidFill>
-          <a:ln w="9525">
-            <a:solidFill>
-              <a:srgbClr val="E6EBF0"/>
-            </a:solidFill>
-            <a:prstDash val="solid"/>
-          </a:ln>
-          <a:effectLst>
-            <a:outerShdw sx="100000" sy="100000" kx="0" ky="0" algn="bl" rotWithShape="0" blurRad="88900" dist="445" dir="5400000">
-              <a:srgbClr val="93A3B2">
-                <a:alpha val="16000"/>
-              </a:srgbClr>
-            </a:outerShdw>
-          </a:effectLst>
-        </p:spPr>
-      </p:sp>
-      <p:sp>
-        <p:nvSpPr>
-          <p:cNvPr id="17" name="Text 15"/>
-          <p:cNvSpPr/>
-          <p:nvPr/>
-        </p:nvSpPr>
-        <p:spPr>
-          <a:xfrm>
-            <a:off x="877824" y="3511296"/>
-            <a:ext cx="3003194" cy="274320"/>
-          </a:xfrm>
-          <a:prstGeom prst="rect">
-            <a:avLst/>
-          </a:prstGeom>
-          <a:noFill/>
-          <a:ln/>
-        </p:spPr>
-        <p:txBody>
-          <a:bodyPr wrap="square" lIns="0" tIns="0" rIns="0" bIns="0" rtlCol="0" anchor="ctr"/>
-          <a:lstStyle/>
-          <a:p>
-            <a:pPr indent="0" marL="0">
-              <a:buNone/>
-            </a:pPr>
-            <a:r>
-              <a:rPr lang="en-US" sz="1450" b="1" dirty="0">
-                <a:solidFill>
-                  <a:srgbClr val="1D2B39"/>
-                </a:solidFill>
-                <a:latin typeface="Arial" pitchFamily="34" charset="0"/>
-                <a:ea typeface="Microsoft JhengHei"/>
-                <a:cs typeface="Microsoft JhengHei"/>
-                <a:ea typeface="Arial" pitchFamily="34" charset="-122"/>
-                <a:cs typeface="Arial" pitchFamily="34" charset="-120"/>
-              </a:rPr>
-              <a:t>期滿或終止</a:t>
-            </a:r>
-            <a:endParaRPr lang="en-US" sz="1450" dirty="0"/>
-          </a:p>
-        </p:txBody>
-      </p:sp>
-      <p:sp>
-        <p:nvSpPr>
-          <p:cNvPr id="18" name="Text 16"/>
-          <p:cNvSpPr/>
-          <p:nvPr/>
-        </p:nvSpPr>
-        <p:spPr>
-          <a:xfrm>
-            <a:off x="877824" y="3858768"/>
-            <a:ext cx="3003194" cy="640080"/>
-          </a:xfrm>
-          <a:prstGeom prst="rect">
-            <a:avLst/>
-          </a:prstGeom>
-          <a:noFill/>
-          <a:ln/>
-        </p:spPr>
-        <p:txBody>
-          <a:bodyPr wrap="square" lIns="0" tIns="0" rIns="0" bIns="0" rtlCol="0" anchor="t"/>
-          <a:lstStyle/>
-          <a:p>
-            <a:pPr indent="0" marL="0">
-              <a:lnSpc>
-                <a:spcPts val="1584"/>
-              </a:lnSpc>
-              <a:buNone/>
-            </a:pPr>
-            <a:r>
-              <a:rPr lang="en-US" sz="1100" dirty="0">
-                <a:solidFill>
-                  <a:srgbClr val="4E5F70"/>
-                </a:solidFill>
-                <a:latin typeface="Arial" pitchFamily="34" charset="0"/>
-                <a:ea typeface="Microsoft JhengHei"/>
-                <a:cs typeface="Microsoft JhengHei"/>
-                <a:ea typeface="Arial" pitchFamily="34" charset="-122"/>
-                <a:cs typeface="Arial" pitchFamily="34" charset="-120"/>
-              </a:rPr>
-              <a:t>完整交付資料後依約刪除，並出具資料刪除與銷毀切結書。不以任何形式扣留機關資料。</a:t>
-            </a:r>
-            <a:endParaRPr lang="en-US" sz="1100" dirty="0"/>
-          </a:p>
-        </p:txBody>
-      </p:sp>
-      <p:sp>
-        <p:nvSpPr>
-          <p:cNvPr id="19" name="Shape 17"/>
-          <p:cNvSpPr/>
-          <p:nvPr/>
-        </p:nvSpPr>
-        <p:spPr>
-          <a:xfrm>
-            <a:off x="4374794" y="3346704"/>
-            <a:ext cx="3442106" cy="1298448"/>
-          </a:xfrm>
-          <a:prstGeom prst="roundRect">
-            <a:avLst>
-              <a:gd name="adj" fmla="val 2465"/>
-            </a:avLst>
-          </a:prstGeom>
-          <a:solidFill>
-            <a:srgbClr val="FFFFFF"/>
-          </a:solidFill>
-          <a:ln w="9525">
-            <a:solidFill>
-              <a:srgbClr val="E6EBF0"/>
-            </a:solidFill>
-            <a:prstDash val="solid"/>
-          </a:ln>
-          <a:effectLst>
-            <a:outerShdw sx="100000" sy="100000" kx="0" ky="0" algn="bl" rotWithShape="0" blurRad="88900" dist="445" dir="5400000">
-              <a:srgbClr val="93A3B2">
-                <a:alpha val="16000"/>
-              </a:srgbClr>
-            </a:outerShdw>
-          </a:effectLst>
-        </p:spPr>
-      </p:sp>
-      <p:sp>
-        <p:nvSpPr>
-          <p:cNvPr id="20" name="Text 18"/>
-          <p:cNvSpPr/>
-          <p:nvPr/>
-        </p:nvSpPr>
-        <p:spPr>
-          <a:xfrm>
-            <a:off x="4594250" y="3511296"/>
-            <a:ext cx="3003194" cy="274320"/>
-          </a:xfrm>
-          <a:prstGeom prst="rect">
-            <a:avLst/>
-          </a:prstGeom>
-          <a:noFill/>
-          <a:ln/>
-        </p:spPr>
-        <p:txBody>
-          <a:bodyPr wrap="square" lIns="0" tIns="0" rIns="0" bIns="0" rtlCol="0" anchor="ctr"/>
-          <a:lstStyle/>
-          <a:p>
-            <a:pPr indent="0" marL="0">
-              <a:buNone/>
-            </a:pPr>
-            <a:r>
-              <a:rPr lang="en-US" sz="1450" b="1" dirty="0">
-                <a:solidFill>
-                  <a:srgbClr val="1D2B39"/>
-                </a:solidFill>
-                <a:latin typeface="Arial" pitchFamily="34" charset="0"/>
-                <a:ea typeface="Microsoft JhengHei"/>
-                <a:cs typeface="Microsoft JhengHei"/>
-                <a:ea typeface="Arial" pitchFamily="34" charset="-122"/>
-                <a:cs typeface="Arial" pitchFamily="34" charset="-120"/>
-              </a:rPr>
-              <a:t>資料不作訓練</a:t>
-            </a:r>
-            <a:endParaRPr lang="en-US" sz="1450" dirty="0"/>
-          </a:p>
-        </p:txBody>
-      </p:sp>
-      <p:sp>
-        <p:nvSpPr>
-          <p:cNvPr id="21" name="Text 19"/>
-          <p:cNvSpPr/>
-          <p:nvPr/>
-        </p:nvSpPr>
-        <p:spPr>
-          <a:xfrm>
-            <a:off x="4594250" y="3858768"/>
-            <a:ext cx="3003194" cy="640080"/>
-          </a:xfrm>
-          <a:prstGeom prst="rect">
-            <a:avLst/>
-          </a:prstGeom>
-          <a:noFill/>
-          <a:ln/>
-        </p:spPr>
-        <p:txBody>
-          <a:bodyPr wrap="square" lIns="0" tIns="0" rIns="0" bIns="0" rtlCol="0" anchor="t"/>
-          <a:lstStyle/>
-          <a:p>
-            <a:pPr indent="0" marL="0">
-              <a:lnSpc>
-                <a:spcPts val="1584"/>
-              </a:lnSpc>
-              <a:buNone/>
-            </a:pPr>
-            <a:r>
-              <a:rPr lang="en-US" sz="1100" dirty="0">
-                <a:solidFill>
-                  <a:srgbClr val="4E5F70"/>
-                </a:solidFill>
-                <a:latin typeface="Arial" pitchFamily="34" charset="0"/>
-                <a:ea typeface="Microsoft JhengHei"/>
-                <a:cs typeface="Microsoft JhengHei"/>
-                <a:ea typeface="Arial" pitchFamily="34" charset="-122"/>
-                <a:cs typeface="Arial" pitchFamily="34" charset="-120"/>
-              </a:rPr>
-              <a:t>不以貴校資料訓練或改良模型。AI 模組可整組關閉，關閉後不對外送出任何內容。</a:t>
-            </a:r>
-            <a:endParaRPr lang="en-US" sz="1100" dirty="0"/>
-          </a:p>
-        </p:txBody>
-      </p:sp>
-      <p:sp>
-        <p:nvSpPr>
-          <p:cNvPr id="22" name="Shape 20"/>
-          <p:cNvSpPr/>
-          <p:nvPr/>
-        </p:nvSpPr>
-        <p:spPr>
-          <a:xfrm>
-            <a:off x="8091221" y="3346704"/>
-            <a:ext cx="3442106" cy="1298448"/>
-          </a:xfrm>
-          <a:prstGeom prst="roundRect">
-            <a:avLst>
-              <a:gd name="adj" fmla="val 2465"/>
-            </a:avLst>
-          </a:prstGeom>
-          <a:solidFill>
-            <a:srgbClr val="FFFFFF"/>
-          </a:solidFill>
-          <a:ln w="9525">
-            <a:solidFill>
-              <a:srgbClr val="E6EBF0"/>
-            </a:solidFill>
-            <a:prstDash val="solid"/>
-          </a:ln>
-          <a:effectLst>
-            <a:outerShdw sx="100000" sy="100000" kx="0" ky="0" algn="bl" rotWithShape="0" blurRad="88900" dist="445" dir="5400000">
-              <a:srgbClr val="93A3B2">
-                <a:alpha val="16000"/>
-              </a:srgbClr>
-            </a:outerShdw>
-          </a:effectLst>
-        </p:spPr>
-      </p:sp>
-      <p:sp>
-        <p:nvSpPr>
-          <p:cNvPr id="23" name="Text 21"/>
-          <p:cNvSpPr/>
-          <p:nvPr/>
-        </p:nvSpPr>
-        <p:spPr>
-          <a:xfrm>
-            <a:off x="8310677" y="3511296"/>
-            <a:ext cx="3003194" cy="274320"/>
-          </a:xfrm>
-          <a:prstGeom prst="rect">
-            <a:avLst/>
-          </a:prstGeom>
-          <a:noFill/>
-          <a:ln/>
-        </p:spPr>
-        <p:txBody>
-          <a:bodyPr wrap="square" lIns="0" tIns="0" rIns="0" bIns="0" rtlCol="0" anchor="ctr"/>
-          <a:lstStyle/>
-          <a:p>
-            <a:pPr indent="0" marL="0">
-              <a:buNone/>
-            </a:pPr>
-            <a:r>
-              <a:rPr lang="en-US" sz="1450" b="1" dirty="0">
-                <a:solidFill>
-                  <a:srgbClr val="1D2B39"/>
-                </a:solidFill>
-                <a:latin typeface="Arial" pitchFamily="34" charset="0"/>
-                <a:ea typeface="Microsoft JhengHei"/>
-                <a:cs typeface="Microsoft JhengHei"/>
-                <a:ea typeface="Arial" pitchFamily="34" charset="-122"/>
-                <a:cs typeface="Arial" pitchFamily="34" charset="-120"/>
-              </a:rPr>
-              <a:t>每月服務報告</a:t>
-            </a:r>
-            <a:endParaRPr lang="en-US" sz="1450" dirty="0"/>
-          </a:p>
-        </p:txBody>
-      </p:sp>
-      <p:sp>
-        <p:nvSpPr>
-          <p:cNvPr id="24" name="Text 22"/>
-          <p:cNvSpPr/>
-          <p:nvPr/>
-        </p:nvSpPr>
-        <p:spPr>
-          <a:xfrm>
-            <a:off x="8310677" y="3858768"/>
-            <a:ext cx="3003194" cy="640080"/>
-          </a:xfrm>
-          <a:prstGeom prst="rect">
-            <a:avLst/>
-          </a:prstGeom>
-          <a:noFill/>
-          <a:ln/>
-        </p:spPr>
-        <p:txBody>
-          <a:bodyPr wrap="square" lIns="0" tIns="0" rIns="0" bIns="0" rtlCol="0" anchor="t"/>
-          <a:lstStyle/>
-          <a:p>
-            <a:pPr indent="0" marL="0">
-              <a:lnSpc>
-                <a:spcPts val="1584"/>
-              </a:lnSpc>
-              <a:buNone/>
-            </a:pPr>
-            <a:r>
-              <a:rPr lang="en-US" sz="1100" dirty="0">
-                <a:solidFill>
-                  <a:srgbClr val="4E5F70"/>
-                </a:solidFill>
-                <a:latin typeface="Arial" pitchFamily="34" charset="0"/>
-                <a:ea typeface="Microsoft JhengHei"/>
-                <a:cs typeface="Microsoft JhengHei"/>
-                <a:ea typeface="Arial" pitchFamily="34" charset="-122"/>
-                <a:cs typeface="Arial" pitchFamily="34" charset="-120"/>
-              </a:rPr>
-              <a:t>每月提供用量、事件與已處理問題之書面報告，可直接作為履約管理與驗收之佐證。</a:t>
-            </a:r>
-            <a:endParaRPr lang="en-US" sz="1100" dirty="0"/>
-          </a:p>
-        </p:txBody>
-      </p:sp>
-      <p:sp>
-        <p:nvSpPr>
-          <p:cNvPr id="25" name="Shape 23"/>
-          <p:cNvSpPr/>
-          <p:nvPr/>
-        </p:nvSpPr>
-        <p:spPr>
-          <a:xfrm>
-            <a:off x="658368" y="4773168"/>
-            <a:ext cx="10874959" cy="841248"/>
-          </a:xfrm>
-          <a:prstGeom prst="roundRect">
-            <a:avLst>
-              <a:gd name="adj" fmla="val 3804"/>
-            </a:avLst>
-          </a:prstGeom>
-          <a:solidFill>
-            <a:srgbClr val="E1F1E9"/>
-          </a:solidFill>
-          <a:ln w="12700">
-            <a:solidFill>
-              <a:srgbClr val="E1F1E9"/>
-            </a:solidFill>
-            <a:prstDash val="solid"/>
-          </a:ln>
-        </p:spPr>
-      </p:sp>
-      <p:sp>
-        <p:nvSpPr>
-          <p:cNvPr id="26" name="Text 24"/>
-          <p:cNvSpPr/>
-          <p:nvPr/>
-        </p:nvSpPr>
-        <p:spPr>
-          <a:xfrm>
-            <a:off x="932688" y="4773168"/>
-            <a:ext cx="10326319" cy="841248"/>
-          </a:xfrm>
-          <a:prstGeom prst="rect">
-            <a:avLst/>
-          </a:prstGeom>
-          <a:noFill/>
-          <a:ln/>
-        </p:spPr>
-        <p:txBody>
-          <a:bodyPr wrap="square" lIns="0" tIns="0" rIns="0" bIns="0" rtlCol="0" anchor="ctr"/>
-          <a:lstStyle/>
-          <a:p>
-            <a:pPr indent="0" marL="0">
-              <a:lnSpc>
-                <a:spcPts val="1900"/>
-              </a:lnSpc>
-              <a:buNone/>
-            </a:pPr>
-            <a:r>
-              <a:rPr lang="en-US" sz="1250" b="1" dirty="0">
-                <a:solidFill>
-                  <a:srgbClr val="1D2B39"/>
-                </a:solidFill>
-                <a:latin typeface="Arial" pitchFamily="34" charset="0"/>
-                <a:ea typeface="Microsoft JhengHei"/>
-                <a:cs typeface="Microsoft JhengHei"/>
-                <a:ea typeface="Arial" pitchFamily="34" charset="-122"/>
-                <a:cs typeface="Arial" pitchFamily="34" charset="-120"/>
-              </a:rPr>
-              <a:t>為什麼敢這樣寫：</a:t>
-            </a:r>
-            <a:pPr indent="0" marL="0">
-              <a:lnSpc>
-                <a:spcPts val="1900"/>
-              </a:lnSpc>
-              <a:buNone/>
-            </a:pPr>
-            <a:r>
-              <a:rPr lang="en-US" sz="1250" dirty="0">
-                <a:solidFill>
-                  <a:srgbClr val="4E5F70"/>
-                </a:solidFill>
-                <a:latin typeface="Arial" pitchFamily="34" charset="0"/>
-                <a:ea typeface="Microsoft JhengHei"/>
-                <a:cs typeface="Microsoft JhengHei"/>
-                <a:ea typeface="Arial" pitchFamily="34" charset="-122"/>
-                <a:cs typeface="Arial" pitchFamily="34" charset="-120"/>
-              </a:rPr>
-              <a:t>系統已經上線並有自有網域，弱點掃描無高風險，權限在資料庫層逐表實測，每個動作都留痕。這不是等簽約後才要開始做的東西——是已經在跑的東西。</a:t>
-            </a:r>
-            <a:endParaRPr lang="en-US" sz="1250" dirty="0"/>
+              <a:t>但要用哪一種，等貴組決定合作方式之後再談就好。</a:t>
+            </a:r>
+            <a:endParaRPr lang="en-US" sz="1200" dirty="0"/>
           </a:p>
         </p:txBody>
       </p:sp>
@@ -20844,7 +22124,7 @@
                 <a:ea typeface="Arial" pitchFamily="34" charset="-122"/>
                 <a:cs typeface="Arial" pitchFamily="34" charset="-120"/>
               </a:rPr>
-              <a:t>參 · 簽辦</a:t>
+              <a:t>參 · 行政</a:t>
             </a:r>
             <a:endParaRPr lang="en-US" sz="900" dirty="0"/>
           </a:p>
@@ -20926,7 +22206,7 @@
                 <a:ea typeface="Arial" pitchFamily="34" charset="-122"/>
                 <a:cs typeface="Arial" pitchFamily="34" charset="-120"/>
               </a:rPr>
-              <a:t>簽稿骨架</a:t>
+              <a:t>服務承諾</a:t>
             </a:r>
             <a:endParaRPr lang="en-US" sz="950" dirty="0"/>
           </a:p>
@@ -20957,6 +22237,1047 @@
               <a:buNone/>
             </a:pPr>
             <a:r>
+              <a:rPr lang="en-US" sz="3100" b="1" dirty="0">
+                <a:solidFill>
+                  <a:srgbClr val="1D2B39"/>
+                </a:solidFill>
+                <a:latin typeface="Arial" pitchFamily="34" charset="0"/>
+                <a:ea typeface="Microsoft JhengHei"/>
+                <a:cs typeface="Microsoft JhengHei"/>
+                <a:ea typeface="Arial" pitchFamily="34" charset="-122"/>
+                <a:cs typeface="Arial" pitchFamily="34" charset="-120"/>
+              </a:rPr>
+              <a:t>若真的合作，這六項會寫進契約。</a:t>
+            </a:r>
+            <a:endParaRPr lang="en-US" sz="3100" dirty="0"/>
+          </a:p>
+        </p:txBody>
+      </p:sp>
+      <p:sp>
+        <p:nvSpPr>
+          <p:cNvPr id="6" name="Text 4"/>
+          <p:cNvSpPr/>
+          <p:nvPr/>
+        </p:nvSpPr>
+        <p:spPr>
+          <a:xfrm>
+            <a:off x="658368" y="1481328"/>
+            <a:ext cx="10874959" cy="292608"/>
+          </a:xfrm>
+          <a:prstGeom prst="rect">
+            <a:avLst/>
+          </a:prstGeom>
+          <a:noFill/>
+          <a:ln/>
+        </p:spPr>
+        <p:txBody>
+          <a:bodyPr wrap="square" lIns="0" tIns="0" rIns="0" bIns="0" rtlCol="0" anchor="ctr"/>
+          <a:lstStyle/>
+          <a:p>
+            <a:pPr indent="0" marL="0">
+              <a:buNone/>
+            </a:pPr>
+            <a:r>
+              <a:rPr lang="en-US" sz="1250" dirty="0">
+                <a:solidFill>
+                  <a:srgbClr val="4E5F70"/>
+                </a:solidFill>
+                <a:latin typeface="Arial" pitchFamily="34" charset="0"/>
+                <a:ea typeface="Microsoft JhengHei"/>
+                <a:cs typeface="Microsoft JhengHei"/>
+                <a:ea typeface="Arial" pitchFamily="34" charset="-122"/>
+                <a:cs typeface="Arial" pitchFamily="34" charset="-120"/>
+              </a:rPr>
+              <a:t>對一家新公司，最合理的疑慮是「會不會做一做就不見了」。所以以下六項不是口頭保證，是擬全部寫進服務契約、可被檢核的義務。</a:t>
+            </a:r>
+            <a:endParaRPr lang="en-US" sz="1250" dirty="0"/>
+          </a:p>
+        </p:txBody>
+      </p:sp>
+      <p:sp>
+        <p:nvSpPr>
+          <p:cNvPr id="7" name="Shape 5"/>
+          <p:cNvSpPr/>
+          <p:nvPr/>
+        </p:nvSpPr>
+        <p:spPr>
+          <a:xfrm>
+            <a:off x="658368" y="1883664"/>
+            <a:ext cx="3442106" cy="1298448"/>
+          </a:xfrm>
+          <a:prstGeom prst="roundRect">
+            <a:avLst>
+              <a:gd name="adj" fmla="val 2465"/>
+            </a:avLst>
+          </a:prstGeom>
+          <a:solidFill>
+            <a:srgbClr val="FFFFFF"/>
+          </a:solidFill>
+          <a:ln w="9525">
+            <a:solidFill>
+              <a:srgbClr val="E6EBF0"/>
+            </a:solidFill>
+            <a:prstDash val="solid"/>
+          </a:ln>
+          <a:effectLst>
+            <a:outerShdw sx="100000" sy="100000" kx="0" ky="0" algn="bl" rotWithShape="0" blurRad="88900" dist="445" dir="5400000">
+              <a:srgbClr val="93A3B2">
+                <a:alpha val="16000"/>
+              </a:srgbClr>
+            </a:outerShdw>
+          </a:effectLst>
+        </p:spPr>
+      </p:sp>
+      <p:sp>
+        <p:nvSpPr>
+          <p:cNvPr id="8" name="Text 6"/>
+          <p:cNvSpPr/>
+          <p:nvPr/>
+        </p:nvSpPr>
+        <p:spPr>
+          <a:xfrm>
+            <a:off x="877824" y="2048256"/>
+            <a:ext cx="3003194" cy="274320"/>
+          </a:xfrm>
+          <a:prstGeom prst="rect">
+            <a:avLst/>
+          </a:prstGeom>
+          <a:noFill/>
+          <a:ln/>
+        </p:spPr>
+        <p:txBody>
+          <a:bodyPr wrap="square" lIns="0" tIns="0" rIns="0" bIns="0" rtlCol="0" anchor="ctr"/>
+          <a:lstStyle/>
+          <a:p>
+            <a:pPr indent="0" marL="0">
+              <a:buNone/>
+            </a:pPr>
+            <a:r>
+              <a:rPr lang="en-US" sz="1450" b="1" dirty="0">
+                <a:solidFill>
+                  <a:srgbClr val="1D2B39"/>
+                </a:solidFill>
+                <a:latin typeface="Arial" pitchFamily="34" charset="0"/>
+                <a:ea typeface="Microsoft JhengHei"/>
+                <a:cs typeface="Microsoft JhengHei"/>
+                <a:ea typeface="Arial" pitchFamily="34" charset="-122"/>
+                <a:cs typeface="Arial" pitchFamily="34" charset="-120"/>
+              </a:rPr>
+              <a:t>服務可用率</a:t>
+            </a:r>
+            <a:endParaRPr lang="en-US" sz="1450" dirty="0"/>
+          </a:p>
+        </p:txBody>
+      </p:sp>
+      <p:sp>
+        <p:nvSpPr>
+          <p:cNvPr id="9" name="Text 7"/>
+          <p:cNvSpPr/>
+          <p:nvPr/>
+        </p:nvSpPr>
+        <p:spPr>
+          <a:xfrm>
+            <a:off x="877824" y="2395728"/>
+            <a:ext cx="3003194" cy="640080"/>
+          </a:xfrm>
+          <a:prstGeom prst="rect">
+            <a:avLst/>
+          </a:prstGeom>
+          <a:noFill/>
+          <a:ln/>
+        </p:spPr>
+        <p:txBody>
+          <a:bodyPr wrap="square" lIns="0" tIns="0" rIns="0" bIns="0" rtlCol="0" anchor="t"/>
+          <a:lstStyle/>
+          <a:p>
+            <a:pPr indent="0" marL="0">
+              <a:lnSpc>
+                <a:spcPts val="1584"/>
+              </a:lnSpc>
+              <a:buNone/>
+            </a:pPr>
+            <a:r>
+              <a:rPr lang="en-US" sz="1100" dirty="0">
+                <a:solidFill>
+                  <a:srgbClr val="4E5F70"/>
+                </a:solidFill>
+                <a:latin typeface="Arial" pitchFamily="34" charset="0"/>
+                <a:ea typeface="Microsoft JhengHei"/>
+                <a:cs typeface="Microsoft JhengHei"/>
+                <a:ea typeface="Arial" pitchFamily="34" charset="-122"/>
+                <a:cs typeface="Arial" pitchFamily="34" charset="-120"/>
+              </a:rPr>
+              <a:t>月可用率 99% 以上（不含預告維護）。未達標時，當月服務費按比例折抵次期費用。</a:t>
+            </a:r>
+            <a:endParaRPr lang="en-US" sz="1100" dirty="0"/>
+          </a:p>
+        </p:txBody>
+      </p:sp>
+      <p:sp>
+        <p:nvSpPr>
+          <p:cNvPr id="10" name="Shape 8"/>
+          <p:cNvSpPr/>
+          <p:nvPr/>
+        </p:nvSpPr>
+        <p:spPr>
+          <a:xfrm>
+            <a:off x="4374794" y="1883664"/>
+            <a:ext cx="3442106" cy="1298448"/>
+          </a:xfrm>
+          <a:prstGeom prst="roundRect">
+            <a:avLst>
+              <a:gd name="adj" fmla="val 2465"/>
+            </a:avLst>
+          </a:prstGeom>
+          <a:solidFill>
+            <a:srgbClr val="FFFFFF"/>
+          </a:solidFill>
+          <a:ln w="9525">
+            <a:solidFill>
+              <a:srgbClr val="E6EBF0"/>
+            </a:solidFill>
+            <a:prstDash val="solid"/>
+          </a:ln>
+          <a:effectLst>
+            <a:outerShdw sx="100000" sy="100000" kx="0" ky="0" algn="bl" rotWithShape="0" blurRad="88900" dist="445" dir="5400000">
+              <a:srgbClr val="93A3B2">
+                <a:alpha val="16000"/>
+              </a:srgbClr>
+            </a:outerShdw>
+          </a:effectLst>
+        </p:spPr>
+      </p:sp>
+      <p:sp>
+        <p:nvSpPr>
+          <p:cNvPr id="11" name="Text 9"/>
+          <p:cNvSpPr/>
+          <p:nvPr/>
+        </p:nvSpPr>
+        <p:spPr>
+          <a:xfrm>
+            <a:off x="4594250" y="2048256"/>
+            <a:ext cx="3003194" cy="274320"/>
+          </a:xfrm>
+          <a:prstGeom prst="rect">
+            <a:avLst/>
+          </a:prstGeom>
+          <a:noFill/>
+          <a:ln/>
+        </p:spPr>
+        <p:txBody>
+          <a:bodyPr wrap="square" lIns="0" tIns="0" rIns="0" bIns="0" rtlCol="0" anchor="ctr"/>
+          <a:lstStyle/>
+          <a:p>
+            <a:pPr indent="0" marL="0">
+              <a:buNone/>
+            </a:pPr>
+            <a:r>
+              <a:rPr lang="en-US" sz="1450" b="1" dirty="0">
+                <a:solidFill>
+                  <a:srgbClr val="1D2B39"/>
+                </a:solidFill>
+                <a:latin typeface="Arial" pitchFamily="34" charset="0"/>
+                <a:ea typeface="Microsoft JhengHei"/>
+                <a:cs typeface="Microsoft JhengHei"/>
+                <a:ea typeface="Arial" pitchFamily="34" charset="-122"/>
+                <a:cs typeface="Arial" pitchFamily="34" charset="-120"/>
+              </a:rPr>
+              <a:t>回應時限</a:t>
+            </a:r>
+            <a:endParaRPr lang="en-US" sz="1450" dirty="0"/>
+          </a:p>
+        </p:txBody>
+      </p:sp>
+      <p:sp>
+        <p:nvSpPr>
+          <p:cNvPr id="12" name="Text 10"/>
+          <p:cNvSpPr/>
+          <p:nvPr/>
+        </p:nvSpPr>
+        <p:spPr>
+          <a:xfrm>
+            <a:off x="4594250" y="2395728"/>
+            <a:ext cx="3003194" cy="640080"/>
+          </a:xfrm>
+          <a:prstGeom prst="rect">
+            <a:avLst/>
+          </a:prstGeom>
+          <a:noFill/>
+          <a:ln/>
+        </p:spPr>
+        <p:txBody>
+          <a:bodyPr wrap="square" lIns="0" tIns="0" rIns="0" bIns="0" rtlCol="0" anchor="t"/>
+          <a:lstStyle/>
+          <a:p>
+            <a:pPr indent="0" marL="0">
+              <a:lnSpc>
+                <a:spcPts val="1584"/>
+              </a:lnSpc>
+              <a:buNone/>
+            </a:pPr>
+            <a:r>
+              <a:rPr lang="en-US" sz="1100" dirty="0">
+                <a:solidFill>
+                  <a:srgbClr val="4E5F70"/>
+                </a:solidFill>
+                <a:latin typeface="Arial" pitchFamily="34" charset="0"/>
+                <a:ea typeface="Microsoft JhengHei"/>
+                <a:cs typeface="Microsoft JhengHei"/>
+                <a:ea typeface="Arial" pitchFamily="34" charset="-122"/>
+                <a:cs typeface="Arial" pitchFamily="34" charset="-120"/>
+              </a:rPr>
+              <a:t>一般問題一個工作日內回覆；影響貴組作業之障礙四小時內回應，並於當日提出處置方式。</a:t>
+            </a:r>
+            <a:endParaRPr lang="en-US" sz="1100" dirty="0"/>
+          </a:p>
+        </p:txBody>
+      </p:sp>
+      <p:sp>
+        <p:nvSpPr>
+          <p:cNvPr id="13" name="Shape 11"/>
+          <p:cNvSpPr/>
+          <p:nvPr/>
+        </p:nvSpPr>
+        <p:spPr>
+          <a:xfrm>
+            <a:off x="8091221" y="1883664"/>
+            <a:ext cx="3442106" cy="1298448"/>
+          </a:xfrm>
+          <a:prstGeom prst="roundRect">
+            <a:avLst>
+              <a:gd name="adj" fmla="val 2465"/>
+            </a:avLst>
+          </a:prstGeom>
+          <a:solidFill>
+            <a:srgbClr val="FFFFFF"/>
+          </a:solidFill>
+          <a:ln w="9525">
+            <a:solidFill>
+              <a:srgbClr val="E6EBF0"/>
+            </a:solidFill>
+            <a:prstDash val="solid"/>
+          </a:ln>
+          <a:effectLst>
+            <a:outerShdw sx="100000" sy="100000" kx="0" ky="0" algn="bl" rotWithShape="0" blurRad="88900" dist="445" dir="5400000">
+              <a:srgbClr val="93A3B2">
+                <a:alpha val="16000"/>
+              </a:srgbClr>
+            </a:outerShdw>
+          </a:effectLst>
+        </p:spPr>
+      </p:sp>
+      <p:sp>
+        <p:nvSpPr>
+          <p:cNvPr id="14" name="Text 12"/>
+          <p:cNvSpPr/>
+          <p:nvPr/>
+        </p:nvSpPr>
+        <p:spPr>
+          <a:xfrm>
+            <a:off x="8310677" y="2048256"/>
+            <a:ext cx="3003194" cy="274320"/>
+          </a:xfrm>
+          <a:prstGeom prst="rect">
+            <a:avLst/>
+          </a:prstGeom>
+          <a:noFill/>
+          <a:ln/>
+        </p:spPr>
+        <p:txBody>
+          <a:bodyPr wrap="square" lIns="0" tIns="0" rIns="0" bIns="0" rtlCol="0" anchor="ctr"/>
+          <a:lstStyle/>
+          <a:p>
+            <a:pPr indent="0" marL="0">
+              <a:buNone/>
+            </a:pPr>
+            <a:r>
+              <a:rPr lang="en-US" sz="1450" b="1" dirty="0">
+                <a:solidFill>
+                  <a:srgbClr val="1D2B39"/>
+                </a:solidFill>
+                <a:latin typeface="Arial" pitchFamily="34" charset="0"/>
+                <a:ea typeface="Microsoft JhengHei"/>
+                <a:cs typeface="Microsoft JhengHei"/>
+                <a:ea typeface="Arial" pitchFamily="34" charset="-122"/>
+                <a:cs typeface="Arial" pitchFamily="34" charset="-120"/>
+              </a:rPr>
+              <a:t>資料可攜</a:t>
+            </a:r>
+            <a:endParaRPr lang="en-US" sz="1450" dirty="0"/>
+          </a:p>
+        </p:txBody>
+      </p:sp>
+      <p:sp>
+        <p:nvSpPr>
+          <p:cNvPr id="15" name="Text 13"/>
+          <p:cNvSpPr/>
+          <p:nvPr/>
+        </p:nvSpPr>
+        <p:spPr>
+          <a:xfrm>
+            <a:off x="8310677" y="2395728"/>
+            <a:ext cx="3003194" cy="640080"/>
+          </a:xfrm>
+          <a:prstGeom prst="rect">
+            <a:avLst/>
+          </a:prstGeom>
+          <a:noFill/>
+          <a:ln/>
+        </p:spPr>
+        <p:txBody>
+          <a:bodyPr wrap="square" lIns="0" tIns="0" rIns="0" bIns="0" rtlCol="0" anchor="t"/>
+          <a:lstStyle/>
+          <a:p>
+            <a:pPr indent="0" marL="0">
+              <a:lnSpc>
+                <a:spcPts val="1584"/>
+              </a:lnSpc>
+              <a:buNone/>
+            </a:pPr>
+            <a:r>
+              <a:rPr lang="en-US" sz="1100" dirty="0">
+                <a:solidFill>
+                  <a:srgbClr val="4E5F70"/>
+                </a:solidFill>
+                <a:latin typeface="Arial" pitchFamily="34" charset="0"/>
+                <a:ea typeface="Microsoft JhengHei"/>
+                <a:cs typeface="Microsoft JhengHei"/>
+                <a:ea typeface="Arial" pitchFamily="34" charset="-122"/>
+                <a:cs typeface="Arial" pitchFamily="34" charset="-120"/>
+              </a:rPr>
+              <a:t>貴組隨時可自行完整匯出（含工項、估驗、日誌、佐證與 agent 動作紀錄），格式為通用試算表。</a:t>
+            </a:r>
+            <a:endParaRPr lang="en-US" sz="1100" dirty="0"/>
+          </a:p>
+        </p:txBody>
+      </p:sp>
+      <p:sp>
+        <p:nvSpPr>
+          <p:cNvPr id="16" name="Shape 14"/>
+          <p:cNvSpPr/>
+          <p:nvPr/>
+        </p:nvSpPr>
+        <p:spPr>
+          <a:xfrm>
+            <a:off x="658368" y="3346704"/>
+            <a:ext cx="3442106" cy="1298448"/>
+          </a:xfrm>
+          <a:prstGeom prst="roundRect">
+            <a:avLst>
+              <a:gd name="adj" fmla="val 2465"/>
+            </a:avLst>
+          </a:prstGeom>
+          <a:solidFill>
+            <a:srgbClr val="FFFFFF"/>
+          </a:solidFill>
+          <a:ln w="9525">
+            <a:solidFill>
+              <a:srgbClr val="E6EBF0"/>
+            </a:solidFill>
+            <a:prstDash val="solid"/>
+          </a:ln>
+          <a:effectLst>
+            <a:outerShdw sx="100000" sy="100000" kx="0" ky="0" algn="bl" rotWithShape="0" blurRad="88900" dist="445" dir="5400000">
+              <a:srgbClr val="93A3B2">
+                <a:alpha val="16000"/>
+              </a:srgbClr>
+            </a:outerShdw>
+          </a:effectLst>
+        </p:spPr>
+      </p:sp>
+      <p:sp>
+        <p:nvSpPr>
+          <p:cNvPr id="17" name="Text 15"/>
+          <p:cNvSpPr/>
+          <p:nvPr/>
+        </p:nvSpPr>
+        <p:spPr>
+          <a:xfrm>
+            <a:off x="877824" y="3511296"/>
+            <a:ext cx="3003194" cy="274320"/>
+          </a:xfrm>
+          <a:prstGeom prst="rect">
+            <a:avLst/>
+          </a:prstGeom>
+          <a:noFill/>
+          <a:ln/>
+        </p:spPr>
+        <p:txBody>
+          <a:bodyPr wrap="square" lIns="0" tIns="0" rIns="0" bIns="0" rtlCol="0" anchor="ctr"/>
+          <a:lstStyle/>
+          <a:p>
+            <a:pPr indent="0" marL="0">
+              <a:buNone/>
+            </a:pPr>
+            <a:r>
+              <a:rPr lang="en-US" sz="1450" b="1" dirty="0">
+                <a:solidFill>
+                  <a:srgbClr val="1D2B39"/>
+                </a:solidFill>
+                <a:latin typeface="Arial" pitchFamily="34" charset="0"/>
+                <a:ea typeface="Microsoft JhengHei"/>
+                <a:cs typeface="Microsoft JhengHei"/>
+                <a:ea typeface="Arial" pitchFamily="34" charset="-122"/>
+                <a:cs typeface="Arial" pitchFamily="34" charset="-120"/>
+              </a:rPr>
+              <a:t>期滿或終止</a:t>
+            </a:r>
+            <a:endParaRPr lang="en-US" sz="1450" dirty="0"/>
+          </a:p>
+        </p:txBody>
+      </p:sp>
+      <p:sp>
+        <p:nvSpPr>
+          <p:cNvPr id="18" name="Text 16"/>
+          <p:cNvSpPr/>
+          <p:nvPr/>
+        </p:nvSpPr>
+        <p:spPr>
+          <a:xfrm>
+            <a:off x="877824" y="3858768"/>
+            <a:ext cx="3003194" cy="640080"/>
+          </a:xfrm>
+          <a:prstGeom prst="rect">
+            <a:avLst/>
+          </a:prstGeom>
+          <a:noFill/>
+          <a:ln/>
+        </p:spPr>
+        <p:txBody>
+          <a:bodyPr wrap="square" lIns="0" tIns="0" rIns="0" bIns="0" rtlCol="0" anchor="t"/>
+          <a:lstStyle/>
+          <a:p>
+            <a:pPr indent="0" marL="0">
+              <a:lnSpc>
+                <a:spcPts val="1584"/>
+              </a:lnSpc>
+              <a:buNone/>
+            </a:pPr>
+            <a:r>
+              <a:rPr lang="en-US" sz="1100" dirty="0">
+                <a:solidFill>
+                  <a:srgbClr val="4E5F70"/>
+                </a:solidFill>
+                <a:latin typeface="Arial" pitchFamily="34" charset="0"/>
+                <a:ea typeface="Microsoft JhengHei"/>
+                <a:cs typeface="Microsoft JhengHei"/>
+                <a:ea typeface="Arial" pitchFamily="34" charset="-122"/>
+                <a:cs typeface="Arial" pitchFamily="34" charset="-120"/>
+              </a:rPr>
+              <a:t>完整交付資料後依約刪除，並出具資料刪除與銷毀切結書。不以任何形式扣留機關資料。</a:t>
+            </a:r>
+            <a:endParaRPr lang="en-US" sz="1100" dirty="0"/>
+          </a:p>
+        </p:txBody>
+      </p:sp>
+      <p:sp>
+        <p:nvSpPr>
+          <p:cNvPr id="19" name="Shape 17"/>
+          <p:cNvSpPr/>
+          <p:nvPr/>
+        </p:nvSpPr>
+        <p:spPr>
+          <a:xfrm>
+            <a:off x="4374794" y="3346704"/>
+            <a:ext cx="3442106" cy="1298448"/>
+          </a:xfrm>
+          <a:prstGeom prst="roundRect">
+            <a:avLst>
+              <a:gd name="adj" fmla="val 2465"/>
+            </a:avLst>
+          </a:prstGeom>
+          <a:solidFill>
+            <a:srgbClr val="FFFFFF"/>
+          </a:solidFill>
+          <a:ln w="9525">
+            <a:solidFill>
+              <a:srgbClr val="E6EBF0"/>
+            </a:solidFill>
+            <a:prstDash val="solid"/>
+          </a:ln>
+          <a:effectLst>
+            <a:outerShdw sx="100000" sy="100000" kx="0" ky="0" algn="bl" rotWithShape="0" blurRad="88900" dist="445" dir="5400000">
+              <a:srgbClr val="93A3B2">
+                <a:alpha val="16000"/>
+              </a:srgbClr>
+            </a:outerShdw>
+          </a:effectLst>
+        </p:spPr>
+      </p:sp>
+      <p:sp>
+        <p:nvSpPr>
+          <p:cNvPr id="20" name="Text 18"/>
+          <p:cNvSpPr/>
+          <p:nvPr/>
+        </p:nvSpPr>
+        <p:spPr>
+          <a:xfrm>
+            <a:off x="4594250" y="3511296"/>
+            <a:ext cx="3003194" cy="274320"/>
+          </a:xfrm>
+          <a:prstGeom prst="rect">
+            <a:avLst/>
+          </a:prstGeom>
+          <a:noFill/>
+          <a:ln/>
+        </p:spPr>
+        <p:txBody>
+          <a:bodyPr wrap="square" lIns="0" tIns="0" rIns="0" bIns="0" rtlCol="0" anchor="ctr"/>
+          <a:lstStyle/>
+          <a:p>
+            <a:pPr indent="0" marL="0">
+              <a:buNone/>
+            </a:pPr>
+            <a:r>
+              <a:rPr lang="en-US" sz="1450" b="1" dirty="0">
+                <a:solidFill>
+                  <a:srgbClr val="1D2B39"/>
+                </a:solidFill>
+                <a:latin typeface="Arial" pitchFamily="34" charset="0"/>
+                <a:ea typeface="Microsoft JhengHei"/>
+                <a:cs typeface="Microsoft JhengHei"/>
+                <a:ea typeface="Arial" pitchFamily="34" charset="-122"/>
+                <a:cs typeface="Arial" pitchFamily="34" charset="-120"/>
+              </a:rPr>
+              <a:t>資料不作訓練</a:t>
+            </a:r>
+            <a:endParaRPr lang="en-US" sz="1450" dirty="0"/>
+          </a:p>
+        </p:txBody>
+      </p:sp>
+      <p:sp>
+        <p:nvSpPr>
+          <p:cNvPr id="21" name="Text 19"/>
+          <p:cNvSpPr/>
+          <p:nvPr/>
+        </p:nvSpPr>
+        <p:spPr>
+          <a:xfrm>
+            <a:off x="4594250" y="3858768"/>
+            <a:ext cx="3003194" cy="640080"/>
+          </a:xfrm>
+          <a:prstGeom prst="rect">
+            <a:avLst/>
+          </a:prstGeom>
+          <a:noFill/>
+          <a:ln/>
+        </p:spPr>
+        <p:txBody>
+          <a:bodyPr wrap="square" lIns="0" tIns="0" rIns="0" bIns="0" rtlCol="0" anchor="t"/>
+          <a:lstStyle/>
+          <a:p>
+            <a:pPr indent="0" marL="0">
+              <a:lnSpc>
+                <a:spcPts val="1584"/>
+              </a:lnSpc>
+              <a:buNone/>
+            </a:pPr>
+            <a:r>
+              <a:rPr lang="en-US" sz="1100" dirty="0">
+                <a:solidFill>
+                  <a:srgbClr val="4E5F70"/>
+                </a:solidFill>
+                <a:latin typeface="Arial" pitchFamily="34" charset="0"/>
+                <a:ea typeface="Microsoft JhengHei"/>
+                <a:cs typeface="Microsoft JhengHei"/>
+                <a:ea typeface="Arial" pitchFamily="34" charset="-122"/>
+                <a:cs typeface="Arial" pitchFamily="34" charset="-120"/>
+              </a:rPr>
+              <a:t>不以貴校資料訓練或改良模型。AI 模組可整組關閉，關閉後不對外送出任何內容。</a:t>
+            </a:r>
+            <a:endParaRPr lang="en-US" sz="1100" dirty="0"/>
+          </a:p>
+        </p:txBody>
+      </p:sp>
+      <p:sp>
+        <p:nvSpPr>
+          <p:cNvPr id="22" name="Shape 20"/>
+          <p:cNvSpPr/>
+          <p:nvPr/>
+        </p:nvSpPr>
+        <p:spPr>
+          <a:xfrm>
+            <a:off x="8091221" y="3346704"/>
+            <a:ext cx="3442106" cy="1298448"/>
+          </a:xfrm>
+          <a:prstGeom prst="roundRect">
+            <a:avLst>
+              <a:gd name="adj" fmla="val 2465"/>
+            </a:avLst>
+          </a:prstGeom>
+          <a:solidFill>
+            <a:srgbClr val="FFFFFF"/>
+          </a:solidFill>
+          <a:ln w="9525">
+            <a:solidFill>
+              <a:srgbClr val="E6EBF0"/>
+            </a:solidFill>
+            <a:prstDash val="solid"/>
+          </a:ln>
+          <a:effectLst>
+            <a:outerShdw sx="100000" sy="100000" kx="0" ky="0" algn="bl" rotWithShape="0" blurRad="88900" dist="445" dir="5400000">
+              <a:srgbClr val="93A3B2">
+                <a:alpha val="16000"/>
+              </a:srgbClr>
+            </a:outerShdw>
+          </a:effectLst>
+        </p:spPr>
+      </p:sp>
+      <p:sp>
+        <p:nvSpPr>
+          <p:cNvPr id="23" name="Text 21"/>
+          <p:cNvSpPr/>
+          <p:nvPr/>
+        </p:nvSpPr>
+        <p:spPr>
+          <a:xfrm>
+            <a:off x="8310677" y="3511296"/>
+            <a:ext cx="3003194" cy="274320"/>
+          </a:xfrm>
+          <a:prstGeom prst="rect">
+            <a:avLst/>
+          </a:prstGeom>
+          <a:noFill/>
+          <a:ln/>
+        </p:spPr>
+        <p:txBody>
+          <a:bodyPr wrap="square" lIns="0" tIns="0" rIns="0" bIns="0" rtlCol="0" anchor="ctr"/>
+          <a:lstStyle/>
+          <a:p>
+            <a:pPr indent="0" marL="0">
+              <a:buNone/>
+            </a:pPr>
+            <a:r>
+              <a:rPr lang="en-US" sz="1450" b="1" dirty="0">
+                <a:solidFill>
+                  <a:srgbClr val="1D2B39"/>
+                </a:solidFill>
+                <a:latin typeface="Arial" pitchFamily="34" charset="0"/>
+                <a:ea typeface="Microsoft JhengHei"/>
+                <a:cs typeface="Microsoft JhengHei"/>
+                <a:ea typeface="Arial" pitchFamily="34" charset="-122"/>
+                <a:cs typeface="Arial" pitchFamily="34" charset="-120"/>
+              </a:rPr>
+              <a:t>每月服務報告</a:t>
+            </a:r>
+            <a:endParaRPr lang="en-US" sz="1450" dirty="0"/>
+          </a:p>
+        </p:txBody>
+      </p:sp>
+      <p:sp>
+        <p:nvSpPr>
+          <p:cNvPr id="24" name="Text 22"/>
+          <p:cNvSpPr/>
+          <p:nvPr/>
+        </p:nvSpPr>
+        <p:spPr>
+          <a:xfrm>
+            <a:off x="8310677" y="3858768"/>
+            <a:ext cx="3003194" cy="640080"/>
+          </a:xfrm>
+          <a:prstGeom prst="rect">
+            <a:avLst/>
+          </a:prstGeom>
+          <a:noFill/>
+          <a:ln/>
+        </p:spPr>
+        <p:txBody>
+          <a:bodyPr wrap="square" lIns="0" tIns="0" rIns="0" bIns="0" rtlCol="0" anchor="t"/>
+          <a:lstStyle/>
+          <a:p>
+            <a:pPr indent="0" marL="0">
+              <a:lnSpc>
+                <a:spcPts val="1584"/>
+              </a:lnSpc>
+              <a:buNone/>
+            </a:pPr>
+            <a:r>
+              <a:rPr lang="en-US" sz="1100" dirty="0">
+                <a:solidFill>
+                  <a:srgbClr val="4E5F70"/>
+                </a:solidFill>
+                <a:latin typeface="Arial" pitchFamily="34" charset="0"/>
+                <a:ea typeface="Microsoft JhengHei"/>
+                <a:cs typeface="Microsoft JhengHei"/>
+                <a:ea typeface="Arial" pitchFamily="34" charset="-122"/>
+                <a:cs typeface="Arial" pitchFamily="34" charset="-120"/>
+              </a:rPr>
+              <a:t>每月提供用量、事件與已處理問題之書面報告，可直接作為履約管理之佐證。</a:t>
+            </a:r>
+            <a:endParaRPr lang="en-US" sz="1100" dirty="0"/>
+          </a:p>
+        </p:txBody>
+      </p:sp>
+      <p:sp>
+        <p:nvSpPr>
+          <p:cNvPr id="25" name="Shape 23"/>
+          <p:cNvSpPr/>
+          <p:nvPr/>
+        </p:nvSpPr>
+        <p:spPr>
+          <a:xfrm>
+            <a:off x="658368" y="4773168"/>
+            <a:ext cx="10874959" cy="841248"/>
+          </a:xfrm>
+          <a:prstGeom prst="roundRect">
+            <a:avLst>
+              <a:gd name="adj" fmla="val 3804"/>
+            </a:avLst>
+          </a:prstGeom>
+          <a:solidFill>
+            <a:srgbClr val="E1F1E9"/>
+          </a:solidFill>
+          <a:ln w="12700">
+            <a:solidFill>
+              <a:srgbClr val="E1F1E9"/>
+            </a:solidFill>
+            <a:prstDash val="solid"/>
+          </a:ln>
+        </p:spPr>
+      </p:sp>
+      <p:sp>
+        <p:nvSpPr>
+          <p:cNvPr id="26" name="Text 24"/>
+          <p:cNvSpPr/>
+          <p:nvPr/>
+        </p:nvSpPr>
+        <p:spPr>
+          <a:xfrm>
+            <a:off x="932688" y="4773168"/>
+            <a:ext cx="10326319" cy="841248"/>
+          </a:xfrm>
+          <a:prstGeom prst="rect">
+            <a:avLst/>
+          </a:prstGeom>
+          <a:noFill/>
+          <a:ln/>
+        </p:spPr>
+        <p:txBody>
+          <a:bodyPr wrap="square" lIns="0" tIns="0" rIns="0" bIns="0" rtlCol="0" anchor="ctr"/>
+          <a:lstStyle/>
+          <a:p>
+            <a:pPr indent="0" marL="0">
+              <a:lnSpc>
+                <a:spcPts val="1900"/>
+              </a:lnSpc>
+              <a:buNone/>
+            </a:pPr>
+            <a:r>
+              <a:rPr lang="en-US" sz="1250" b="1" dirty="0">
+                <a:solidFill>
+                  <a:srgbClr val="1D2B39"/>
+                </a:solidFill>
+                <a:latin typeface="Arial" pitchFamily="34" charset="0"/>
+                <a:ea typeface="Microsoft JhengHei"/>
+                <a:cs typeface="Microsoft JhengHei"/>
+                <a:ea typeface="Arial" pitchFamily="34" charset="-122"/>
+                <a:cs typeface="Arial" pitchFamily="34" charset="-120"/>
+              </a:rPr>
+              <a:t>為什麼敢這樣寫：</a:t>
+            </a:r>
+            <a:pPr indent="0" marL="0">
+              <a:lnSpc>
+                <a:spcPts val="1900"/>
+              </a:lnSpc>
+              <a:buNone/>
+            </a:pPr>
+            <a:r>
+              <a:rPr lang="en-US" sz="1250" dirty="0">
+                <a:solidFill>
+                  <a:srgbClr val="4E5F70"/>
+                </a:solidFill>
+                <a:latin typeface="Arial" pitchFamily="34" charset="0"/>
+                <a:ea typeface="Microsoft JhengHei"/>
+                <a:cs typeface="Microsoft JhengHei"/>
+                <a:ea typeface="Arial" pitchFamily="34" charset="-122"/>
+                <a:cs typeface="Arial" pitchFamily="34" charset="-120"/>
+              </a:rPr>
+              <a:t>系統已經上線並有自有網域，弱點掃描無高風險，權限在資料庫層逐表實測，每個動作都留痕。這不是等簽約後才要開始做的東西——是已經在跑的東西。</a:t>
+            </a:r>
+            <a:endParaRPr lang="en-US" sz="1250" dirty="0"/>
+          </a:p>
+        </p:txBody>
+      </p:sp>
+    </p:spTree>
+  </p:cSld>
+  <p:clrMapOvr>
+    <a:masterClrMapping/>
+  </p:clrMapOvr>
+</p:sld>
+</file>
+
+<file path=ppt/slides/slide23.xml><?xml version="1.0" encoding="utf-8"?>
+<p:sld xmlns:a="http://schemas.openxmlformats.org/drawingml/2006/main" xmlns:r="http://schemas.openxmlformats.org/officeDocument/2006/relationships" xmlns:p="http://schemas.openxmlformats.org/presentationml/2006/main">
+  <p:cSld name="Slide 23">
+    <p:bg>
+      <p:bgPr>
+        <a:solidFill>
+          <a:srgbClr val="F2F5F8"/>
+        </a:solidFill>
+      </p:bgPr>
+    </p:bg>
+    <p:spTree>
+      <p:nvGrpSpPr>
+        <p:cNvPr id="1" name=""/>
+        <p:cNvGrpSpPr/>
+        <p:nvPr/>
+      </p:nvGrpSpPr>
+      <p:grpSpPr>
+        <a:xfrm>
+          <a:off x="0" y="0"/>
+          <a:ext cx="0" cy="0"/>
+          <a:chOff x="0" y="0"/>
+          <a:chExt cx="0" cy="0"/>
+        </a:xfrm>
+      </p:grpSpPr>
+      <p:sp>
+        <p:nvSpPr>
+          <p:cNvPr id="2" name="Text 0"/>
+          <p:cNvSpPr/>
+          <p:nvPr/>
+        </p:nvSpPr>
+        <p:spPr>
+          <a:xfrm>
+            <a:off x="658368" y="6327648"/>
+            <a:ext cx="6400800" cy="274320"/>
+          </a:xfrm>
+          <a:prstGeom prst="rect">
+            <a:avLst/>
+          </a:prstGeom>
+          <a:noFill/>
+          <a:ln/>
+        </p:spPr>
+        <p:txBody>
+          <a:bodyPr wrap="square" lIns="0" tIns="0" rIns="0" bIns="0" rtlCol="0" anchor="ctr"/>
+          <a:lstStyle/>
+          <a:p>
+            <a:pPr algn="l" indent="0" marL="0">
+              <a:buNone/>
+            </a:pPr>
+            <a:r>
+              <a:rPr lang="en-US" sz="900" spc="180" kern="0" dirty="0">
+                <a:solidFill>
+                  <a:srgbClr val="7A8794"/>
+                </a:solidFill>
+                <a:latin typeface="Arial" pitchFamily="34" charset="0"/>
+                <a:ea typeface="Microsoft JhengHei"/>
+                <a:cs typeface="Microsoft JhengHei"/>
+                <a:ea typeface="Arial" pitchFamily="34" charset="-122"/>
+                <a:cs typeface="Arial" pitchFamily="34" charset="-120"/>
+              </a:rPr>
+              <a:t>參 · 行政</a:t>
+            </a:r>
+            <a:endParaRPr lang="en-US" sz="900" dirty="0"/>
+          </a:p>
+        </p:txBody>
+      </p:sp>
+      <p:sp>
+        <p:nvSpPr>
+          <p:cNvPr id="3" name="Text 1"/>
+          <p:cNvSpPr/>
+          <p:nvPr/>
+        </p:nvSpPr>
+        <p:spPr>
+          <a:xfrm>
+            <a:off x="9704527" y="6327648"/>
+            <a:ext cx="1828800" cy="274320"/>
+          </a:xfrm>
+          <a:prstGeom prst="rect">
+            <a:avLst/>
+          </a:prstGeom>
+          <a:noFill/>
+          <a:ln/>
+        </p:spPr>
+        <p:txBody>
+          <a:bodyPr wrap="square" lIns="0" tIns="0" rIns="0" bIns="0" rtlCol="0" anchor="ctr"/>
+          <a:lstStyle/>
+          <a:p>
+            <a:pPr algn="r" indent="0" marL="0">
+              <a:buNone/>
+            </a:pPr>
+            <a:r>
+              <a:rPr lang="en-US" sz="900" spc="180" kern="0" dirty="0">
+                <a:solidFill>
+                  <a:srgbClr val="7A8794"/>
+                </a:solidFill>
+                <a:latin typeface="Arial" pitchFamily="34" charset="0"/>
+                <a:ea typeface="Microsoft JhengHei"/>
+                <a:cs typeface="Microsoft JhengHei"/>
+                <a:ea typeface="Arial" pitchFamily="34" charset="-122"/>
+                <a:cs typeface="Arial" pitchFamily="34" charset="-120"/>
+              </a:rPr>
+              <a:t>23 / 25</a:t>
+            </a:r>
+            <a:endParaRPr lang="en-US" sz="900" dirty="0"/>
+          </a:p>
+        </p:txBody>
+      </p:sp>
+      <p:sp>
+        <p:nvSpPr>
+          <p:cNvPr id="4" name="Text 2"/>
+          <p:cNvSpPr/>
+          <p:nvPr/>
+        </p:nvSpPr>
+        <p:spPr>
+          <a:xfrm>
+            <a:off x="658368" y="475488"/>
+            <a:ext cx="10874959" cy="237744"/>
+          </a:xfrm>
+          <a:prstGeom prst="rect">
+            <a:avLst/>
+          </a:prstGeom>
+          <a:noFill/>
+          <a:ln/>
+        </p:spPr>
+        <p:txBody>
+          <a:bodyPr wrap="square" lIns="0" tIns="0" rIns="0" bIns="0" rtlCol="0" anchor="ctr"/>
+          <a:lstStyle/>
+          <a:p>
+            <a:pPr indent="0" marL="0">
+              <a:buNone/>
+            </a:pPr>
+            <a:r>
+              <a:rPr lang="en-US" sz="950" b="1" spc="240" kern="0" dirty="0">
+                <a:solidFill>
+                  <a:srgbClr val="C05209"/>
+                </a:solidFill>
+                <a:latin typeface="Arial" pitchFamily="34" charset="0"/>
+                <a:ea typeface="Microsoft JhengHei"/>
+                <a:cs typeface="Microsoft JhengHei"/>
+                <a:ea typeface="Arial" pitchFamily="34" charset="-122"/>
+                <a:cs typeface="Arial" pitchFamily="34" charset="-120"/>
+              </a:rPr>
+              <a:t>供參</a:t>
+            </a:r>
+            <a:endParaRPr lang="en-US" sz="950" dirty="0"/>
+          </a:p>
+        </p:txBody>
+      </p:sp>
+      <p:sp>
+        <p:nvSpPr>
+          <p:cNvPr id="5" name="Text 3"/>
+          <p:cNvSpPr/>
+          <p:nvPr/>
+        </p:nvSpPr>
+        <p:spPr>
+          <a:xfrm>
+            <a:off x="658368" y="768096"/>
+            <a:ext cx="10874959" cy="585216"/>
+          </a:xfrm>
+          <a:prstGeom prst="rect">
+            <a:avLst/>
+          </a:prstGeom>
+          <a:noFill/>
+          <a:ln/>
+        </p:spPr>
+        <p:txBody>
+          <a:bodyPr wrap="square" lIns="0" tIns="0" rIns="0" bIns="0" rtlCol="0" anchor="ctr"/>
+          <a:lstStyle/>
+          <a:p>
+            <a:pPr indent="0" marL="0">
+              <a:buNone/>
+            </a:pPr>
+            <a:r>
               <a:rPr lang="en-US" sz="2700" b="1" dirty="0">
                 <a:solidFill>
                   <a:srgbClr val="1D2B39"/>
@@ -20967,15 +23288,56 @@
                 <a:ea typeface="Arial" pitchFamily="34" charset="-122"/>
                 <a:cs typeface="Arial" pitchFamily="34" charset="-120"/>
               </a:rPr>
-              <a:t>七段說明，每一段都有對應的依據。</a:t>
+              <a:t>真的要簽的時候，簽大概長這樣。</a:t>
             </a:r>
             <a:endParaRPr lang="en-US" sz="2700" dirty="0"/>
+          </a:p>
+        </p:txBody>
+      </p:sp>
+      <p:sp>
+        <p:nvSpPr>
+          <p:cNvPr id="6" name="Text 4"/>
+          <p:cNvSpPr/>
+          <p:nvPr/>
+        </p:nvSpPr>
+        <p:spPr>
+          <a:xfrm>
+            <a:off x="658368" y="1444752"/>
+            <a:ext cx="10874959" cy="274320"/>
+          </a:xfrm>
+          <a:prstGeom prst="rect">
+            <a:avLst/>
+          </a:prstGeom>
+          <a:noFill/>
+          <a:ln/>
+        </p:spPr>
+        <p:txBody>
+          <a:bodyPr wrap="square" lIns="0" tIns="0" rIns="0" bIns="0" rtlCol="0" anchor="ctr"/>
+          <a:lstStyle/>
+          <a:p>
+            <a:pPr indent="0" marL="0">
+              <a:buNone/>
+            </a:pPr>
+            <a:r>
+              <a:rPr lang="en-US" sz="1150" dirty="0">
+                <a:solidFill>
+                  <a:srgbClr val="7A8794"/>
+                </a:solidFill>
+                <a:latin typeface="Arial" pitchFamily="34" charset="0"/>
+                <a:ea typeface="Microsoft JhengHei"/>
+                <a:cs typeface="Microsoft JhengHei"/>
+                <a:ea typeface="Arial" pitchFamily="34" charset="-122"/>
+                <a:cs typeface="Arial" pitchFamily="34" charset="-120"/>
+              </a:rPr>
+              <a:t>放這頁的目的是幫承辦人省起草時間，不是催組長簽。文字仍由貴組依校內格式撰擬。</a:t>
+            </a:r>
+            <a:endParaRPr lang="en-US" sz="1150" dirty="0"/>
           </a:p>
         </p:txBody>
       </p:sp>
       <p:graphicFrame>
         <p:nvGraphicFramePr>
-          <p:cNvPr id="23" name="Table 0"/>
+          <p:cNvPr id="24" name="Table 0"/>
           <p:cNvGraphicFramePr>
             <a:graphicFrameLocks noGrp="1"/>
           </p:cNvGraphicFramePr>
@@ -20988,7 +23350,7 @@
           </p:nvPr>
         </p:nvGraphicFramePr>
         <p:xfrm>
-          <a:off x="658368" y="1645920"/>
+          <a:off x="658368" y="1792224"/>
           <a:ext cx="10874959" cy="914400"/>
         </p:xfrm>
         <a:graphic>
@@ -21382,7 +23744,7 @@
                           <a:ea typeface="Arial" pitchFamily="34" charset="-122"/>
                           <a:cs typeface="Arial" pitchFamily="34" charset="-120"/>
                         </a:rPr>
-                        <a:t>現行以紙本與 Excel 彙整進度、估驗、日誌與查驗紀錄，人工重複登打、佐證散落；以某工程為試辦標的，載明服務期間</a:t>
+                        <a:t>現行以紙本與 Excel 彙整進度、估驗、日誌與查驗紀錄，人工重複登打、佐證散落；以某工程為標的，載明服務期間</a:t>
                       </a:r>
                       <a:endParaRPr lang="en-US" sz="1050" dirty="0">
                         <a:latin typeface="Arial" charset="0"/>
@@ -22682,7 +25044,7 @@
                       <a:r>
                         <a:rPr lang="en-US" sz="1050" dirty="0">
                           <a:solidFill>
-                            <a:srgbClr val="C05209"/>
+                            <a:srgbClr val="4E5F70"/>
                           </a:solidFill>
                           <a:latin typeface="Arial" pitchFamily="34" charset="0"/>
                           <a:ea typeface="Microsoft JhengHei"/>
@@ -22690,7 +25052,7 @@
                           <a:ea typeface="Arial" pitchFamily="34" charset="-122"/>
                           <a:cs typeface="Arial" pitchFamily="34" charset="-120"/>
                         </a:rPr>
-                        <a:t>服務期間；驗收時點依前頁方案擇一並寫明；勞務採購採書面驗收；服務承諾條款納入契約；不涉財產登記</a:t>
+                        <a:t>服務期間；驗收方式依前頁擇一載明；勞務採購採書面驗收；服務承諾條款納入契約；不涉財產登記</a:t>
                       </a:r>
                       <a:endParaRPr lang="en-US" sz="1050" dirty="0">
                         <a:latin typeface="Arial" charset="0"/>
@@ -22750,13 +25112,13 @@
       </p:graphicFrame>
       <p:sp>
         <p:nvSpPr>
-          <p:cNvPr id="7" name="Text 4"/>
-          <p:cNvSpPr/>
-          <p:nvPr/>
-        </p:nvSpPr>
-        <p:spPr>
-          <a:xfrm>
-            <a:off x="658368" y="5358384"/>
+          <p:cNvPr id="8" name="Text 5"/>
+          <p:cNvSpPr/>
+          <p:nvPr/>
+        </p:nvSpPr>
+        <p:spPr>
+          <a:xfrm>
+            <a:off x="658368" y="5504688"/>
             <a:ext cx="10874959" cy="310896"/>
           </a:xfrm>
           <a:prstGeom prst="rect">
@@ -22783,7 +25145,7 @@
                 <a:ea typeface="Arial" pitchFamily="34" charset="-122"/>
                 <a:cs typeface="Arial" pitchFamily="34" charset="-120"/>
               </a:rPr>
-              <a:t>擬辦：</a:t>
+              <a:t>擬辦大意：</a:t>
             </a:r>
             <a:pPr indent="0" marL="0">
               <a:buNone/>
@@ -22799,7 +25161,7 @@
                 <a:ea typeface="Arial" pitchFamily="34" charset="-122"/>
                 <a:cs typeface="Arial" pitchFamily="34" charset="-120"/>
               </a:rPr>
-              <a:t>一、同意依上開方式辦理小額採購並簽訂服務契約。二、</a:t>
+              <a:t>同意辦理小額採購並簽訂服務契約；</a:t>
             </a:r>
             <a:pPr indent="0" marL="0">
               <a:buNone/>
@@ -22831,50 +25193,9 @@
                 <a:ea typeface="Arial" pitchFamily="34" charset="-122"/>
                 <a:cs typeface="Arial" pitchFamily="34" charset="-120"/>
               </a:rPr>
-              <a:t>（第三、四點）。三、會辦個資業務單位／法制（第五點）。四、奉核後續辦請購。</a:t>
+              <a:t>（第三、四點）與個資業務單位／法制（第五點）；奉核後續辦請購。</a:t>
             </a:r>
             <a:endParaRPr lang="en-US" sz="1150" dirty="0"/>
-          </a:p>
-        </p:txBody>
-      </p:sp>
-      <p:sp>
-        <p:nvSpPr>
-          <p:cNvPr id="8" name="Text 5"/>
-          <p:cNvSpPr/>
-          <p:nvPr/>
-        </p:nvSpPr>
-        <p:spPr>
-          <a:xfrm>
-            <a:off x="658368" y="5724144"/>
-            <a:ext cx="10874959" cy="274320"/>
-          </a:xfrm>
-          <a:prstGeom prst="rect">
-            <a:avLst/>
-          </a:prstGeom>
-          <a:noFill/>
-          <a:ln/>
-        </p:spPr>
-        <p:txBody>
-          <a:bodyPr wrap="square" lIns="0" tIns="0" rIns="0" bIns="0" rtlCol="0" anchor="ctr"/>
-          <a:lstStyle/>
-          <a:p>
-            <a:pPr indent="0" marL="0">
-              <a:buNone/>
-            </a:pPr>
-            <a:r>
-              <a:rPr lang="en-US" sz="1050" dirty="0">
-                <a:solidFill>
-                  <a:srgbClr val="7A8794"/>
-                </a:solidFill>
-                <a:latin typeface="Arial" pitchFamily="34" charset="0"/>
-                <a:ea typeface="Microsoft JhengHei"/>
-                <a:cs typeface="Microsoft JhengHei"/>
-                <a:ea typeface="Arial" pitchFamily="34" charset="-122"/>
-                <a:cs typeface="Arial" pitchFamily="34" charset="-120"/>
-              </a:rPr>
-              <a:t>以上為廠商整理的參考骨架，實際簽稿文字仍由貴組承辦人依校內格式撰擬。</a:t>
-            </a:r>
-            <a:endParaRPr lang="en-US" sz="1050" dirty="0"/>
           </a:p>
         </p:txBody>
       </p:sp>
@@ -22886,9 +25207,9 @@
 </p:sld>
 </file>
 
-<file path=ppt/slides/slide23.xml><?xml version="1.0" encoding="utf-8"?>
+<file path=ppt/slides/slide24.xml><?xml version="1.0" encoding="utf-8"?>
 <p:sld xmlns:a="http://schemas.openxmlformats.org/drawingml/2006/main" xmlns:r="http://schemas.openxmlformats.org/officeDocument/2006/relationships" xmlns:p="http://schemas.openxmlformats.org/presentationml/2006/main">
-  <p:cSld name="Slide 23">
+  <p:cSld name="Slide 24">
     <p:bg>
       <p:bgPr>
         <a:solidFill>
@@ -22945,7 +25266,7 @@
                 <a:ea typeface="Arial" pitchFamily="34" charset="-122"/>
                 <a:cs typeface="Arial" pitchFamily="34" charset="-120"/>
               </a:rPr>
-              <a:t>參 · 簽辦</a:t>
+              <a:t>參 · 行政</a:t>
             </a:r>
             <a:endParaRPr lang="en-US" sz="900" dirty="0"/>
           </a:p>
@@ -22986,7 +25307,7 @@
                 <a:ea typeface="Arial" pitchFamily="34" charset="-122"/>
                 <a:cs typeface="Arial" pitchFamily="34" charset="-120"/>
               </a:rPr>
-              <a:t>23 / 25</a:t>
+              <a:t>24 / 25</a:t>
             </a:r>
             <a:endParaRPr lang="en-US" sz="900" dirty="0"/>
           </a:p>
@@ -23027,7 +25348,7 @@
                 <a:ea typeface="Arial" pitchFamily="34" charset="-122"/>
                 <a:cs typeface="Arial" pitchFamily="34" charset="-120"/>
               </a:rPr>
-              <a:t>附件</a:t>
+              <a:t>文件現況</a:t>
             </a:r>
             <a:endParaRPr lang="en-US" sz="950" dirty="0"/>
           </a:p>
@@ -23068,7 +25389,7 @@
                 <a:ea typeface="Arial" pitchFamily="34" charset="-122"/>
                 <a:cs typeface="Arial" pitchFamily="34" charset="-120"/>
               </a:rPr>
-              <a:t>七份附件，六份在我這邊。</a:t>
+              <a:t>七份附件，六份已經備妥。</a:t>
             </a:r>
             <a:endParaRPr lang="en-US" sz="3100" dirty="0"/>
           </a:p>
@@ -23076,7 +25397,7 @@
       </p:sp>
       <p:graphicFrame>
         <p:nvGraphicFramePr>
-          <p:cNvPr id="24" name="Table 0"/>
+          <p:cNvPr id="25" name="Table 0"/>
           <p:cNvGraphicFramePr>
             <a:graphicFrameLocks noGrp="1"/>
           </p:cNvGraphicFramePr>
@@ -23628,7 +25949,7 @@
                           <a:ea typeface="Arial" pitchFamily="34" charset="-122"/>
                           <a:cs typeface="Arial" pitchFamily="34" charset="-120"/>
                         </a:rPr>
-                        <a:t>商業登記核准後即送</a:t>
+                        <a:t>商業登記核准後即可出具</a:t>
                       </a:r>
                       <a:endParaRPr lang="en-US" sz="1100" dirty="0">
                         <a:latin typeface="Arial" charset="0"/>
@@ -23846,7 +26167,7 @@
                           <a:ea typeface="Arial" pitchFamily="34" charset="-122"/>
                           <a:cs typeface="Arial" pitchFamily="34" charset="-120"/>
                         </a:rPr>
-                        <a:t>SaaS 套裝型・普級 11 列（本簡報 P12）</a:t>
+                        <a:t>SaaS 套裝型・普級 11 列（本文件 P12）</a:t>
                       </a:r>
                       <a:endParaRPr lang="en-US" sz="1100" dirty="0">
                         <a:latin typeface="Arial" charset="0"/>
@@ -24426,7 +26747,7 @@
                           <a:ea typeface="Arial" pitchFamily="34" charset="-122"/>
                           <a:cs typeface="Arial" pitchFamily="34" charset="-120"/>
                         </a:rPr>
-                        <a:t>供計網中心審查同意（第 9 列）</a:t>
+                        <a:t>供計網中心審查（第 9 列）</a:t>
                       </a:r>
                       <a:endParaRPr lang="en-US" sz="1100" dirty="0">
                         <a:latin typeface="Arial" charset="0"/>
@@ -25443,1076 +27764,6 @@
             </a:avLst>
           </a:prstGeom>
           <a:solidFill>
-            <a:srgbClr val="FCE9DC"/>
-          </a:solidFill>
-          <a:ln w="12700">
-            <a:solidFill>
-              <a:srgbClr val="FCE9DC"/>
-            </a:solidFill>
-            <a:prstDash val="solid"/>
-          </a:ln>
-        </p:spPr>
-      </p:sp>
-      <p:sp>
-        <p:nvSpPr>
-          <p:cNvPr id="8" name="Text 5"/>
-          <p:cNvSpPr/>
-          <p:nvPr/>
-        </p:nvSpPr>
-        <p:spPr>
-          <a:xfrm>
-            <a:off x="932688" y="5184648"/>
-            <a:ext cx="10326319" cy="822960"/>
-          </a:xfrm>
-          <a:prstGeom prst="rect">
-            <a:avLst/>
-          </a:prstGeom>
-          <a:noFill/>
-          <a:ln/>
-        </p:spPr>
-        <p:txBody>
-          <a:bodyPr wrap="square" lIns="0" tIns="0" rIns="0" bIns="0" rtlCol="0" anchor="ctr"/>
-          <a:lstStyle/>
-          <a:p>
-            <a:pPr indent="0" marL="0">
-              <a:lnSpc>
-                <a:spcPts val="1800"/>
-              </a:lnSpc>
-              <a:buNone/>
-            </a:pPr>
-            <a:r>
-              <a:rPr lang="en-US" sz="1200" b="1" dirty="0">
-                <a:solidFill>
-                  <a:srgbClr val="1D2B39"/>
-                </a:solidFill>
-                <a:latin typeface="Arial" pitchFamily="34" charset="0"/>
-                <a:ea typeface="Microsoft JhengHei"/>
-                <a:cs typeface="Microsoft JhengHei"/>
-                <a:ea typeface="Arial" pitchFamily="34" charset="-122"/>
-                <a:cs typeface="Arial" pitchFamily="34" charset="-120"/>
-              </a:rPr>
-              <a:t>唯一會影響時程的是附件一。</a:t>
-            </a:r>
-            <a:pPr indent="0" marL="0">
-              <a:lnSpc>
-                <a:spcPts val="1800"/>
-              </a:lnSpc>
-              <a:buNone/>
-            </a:pPr>
-            <a:r>
-              <a:rPr lang="en-US" sz="1200" dirty="0">
-                <a:solidFill>
-                  <a:srgbClr val="4E5F70"/>
-                </a:solidFill>
-                <a:latin typeface="Arial" pitchFamily="34" charset="0"/>
-                <a:ea typeface="Microsoft JhengHei"/>
-                <a:cs typeface="Microsoft JhengHei"/>
-                <a:ea typeface="Arial" pitchFamily="34" charset="-122"/>
-                <a:cs typeface="Arial" pitchFamily="34" charset="-120"/>
-              </a:rPr>
-              <a:t>　本公司商業登記正在辦理中，核准後統一編號、商業登記證明與估價單會一併送達。其餘六份不受影響，可先行提供貴組與計網中心預覽。</a:t>
-            </a:r>
-            <a:endParaRPr lang="en-US" sz="1200" dirty="0"/>
-          </a:p>
-        </p:txBody>
-      </p:sp>
-    </p:spTree>
-  </p:cSld>
-  <p:clrMapOvr>
-    <a:masterClrMapping/>
-  </p:clrMapOvr>
-</p:sld>
-</file>
-
-<file path=ppt/slides/slide24.xml><?xml version="1.0" encoding="utf-8"?>
-<p:sld xmlns:a="http://schemas.openxmlformats.org/drawingml/2006/main" xmlns:r="http://schemas.openxmlformats.org/officeDocument/2006/relationships" xmlns:p="http://schemas.openxmlformats.org/presentationml/2006/main">
-  <p:cSld name="Slide 24">
-    <p:bg>
-      <p:bgPr>
-        <a:solidFill>
-          <a:srgbClr val="F2F5F8"/>
-        </a:solidFill>
-      </p:bgPr>
-    </p:bg>
-    <p:spTree>
-      <p:nvGrpSpPr>
-        <p:cNvPr id="1" name=""/>
-        <p:cNvGrpSpPr/>
-        <p:nvPr/>
-      </p:nvGrpSpPr>
-      <p:grpSpPr>
-        <a:xfrm>
-          <a:off x="0" y="0"/>
-          <a:ext cx="0" cy="0"/>
-          <a:chOff x="0" y="0"/>
-          <a:chExt cx="0" cy="0"/>
-        </a:xfrm>
-      </p:grpSpPr>
-      <p:sp>
-        <p:nvSpPr>
-          <p:cNvPr id="2" name="Text 0"/>
-          <p:cNvSpPr/>
-          <p:nvPr/>
-        </p:nvSpPr>
-        <p:spPr>
-          <a:xfrm>
-            <a:off x="658368" y="6327648"/>
-            <a:ext cx="6400800" cy="274320"/>
-          </a:xfrm>
-          <a:prstGeom prst="rect">
-            <a:avLst/>
-          </a:prstGeom>
-          <a:noFill/>
-          <a:ln/>
-        </p:spPr>
-        <p:txBody>
-          <a:bodyPr wrap="square" lIns="0" tIns="0" rIns="0" bIns="0" rtlCol="0" anchor="ctr"/>
-          <a:lstStyle/>
-          <a:p>
-            <a:pPr algn="l" indent="0" marL="0">
-              <a:buNone/>
-            </a:pPr>
-            <a:r>
-              <a:rPr lang="en-US" sz="900" spc="180" kern="0" dirty="0">
-                <a:solidFill>
-                  <a:srgbClr val="7A8794"/>
-                </a:solidFill>
-                <a:latin typeface="Arial" pitchFamily="34" charset="0"/>
-                <a:ea typeface="Microsoft JhengHei"/>
-                <a:cs typeface="Microsoft JhengHei"/>
-                <a:ea typeface="Arial" pitchFamily="34" charset="-122"/>
-                <a:cs typeface="Arial" pitchFamily="34" charset="-120"/>
-              </a:rPr>
-              <a:t>參 · 簽辦</a:t>
-            </a:r>
-            <a:endParaRPr lang="en-US" sz="900" dirty="0"/>
-          </a:p>
-        </p:txBody>
-      </p:sp>
-      <p:sp>
-        <p:nvSpPr>
-          <p:cNvPr id="3" name="Text 1"/>
-          <p:cNvSpPr/>
-          <p:nvPr/>
-        </p:nvSpPr>
-        <p:spPr>
-          <a:xfrm>
-            <a:off x="9704527" y="6327648"/>
-            <a:ext cx="1828800" cy="274320"/>
-          </a:xfrm>
-          <a:prstGeom prst="rect">
-            <a:avLst/>
-          </a:prstGeom>
-          <a:noFill/>
-          <a:ln/>
-        </p:spPr>
-        <p:txBody>
-          <a:bodyPr wrap="square" lIns="0" tIns="0" rIns="0" bIns="0" rtlCol="0" anchor="ctr"/>
-          <a:lstStyle/>
-          <a:p>
-            <a:pPr algn="r" indent="0" marL="0">
-              <a:buNone/>
-            </a:pPr>
-            <a:r>
-              <a:rPr lang="en-US" sz="900" spc="180" kern="0" dirty="0">
-                <a:solidFill>
-                  <a:srgbClr val="7A8794"/>
-                </a:solidFill>
-                <a:latin typeface="Arial" pitchFamily="34" charset="0"/>
-                <a:ea typeface="Microsoft JhengHei"/>
-                <a:cs typeface="Microsoft JhengHei"/>
-                <a:ea typeface="Arial" pitchFamily="34" charset="-122"/>
-                <a:cs typeface="Arial" pitchFamily="34" charset="-120"/>
-              </a:rPr>
-              <a:t>24 / 25</a:t>
-            </a:r>
-            <a:endParaRPr lang="en-US" sz="900" dirty="0"/>
-          </a:p>
-        </p:txBody>
-      </p:sp>
-      <p:sp>
-        <p:nvSpPr>
-          <p:cNvPr id="4" name="Text 2"/>
-          <p:cNvSpPr/>
-          <p:nvPr/>
-        </p:nvSpPr>
-        <p:spPr>
-          <a:xfrm>
-            <a:off x="658368" y="475488"/>
-            <a:ext cx="10874959" cy="237744"/>
-          </a:xfrm>
-          <a:prstGeom prst="rect">
-            <a:avLst/>
-          </a:prstGeom>
-          <a:noFill/>
-          <a:ln/>
-        </p:spPr>
-        <p:txBody>
-          <a:bodyPr wrap="square" lIns="0" tIns="0" rIns="0" bIns="0" rtlCol="0" anchor="ctr"/>
-          <a:lstStyle/>
-          <a:p>
-            <a:pPr indent="0" marL="0">
-              <a:buNone/>
-            </a:pPr>
-            <a:r>
-              <a:rPr lang="en-US" sz="950" b="1" spc="240" kern="0" dirty="0">
-                <a:solidFill>
-                  <a:srgbClr val="C05209"/>
-                </a:solidFill>
-                <a:latin typeface="Arial" pitchFamily="34" charset="0"/>
-                <a:ea typeface="Microsoft JhengHei"/>
-                <a:cs typeface="Microsoft JhengHei"/>
-                <a:ea typeface="Arial" pitchFamily="34" charset="-122"/>
-                <a:cs typeface="Arial" pitchFamily="34" charset="-120"/>
-              </a:rPr>
-              <a:t>動線</a:t>
-            </a:r>
-            <a:endParaRPr lang="en-US" sz="950" dirty="0"/>
-          </a:p>
-        </p:txBody>
-      </p:sp>
-      <p:sp>
-        <p:nvSpPr>
-          <p:cNvPr id="5" name="Text 3"/>
-          <p:cNvSpPr/>
-          <p:nvPr/>
-        </p:nvSpPr>
-        <p:spPr>
-          <a:xfrm>
-            <a:off x="658368" y="768096"/>
-            <a:ext cx="10874959" cy="585216"/>
-          </a:xfrm>
-          <a:prstGeom prst="rect">
-            <a:avLst/>
-          </a:prstGeom>
-          <a:noFill/>
-          <a:ln/>
-        </p:spPr>
-        <p:txBody>
-          <a:bodyPr wrap="square" lIns="0" tIns="0" rIns="0" bIns="0" rtlCol="0" anchor="ctr"/>
-          <a:lstStyle/>
-          <a:p>
-            <a:pPr indent="0" marL="0">
-              <a:buNone/>
-            </a:pPr>
-            <a:r>
-              <a:rPr lang="en-US" sz="2700" b="1" dirty="0">
-                <a:solidFill>
-                  <a:srgbClr val="1D2B39"/>
-                </a:solidFill>
-                <a:latin typeface="Arial" pitchFamily="34" charset="0"/>
-                <a:ea typeface="Microsoft JhengHei"/>
-                <a:cs typeface="Microsoft JhengHei"/>
-                <a:ea typeface="Arial" pitchFamily="34" charset="-122"/>
-                <a:cs typeface="Arial" pitchFamily="34" charset="-120"/>
-              </a:rPr>
-              <a:t>核定在組長，真正的關卡在計網中心。</a:t>
-            </a:r>
-            <a:endParaRPr lang="en-US" sz="2700" dirty="0"/>
-          </a:p>
-        </p:txBody>
-      </p:sp>
-      <p:sp>
-        <p:nvSpPr>
-          <p:cNvPr id="6" name="Shape 4"/>
-          <p:cNvSpPr/>
-          <p:nvPr/>
-        </p:nvSpPr>
-        <p:spPr>
-          <a:xfrm>
-            <a:off x="658368" y="1700784"/>
-            <a:ext cx="1926275" cy="804672"/>
-          </a:xfrm>
-          <a:prstGeom prst="roundRect">
-            <a:avLst>
-              <a:gd name="adj" fmla="val 3977"/>
-            </a:avLst>
-          </a:prstGeom>
-          <a:solidFill>
-            <a:srgbClr val="FFFFFF"/>
-          </a:solidFill>
-          <a:ln w="9525">
-            <a:solidFill>
-              <a:srgbClr val="E6EBF0"/>
-            </a:solidFill>
-            <a:prstDash val="solid"/>
-          </a:ln>
-        </p:spPr>
-      </p:sp>
-      <p:sp>
-        <p:nvSpPr>
-          <p:cNvPr id="7" name="Text 5"/>
-          <p:cNvSpPr/>
-          <p:nvPr/>
-        </p:nvSpPr>
-        <p:spPr>
-          <a:xfrm>
-            <a:off x="658368" y="1819656"/>
-            <a:ext cx="1926275" cy="201168"/>
-          </a:xfrm>
-          <a:prstGeom prst="rect">
-            <a:avLst/>
-          </a:prstGeom>
-          <a:noFill/>
-          <a:ln/>
-        </p:spPr>
-        <p:txBody>
-          <a:bodyPr wrap="square" lIns="0" tIns="0" rIns="0" bIns="0" rtlCol="0" anchor="ctr"/>
-          <a:lstStyle/>
-          <a:p>
-            <a:pPr algn="ctr" indent="0" marL="0">
-              <a:buNone/>
-            </a:pPr>
-            <a:r>
-              <a:rPr lang="en-US" sz="850" b="1" spc="140" kern="0" dirty="0">
-                <a:solidFill>
-                  <a:srgbClr val="7A8794"/>
-                </a:solidFill>
-                <a:latin typeface="Arial" pitchFamily="34" charset="0"/>
-                <a:ea typeface="Microsoft JhengHei"/>
-                <a:cs typeface="Microsoft JhengHei"/>
-                <a:ea typeface="Arial" pitchFamily="34" charset="-122"/>
-                <a:cs typeface="Arial" pitchFamily="34" charset="-120"/>
-              </a:rPr>
-              <a:t>使用單位</a:t>
-            </a:r>
-            <a:endParaRPr lang="en-US" sz="850" dirty="0"/>
-          </a:p>
-        </p:txBody>
-      </p:sp>
-      <p:sp>
-        <p:nvSpPr>
-          <p:cNvPr id="8" name="Text 6"/>
-          <p:cNvSpPr/>
-          <p:nvPr/>
-        </p:nvSpPr>
-        <p:spPr>
-          <a:xfrm>
-            <a:off x="658368" y="2039112"/>
-            <a:ext cx="1926275" cy="310896"/>
-          </a:xfrm>
-          <a:prstGeom prst="rect">
-            <a:avLst/>
-          </a:prstGeom>
-          <a:noFill/>
-          <a:ln/>
-        </p:spPr>
-        <p:txBody>
-          <a:bodyPr wrap="square" lIns="0" tIns="0" rIns="0" bIns="0" rtlCol="0" anchor="ctr"/>
-          <a:lstStyle/>
-          <a:p>
-            <a:pPr algn="ctr" indent="0" marL="0">
-              <a:buNone/>
-            </a:pPr>
-            <a:r>
-              <a:rPr lang="en-US" sz="1350" b="1" dirty="0">
-                <a:solidFill>
-                  <a:srgbClr val="1D2B39"/>
-                </a:solidFill>
-                <a:latin typeface="Arial" pitchFamily="34" charset="0"/>
-                <a:ea typeface="Microsoft JhengHei"/>
-                <a:cs typeface="Microsoft JhengHei"/>
-                <a:ea typeface="Arial" pitchFamily="34" charset="-122"/>
-                <a:cs typeface="Arial" pitchFamily="34" charset="-120"/>
-              </a:rPr>
-              <a:t>營繕組擬簽</a:t>
-            </a:r>
-            <a:endParaRPr lang="en-US" sz="1350" dirty="0"/>
-          </a:p>
-        </p:txBody>
-      </p:sp>
-      <p:sp>
-        <p:nvSpPr>
-          <p:cNvPr id="9" name="Shape 7"/>
-          <p:cNvSpPr/>
-          <p:nvPr/>
-        </p:nvSpPr>
-        <p:spPr>
-          <a:xfrm>
-            <a:off x="2639507" y="2103120"/>
-            <a:ext cx="201168" cy="0"/>
-          </a:xfrm>
-          <a:prstGeom prst="line">
-            <a:avLst/>
-          </a:prstGeom>
-          <a:noFill/>
-          <a:ln w="15875">
-            <a:solidFill>
-              <a:srgbClr val="1E5A85"/>
-            </a:solidFill>
-            <a:prstDash val="solid"/>
-            <a:tailEnd type="triangle"/>
-          </a:ln>
-        </p:spPr>
-      </p:sp>
-      <p:sp>
-        <p:nvSpPr>
-          <p:cNvPr id="10" name="Shape 8"/>
-          <p:cNvSpPr/>
-          <p:nvPr/>
-        </p:nvSpPr>
-        <p:spPr>
-          <a:xfrm>
-            <a:off x="2895539" y="1700784"/>
-            <a:ext cx="1926275" cy="804672"/>
-          </a:xfrm>
-          <a:prstGeom prst="roundRect">
-            <a:avLst>
-              <a:gd name="adj" fmla="val 3977"/>
-            </a:avLst>
-          </a:prstGeom>
-          <a:solidFill>
-            <a:srgbClr val="FCE9DC"/>
-          </a:solidFill>
-          <a:ln w="19050">
-            <a:solidFill>
-              <a:srgbClr val="E8630C"/>
-            </a:solidFill>
-            <a:prstDash val="solid"/>
-          </a:ln>
-        </p:spPr>
-      </p:sp>
-      <p:sp>
-        <p:nvSpPr>
-          <p:cNvPr id="11" name="Text 9"/>
-          <p:cNvSpPr/>
-          <p:nvPr/>
-        </p:nvSpPr>
-        <p:spPr>
-          <a:xfrm>
-            <a:off x="2895539" y="1819656"/>
-            <a:ext cx="1926275" cy="201168"/>
-          </a:xfrm>
-          <a:prstGeom prst="rect">
-            <a:avLst/>
-          </a:prstGeom>
-          <a:noFill/>
-          <a:ln/>
-        </p:spPr>
-        <p:txBody>
-          <a:bodyPr wrap="square" lIns="0" tIns="0" rIns="0" bIns="0" rtlCol="0" anchor="ctr"/>
-          <a:lstStyle/>
-          <a:p>
-            <a:pPr algn="ctr" indent="0" marL="0">
-              <a:buNone/>
-            </a:pPr>
-            <a:r>
-              <a:rPr lang="en-US" sz="850" b="1" spc="140" kern="0" dirty="0">
-                <a:solidFill>
-                  <a:srgbClr val="C05209"/>
-                </a:solidFill>
-                <a:latin typeface="Arial" pitchFamily="34" charset="0"/>
-                <a:ea typeface="Microsoft JhengHei"/>
-                <a:cs typeface="Microsoft JhengHei"/>
-                <a:ea typeface="Arial" pitchFamily="34" charset="-122"/>
-                <a:cs typeface="Arial" pitchFamily="34" charset="-120"/>
-              </a:rPr>
-              <a:t>會辦 · 資安</a:t>
-            </a:r>
-            <a:endParaRPr lang="en-US" sz="850" dirty="0"/>
-          </a:p>
-        </p:txBody>
-      </p:sp>
-      <p:sp>
-        <p:nvSpPr>
-          <p:cNvPr id="12" name="Text 10"/>
-          <p:cNvSpPr/>
-          <p:nvPr/>
-        </p:nvSpPr>
-        <p:spPr>
-          <a:xfrm>
-            <a:off x="2895539" y="2039112"/>
-            <a:ext cx="1926275" cy="310896"/>
-          </a:xfrm>
-          <a:prstGeom prst="rect">
-            <a:avLst/>
-          </a:prstGeom>
-          <a:noFill/>
-          <a:ln/>
-        </p:spPr>
-        <p:txBody>
-          <a:bodyPr wrap="square" lIns="0" tIns="0" rIns="0" bIns="0" rtlCol="0" anchor="ctr"/>
-          <a:lstStyle/>
-          <a:p>
-            <a:pPr algn="ctr" indent="0" marL="0">
-              <a:buNone/>
-            </a:pPr>
-            <a:r>
-              <a:rPr lang="en-US" sz="1350" b="1" dirty="0">
-                <a:solidFill>
-                  <a:srgbClr val="1D2B39"/>
-                </a:solidFill>
-                <a:latin typeface="Arial" pitchFamily="34" charset="0"/>
-                <a:ea typeface="Microsoft JhengHei"/>
-                <a:cs typeface="Microsoft JhengHei"/>
-                <a:ea typeface="Arial" pitchFamily="34" charset="-122"/>
-                <a:cs typeface="Arial" pitchFamily="34" charset="-120"/>
-              </a:rPr>
-              <a:t>電子計算機中心</a:t>
-            </a:r>
-            <a:endParaRPr lang="en-US" sz="1350" dirty="0"/>
-          </a:p>
-        </p:txBody>
-      </p:sp>
-      <p:sp>
-        <p:nvSpPr>
-          <p:cNvPr id="13" name="Shape 11"/>
-          <p:cNvSpPr/>
-          <p:nvPr/>
-        </p:nvSpPr>
-        <p:spPr>
-          <a:xfrm>
-            <a:off x="4876678" y="2103120"/>
-            <a:ext cx="201168" cy="0"/>
-          </a:xfrm>
-          <a:prstGeom prst="line">
-            <a:avLst/>
-          </a:prstGeom>
-          <a:noFill/>
-          <a:ln w="15875">
-            <a:solidFill>
-              <a:srgbClr val="1E5A85"/>
-            </a:solidFill>
-            <a:prstDash val="solid"/>
-            <a:tailEnd type="triangle"/>
-          </a:ln>
-        </p:spPr>
-      </p:sp>
-      <p:sp>
-        <p:nvSpPr>
-          <p:cNvPr id="14" name="Shape 12"/>
-          <p:cNvSpPr/>
-          <p:nvPr/>
-        </p:nvSpPr>
-        <p:spPr>
-          <a:xfrm>
-            <a:off x="5132710" y="1700784"/>
-            <a:ext cx="1926275" cy="804672"/>
-          </a:xfrm>
-          <a:prstGeom prst="roundRect">
-            <a:avLst>
-              <a:gd name="adj" fmla="val 3977"/>
-            </a:avLst>
-          </a:prstGeom>
-          <a:solidFill>
-            <a:srgbClr val="FFFFFF"/>
-          </a:solidFill>
-          <a:ln w="9525">
-            <a:solidFill>
-              <a:srgbClr val="E6EBF0"/>
-            </a:solidFill>
-            <a:prstDash val="solid"/>
-          </a:ln>
-        </p:spPr>
-      </p:sp>
-      <p:sp>
-        <p:nvSpPr>
-          <p:cNvPr id="15" name="Text 13"/>
-          <p:cNvSpPr/>
-          <p:nvPr/>
-        </p:nvSpPr>
-        <p:spPr>
-          <a:xfrm>
-            <a:off x="5132710" y="1819656"/>
-            <a:ext cx="1926275" cy="201168"/>
-          </a:xfrm>
-          <a:prstGeom prst="rect">
-            <a:avLst/>
-          </a:prstGeom>
-          <a:noFill/>
-          <a:ln/>
-        </p:spPr>
-        <p:txBody>
-          <a:bodyPr wrap="square" lIns="0" tIns="0" rIns="0" bIns="0" rtlCol="0" anchor="ctr"/>
-          <a:lstStyle/>
-          <a:p>
-            <a:pPr algn="ctr" indent="0" marL="0">
-              <a:buNone/>
-            </a:pPr>
-            <a:r>
-              <a:rPr lang="en-US" sz="850" b="1" spc="140" kern="0" dirty="0">
-                <a:solidFill>
-                  <a:srgbClr val="7A8794"/>
-                </a:solidFill>
-                <a:latin typeface="Arial" pitchFamily="34" charset="0"/>
-                <a:ea typeface="Microsoft JhengHei"/>
-                <a:cs typeface="Microsoft JhengHei"/>
-                <a:ea typeface="Arial" pitchFamily="34" charset="-122"/>
-                <a:cs typeface="Arial" pitchFamily="34" charset="-120"/>
-              </a:rPr>
-              <a:t>會辦 · 個資</a:t>
-            </a:r>
-            <a:endParaRPr lang="en-US" sz="850" dirty="0"/>
-          </a:p>
-        </p:txBody>
-      </p:sp>
-      <p:sp>
-        <p:nvSpPr>
-          <p:cNvPr id="16" name="Text 14"/>
-          <p:cNvSpPr/>
-          <p:nvPr/>
-        </p:nvSpPr>
-        <p:spPr>
-          <a:xfrm>
-            <a:off x="5132710" y="2039112"/>
-            <a:ext cx="1926275" cy="310896"/>
-          </a:xfrm>
-          <a:prstGeom prst="rect">
-            <a:avLst/>
-          </a:prstGeom>
-          <a:noFill/>
-          <a:ln/>
-        </p:spPr>
-        <p:txBody>
-          <a:bodyPr wrap="square" lIns="0" tIns="0" rIns="0" bIns="0" rtlCol="0" anchor="ctr"/>
-          <a:lstStyle/>
-          <a:p>
-            <a:pPr algn="ctr" indent="0" marL="0">
-              <a:buNone/>
-            </a:pPr>
-            <a:r>
-              <a:rPr lang="en-US" sz="1350" b="1" dirty="0">
-                <a:solidFill>
-                  <a:srgbClr val="1D2B39"/>
-                </a:solidFill>
-                <a:latin typeface="Arial" pitchFamily="34" charset="0"/>
-                <a:ea typeface="Microsoft JhengHei"/>
-                <a:cs typeface="Microsoft JhengHei"/>
-                <a:ea typeface="Arial" pitchFamily="34" charset="-122"/>
-                <a:cs typeface="Arial" pitchFamily="34" charset="-120"/>
-              </a:rPr>
-              <a:t>個資／法制單位</a:t>
-            </a:r>
-            <a:endParaRPr lang="en-US" sz="1350" dirty="0"/>
-          </a:p>
-        </p:txBody>
-      </p:sp>
-      <p:sp>
-        <p:nvSpPr>
-          <p:cNvPr id="17" name="Shape 15"/>
-          <p:cNvSpPr/>
-          <p:nvPr/>
-        </p:nvSpPr>
-        <p:spPr>
-          <a:xfrm>
-            <a:off x="7113849" y="2103120"/>
-            <a:ext cx="201168" cy="0"/>
-          </a:xfrm>
-          <a:prstGeom prst="line">
-            <a:avLst/>
-          </a:prstGeom>
-          <a:noFill/>
-          <a:ln w="15875">
-            <a:solidFill>
-              <a:srgbClr val="1E5A85"/>
-            </a:solidFill>
-            <a:prstDash val="solid"/>
-            <a:tailEnd type="triangle"/>
-          </a:ln>
-        </p:spPr>
-      </p:sp>
-      <p:sp>
-        <p:nvSpPr>
-          <p:cNvPr id="18" name="Shape 16"/>
-          <p:cNvSpPr/>
-          <p:nvPr/>
-        </p:nvSpPr>
-        <p:spPr>
-          <a:xfrm>
-            <a:off x="7369881" y="1700784"/>
-            <a:ext cx="1926275" cy="804672"/>
-          </a:xfrm>
-          <a:prstGeom prst="roundRect">
-            <a:avLst>
-              <a:gd name="adj" fmla="val 3977"/>
-            </a:avLst>
-          </a:prstGeom>
-          <a:solidFill>
-            <a:srgbClr val="FFFFFF"/>
-          </a:solidFill>
-          <a:ln w="9525">
-            <a:solidFill>
-              <a:srgbClr val="E6EBF0"/>
-            </a:solidFill>
-            <a:prstDash val="solid"/>
-          </a:ln>
-        </p:spPr>
-      </p:sp>
-      <p:sp>
-        <p:nvSpPr>
-          <p:cNvPr id="19" name="Text 17"/>
-          <p:cNvSpPr/>
-          <p:nvPr/>
-        </p:nvSpPr>
-        <p:spPr>
-          <a:xfrm>
-            <a:off x="7369881" y="1819656"/>
-            <a:ext cx="1926275" cy="201168"/>
-          </a:xfrm>
-          <a:prstGeom prst="rect">
-            <a:avLst/>
-          </a:prstGeom>
-          <a:noFill/>
-          <a:ln/>
-        </p:spPr>
-        <p:txBody>
-          <a:bodyPr wrap="square" lIns="0" tIns="0" rIns="0" bIns="0" rtlCol="0" anchor="ctr"/>
-          <a:lstStyle/>
-          <a:p>
-            <a:pPr algn="ctr" indent="0" marL="0">
-              <a:buNone/>
-            </a:pPr>
-            <a:r>
-              <a:rPr lang="en-US" sz="850" b="1" spc="140" kern="0" dirty="0">
-                <a:solidFill>
-                  <a:srgbClr val="7A8794"/>
-                </a:solidFill>
-                <a:latin typeface="Arial" pitchFamily="34" charset="0"/>
-                <a:ea typeface="Microsoft JhengHei"/>
-                <a:cs typeface="Microsoft JhengHei"/>
-                <a:ea typeface="Arial" pitchFamily="34" charset="-122"/>
-                <a:cs typeface="Arial" pitchFamily="34" charset="-120"/>
-              </a:rPr>
-              <a:t>核定</a:t>
-            </a:r>
-            <a:endParaRPr lang="en-US" sz="850" dirty="0"/>
-          </a:p>
-        </p:txBody>
-      </p:sp>
-      <p:sp>
-        <p:nvSpPr>
-          <p:cNvPr id="20" name="Text 18"/>
-          <p:cNvSpPr/>
-          <p:nvPr/>
-        </p:nvSpPr>
-        <p:spPr>
-          <a:xfrm>
-            <a:off x="7369881" y="2039112"/>
-            <a:ext cx="1926275" cy="310896"/>
-          </a:xfrm>
-          <a:prstGeom prst="rect">
-            <a:avLst/>
-          </a:prstGeom>
-          <a:noFill/>
-          <a:ln/>
-        </p:spPr>
-        <p:txBody>
-          <a:bodyPr wrap="square" lIns="0" tIns="0" rIns="0" bIns="0" rtlCol="0" anchor="ctr"/>
-          <a:lstStyle/>
-          <a:p>
-            <a:pPr algn="ctr" indent="0" marL="0">
-              <a:buNone/>
-            </a:pPr>
-            <a:r>
-              <a:rPr lang="en-US" sz="1350" b="1" dirty="0">
-                <a:solidFill>
-                  <a:srgbClr val="1D2B39"/>
-                </a:solidFill>
-                <a:latin typeface="Arial" pitchFamily="34" charset="0"/>
-                <a:ea typeface="Microsoft JhengHei"/>
-                <a:cs typeface="Microsoft JhengHei"/>
-                <a:ea typeface="Arial" pitchFamily="34" charset="-122"/>
-                <a:cs typeface="Arial" pitchFamily="34" charset="-120"/>
-              </a:rPr>
-              <a:t>組長</a:t>
-            </a:r>
-            <a:endParaRPr lang="en-US" sz="1350" dirty="0"/>
-          </a:p>
-        </p:txBody>
-      </p:sp>
-      <p:sp>
-        <p:nvSpPr>
-          <p:cNvPr id="21" name="Shape 19"/>
-          <p:cNvSpPr/>
-          <p:nvPr/>
-        </p:nvSpPr>
-        <p:spPr>
-          <a:xfrm>
-            <a:off x="9351020" y="2103120"/>
-            <a:ext cx="201168" cy="0"/>
-          </a:xfrm>
-          <a:prstGeom prst="line">
-            <a:avLst/>
-          </a:prstGeom>
-          <a:noFill/>
-          <a:ln w="15875">
-            <a:solidFill>
-              <a:srgbClr val="1E5A85"/>
-            </a:solidFill>
-            <a:prstDash val="solid"/>
-            <a:tailEnd type="triangle"/>
-          </a:ln>
-        </p:spPr>
-      </p:sp>
-      <p:sp>
-        <p:nvSpPr>
-          <p:cNvPr id="22" name="Shape 20"/>
-          <p:cNvSpPr/>
-          <p:nvPr/>
-        </p:nvSpPr>
-        <p:spPr>
-          <a:xfrm>
-            <a:off x="9607052" y="1700784"/>
-            <a:ext cx="1926275" cy="804672"/>
-          </a:xfrm>
-          <a:prstGeom prst="roundRect">
-            <a:avLst>
-              <a:gd name="adj" fmla="val 3977"/>
-            </a:avLst>
-          </a:prstGeom>
-          <a:solidFill>
-            <a:srgbClr val="FFFFFF"/>
-          </a:solidFill>
-          <a:ln w="9525">
-            <a:solidFill>
-              <a:srgbClr val="E6EBF0"/>
-            </a:solidFill>
-            <a:prstDash val="solid"/>
-          </a:ln>
-        </p:spPr>
-      </p:sp>
-      <p:sp>
-        <p:nvSpPr>
-          <p:cNvPr id="23" name="Text 21"/>
-          <p:cNvSpPr/>
-          <p:nvPr/>
-        </p:nvSpPr>
-        <p:spPr>
-          <a:xfrm>
-            <a:off x="9607052" y="1819656"/>
-            <a:ext cx="1926275" cy="201168"/>
-          </a:xfrm>
-          <a:prstGeom prst="rect">
-            <a:avLst/>
-          </a:prstGeom>
-          <a:noFill/>
-          <a:ln/>
-        </p:spPr>
-        <p:txBody>
-          <a:bodyPr wrap="square" lIns="0" tIns="0" rIns="0" bIns="0" rtlCol="0" anchor="ctr"/>
-          <a:lstStyle/>
-          <a:p>
-            <a:pPr algn="ctr" indent="0" marL="0">
-              <a:buNone/>
-            </a:pPr>
-            <a:r>
-              <a:rPr lang="en-US" sz="850" b="1" spc="140" kern="0" dirty="0">
-                <a:solidFill>
-                  <a:srgbClr val="7A8794"/>
-                </a:solidFill>
-                <a:latin typeface="Arial" pitchFamily="34" charset="0"/>
-                <a:ea typeface="Microsoft JhengHei"/>
-                <a:cs typeface="Microsoft JhengHei"/>
-                <a:ea typeface="Arial" pitchFamily="34" charset="-122"/>
-                <a:cs typeface="Arial" pitchFamily="34" charset="-120"/>
-              </a:rPr>
-              <a:t>續辦</a:t>
-            </a:r>
-            <a:endParaRPr lang="en-US" sz="850" dirty="0"/>
-          </a:p>
-        </p:txBody>
-      </p:sp>
-      <p:sp>
-        <p:nvSpPr>
-          <p:cNvPr id="24" name="Text 22"/>
-          <p:cNvSpPr/>
-          <p:nvPr/>
-        </p:nvSpPr>
-        <p:spPr>
-          <a:xfrm>
-            <a:off x="9607052" y="2039112"/>
-            <a:ext cx="1926275" cy="310896"/>
-          </a:xfrm>
-          <a:prstGeom prst="rect">
-            <a:avLst/>
-          </a:prstGeom>
-          <a:noFill/>
-          <a:ln/>
-        </p:spPr>
-        <p:txBody>
-          <a:bodyPr wrap="square" lIns="0" tIns="0" rIns="0" bIns="0" rtlCol="0" anchor="ctr"/>
-          <a:lstStyle/>
-          <a:p>
-            <a:pPr algn="ctr" indent="0" marL="0">
-              <a:buNone/>
-            </a:pPr>
-            <a:r>
-              <a:rPr lang="en-US" sz="1350" b="1" dirty="0">
-                <a:solidFill>
-                  <a:srgbClr val="1D2B39"/>
-                </a:solidFill>
-                <a:latin typeface="Arial" pitchFamily="34" charset="0"/>
-                <a:ea typeface="Microsoft JhengHei"/>
-                <a:cs typeface="Microsoft JhengHei"/>
-                <a:ea typeface="Arial" pitchFamily="34" charset="-122"/>
-                <a:cs typeface="Arial" pitchFamily="34" charset="-120"/>
-              </a:rPr>
-              <a:t>請購 · 簽約</a:t>
-            </a:r>
-            <a:endParaRPr lang="en-US" sz="1350" dirty="0"/>
-          </a:p>
-        </p:txBody>
-      </p:sp>
-      <p:sp>
-        <p:nvSpPr>
-          <p:cNvPr id="25" name="Shape 23"/>
-          <p:cNvSpPr/>
-          <p:nvPr/>
-        </p:nvSpPr>
-        <p:spPr>
-          <a:xfrm>
-            <a:off x="658368" y="2980944"/>
-            <a:ext cx="5245456" cy="2011680"/>
-          </a:xfrm>
-          <a:prstGeom prst="roundRect">
-            <a:avLst>
-              <a:gd name="adj" fmla="val 1591"/>
-            </a:avLst>
-          </a:prstGeom>
-          <a:solidFill>
-            <a:srgbClr val="FCE9DC"/>
-          </a:solidFill>
-          <a:ln w="12700">
-            <a:solidFill>
-              <a:srgbClr val="FCE9DC"/>
-            </a:solidFill>
-            <a:prstDash val="solid"/>
-          </a:ln>
-        </p:spPr>
-      </p:sp>
-      <p:sp>
-        <p:nvSpPr>
-          <p:cNvPr id="26" name="Text 24"/>
-          <p:cNvSpPr/>
-          <p:nvPr/>
-        </p:nvSpPr>
-        <p:spPr>
-          <a:xfrm>
-            <a:off x="877824" y="3145536"/>
-            <a:ext cx="4806544" cy="274320"/>
-          </a:xfrm>
-          <a:prstGeom prst="rect">
-            <a:avLst/>
-          </a:prstGeom>
-          <a:noFill/>
-          <a:ln/>
-        </p:spPr>
-        <p:txBody>
-          <a:bodyPr wrap="square" lIns="0" tIns="0" rIns="0" bIns="0" rtlCol="0" anchor="ctr"/>
-          <a:lstStyle/>
-          <a:p>
-            <a:pPr indent="0" marL="0">
-              <a:buNone/>
-            </a:pPr>
-            <a:r>
-              <a:rPr lang="en-US" sz="1500" b="1" dirty="0">
-                <a:solidFill>
-                  <a:srgbClr val="1D2B39"/>
-                </a:solidFill>
-                <a:latin typeface="Arial" pitchFamily="34" charset="0"/>
-                <a:ea typeface="Microsoft JhengHei"/>
-                <a:cs typeface="Microsoft JhengHei"/>
-                <a:ea typeface="Arial" pitchFamily="34" charset="-122"/>
-                <a:cs typeface="Arial" pitchFamily="34" charset="-120"/>
-              </a:rPr>
-              <a:t>關鍵推論</a:t>
-            </a:r>
-            <a:endParaRPr lang="en-US" sz="1500" dirty="0"/>
-          </a:p>
-        </p:txBody>
-      </p:sp>
-      <p:sp>
-        <p:nvSpPr>
-          <p:cNvPr id="27" name="Text 25"/>
-          <p:cNvSpPr/>
-          <p:nvPr/>
-        </p:nvSpPr>
-        <p:spPr>
-          <a:xfrm>
-            <a:off x="877824" y="3493008"/>
-            <a:ext cx="4806544" cy="1353312"/>
-          </a:xfrm>
-          <a:prstGeom prst="rect">
-            <a:avLst/>
-          </a:prstGeom>
-          <a:noFill/>
-          <a:ln/>
-        </p:spPr>
-        <p:txBody>
-          <a:bodyPr wrap="square" lIns="0" tIns="0" rIns="0" bIns="0" rtlCol="0" anchor="t"/>
-          <a:lstStyle/>
-          <a:p>
-            <a:pPr indent="0" marL="0">
-              <a:lnSpc>
-                <a:spcPts val="1728"/>
-              </a:lnSpc>
-              <a:buNone/>
-            </a:pPr>
-            <a:r>
-              <a:rPr lang="en-US" sz="1200" dirty="0">
-                <a:solidFill>
-                  <a:srgbClr val="4E5F70"/>
-                </a:solidFill>
-                <a:latin typeface="Arial" pitchFamily="34" charset="0"/>
-                <a:ea typeface="Microsoft JhengHei"/>
-                <a:cs typeface="Microsoft JhengHei"/>
-                <a:ea typeface="Arial" pitchFamily="34" charset="-122"/>
-                <a:cs typeface="Arial" pitchFamily="34" charset="-120"/>
-              </a:rPr>
-              <a:t>會辦是必然，所以簽送出去的那一刻，資安文件就必須完整——不能先簽再補，一退件就是一輪時間。</a:t>
-            </a:r>
-            <a:endParaRPr lang="en-US" sz="1200" dirty="0"/>
-          </a:p>
-          <a:p>
-            <a:pPr indent="0" marL="0">
-              <a:lnSpc>
-                <a:spcPts val="1728"/>
-              </a:lnSpc>
-              <a:buNone/>
-            </a:pPr>
-            <a:endParaRPr lang="en-US" sz="1200" dirty="0"/>
-          </a:p>
-          <a:p>
-            <a:pPr indent="0" marL="0">
-              <a:lnSpc>
-                <a:spcPts val="1728"/>
-              </a:lnSpc>
-              <a:buNone/>
-            </a:pPr>
-            <a:r>
-              <a:rPr lang="en-US" sz="1200" dirty="0">
-                <a:solidFill>
-                  <a:srgbClr val="4E5F70"/>
-                </a:solidFill>
-                <a:latin typeface="Arial" pitchFamily="34" charset="0"/>
-                <a:ea typeface="Microsoft JhengHei"/>
-                <a:cs typeface="Microsoft JhengHei"/>
-                <a:ea typeface="Arial" pitchFamily="34" charset="-122"/>
-                <a:cs typeface="Arial" pitchFamily="34" charset="-120"/>
-              </a:rPr>
-              <a:t>附件二、三、四、七要一次到位，讓會辦是「核對」而不是「索資」。</a:t>
-            </a:r>
-            <a:endParaRPr lang="en-US" sz="1200" dirty="0"/>
-          </a:p>
-        </p:txBody>
-      </p:sp>
-      <p:sp>
-        <p:nvSpPr>
-          <p:cNvPr id="28" name="Shape 26"/>
-          <p:cNvSpPr/>
-          <p:nvPr/>
-        </p:nvSpPr>
-        <p:spPr>
-          <a:xfrm>
-            <a:off x="6287872" y="2980944"/>
-            <a:ext cx="5245456" cy="2011680"/>
-          </a:xfrm>
-          <a:prstGeom prst="roundRect">
-            <a:avLst>
-              <a:gd name="adj" fmla="val 1591"/>
-            </a:avLst>
-          </a:prstGeom>
-          <a:solidFill>
             <a:srgbClr val="E4EDF5"/>
           </a:solidFill>
           <a:ln w="12700">
@@ -26525,14 +27776,14 @@
       </p:sp>
       <p:sp>
         <p:nvSpPr>
-          <p:cNvPr id="29" name="Text 27"/>
-          <p:cNvSpPr/>
-          <p:nvPr/>
-        </p:nvSpPr>
-        <p:spPr>
-          <a:xfrm>
-            <a:off x="6507328" y="3145536"/>
-            <a:ext cx="4806544" cy="274320"/>
+          <p:cNvPr id="8" name="Text 5"/>
+          <p:cNvSpPr/>
+          <p:nvPr/>
+        </p:nvSpPr>
+        <p:spPr>
+          <a:xfrm>
+            <a:off x="932688" y="5184648"/>
+            <a:ext cx="10326319" cy="822960"/>
           </a:xfrm>
           <a:prstGeom prst="rect">
             <a:avLst/>
@@ -26542,86 +27793,33 @@
         </p:spPr>
         <p:txBody>
           <a:bodyPr wrap="square" lIns="0" tIns="0" rIns="0" bIns="0" rtlCol="0" anchor="ctr"/>
-          <a:lstStyle/>
-          <a:p>
-            <a:pPr indent="0" marL="0">
-              <a:buNone/>
-            </a:pPr>
-            <a:r>
-              <a:rPr lang="en-US" sz="1500" b="1" dirty="0">
-                <a:solidFill>
-                  <a:srgbClr val="1D2B39"/>
-                </a:solidFill>
-                <a:latin typeface="Arial" pitchFamily="34" charset="0"/>
-                <a:ea typeface="Microsoft JhengHei"/>
-                <a:cs typeface="Microsoft JhengHei"/>
-                <a:ea typeface="Arial" pitchFamily="34" charset="-122"/>
-                <a:cs typeface="Arial" pitchFamily="34" charset="-120"/>
-              </a:rPr>
-              <a:t>想請組長幫的一件事</a:t>
-            </a:r>
-            <a:endParaRPr lang="en-US" sz="1500" dirty="0"/>
-          </a:p>
-        </p:txBody>
-      </p:sp>
-      <p:sp>
-        <p:nvSpPr>
-          <p:cNvPr id="30" name="Text 28"/>
-          <p:cNvSpPr/>
-          <p:nvPr/>
-        </p:nvSpPr>
-        <p:spPr>
-          <a:xfrm>
-            <a:off x="6507328" y="3493008"/>
-            <a:ext cx="4806544" cy="1353312"/>
-          </a:xfrm>
-          <a:prstGeom prst="rect">
-            <a:avLst/>
-          </a:prstGeom>
-          <a:noFill/>
-          <a:ln/>
-        </p:spPr>
-        <p:txBody>
-          <a:bodyPr wrap="square" lIns="0" tIns="0" rIns="0" bIns="0" rtlCol="0" anchor="t"/>
           <a:lstStyle/>
           <a:p>
             <a:pPr indent="0" marL="0">
               <a:lnSpc>
-                <a:spcPts val="1728"/>
+                <a:spcPts val="1800"/>
               </a:lnSpc>
               <a:buNone/>
             </a:pPr>
             <a:r>
-              <a:rPr lang="en-US" sz="1200" dirty="0">
-                <a:solidFill>
-                  <a:srgbClr val="4E5F70"/>
-                </a:solidFill>
-                <a:latin typeface="Arial" pitchFamily="34" charset="0"/>
-                <a:ea typeface="Microsoft JhengHei"/>
-                <a:cs typeface="Microsoft JhengHei"/>
-                <a:ea typeface="Arial" pitchFamily="34" charset="-122"/>
-                <a:cs typeface="Arial" pitchFamily="34" charset="-120"/>
-              </a:rPr>
-              <a:t>與其等會辦時計網中心來要資料，想在正式送簽前先與他們對一次要求。若他們有自己的委外資安檢核表，我照他們的表逐欄對映，不另編一份。</a:t>
-            </a:r>
-            <a:endParaRPr lang="en-US" sz="1200" dirty="0"/>
-          </a:p>
-          <a:p>
+              <a:rPr lang="en-US" sz="1200" b="1" dirty="0">
+                <a:solidFill>
+                  <a:srgbClr val="1D2B39"/>
+                </a:solidFill>
+                <a:latin typeface="Arial" pitchFamily="34" charset="0"/>
+                <a:ea typeface="Microsoft JhengHei"/>
+                <a:cs typeface="Microsoft JhengHei"/>
+                <a:ea typeface="Arial" pitchFamily="34" charset="-122"/>
+                <a:cs typeface="Arial" pitchFamily="34" charset="-120"/>
+              </a:rPr>
+              <a:t>不論最後怎麼合作，這六份文件都可以先給貴組與計網中心看。</a:t>
+            </a:r>
             <a:pPr indent="0" marL="0">
               <a:lnSpc>
-                <a:spcPts val="1728"/>
+                <a:spcPts val="1800"/>
               </a:lnSpc>
               <a:buNone/>
             </a:pPr>
-            <a:endParaRPr lang="en-US" sz="1200" dirty="0"/>
-          </a:p>
-          <a:p>
-            <a:pPr indent="0" marL="0">
-              <a:lnSpc>
-                <a:spcPts val="1728"/>
-              </a:lnSpc>
-              <a:buNone/>
-            </a:pPr>
             <a:r>
               <a:rPr lang="en-US" sz="1200" dirty="0">
                 <a:solidFill>
@@ -26633,7 +27831,7 @@
                 <a:ea typeface="Arial" pitchFamily="34" charset="-122"/>
                 <a:cs typeface="Arial" pitchFamily="34" charset="-120"/>
               </a:rPr>
-              <a:t>方便請組長幫忙引薦窗口嗎？</a:t>
+              <a:t>　估價單要等商業登記核准（辦理中）才開得出來，但那是最後一步，不影響前面任何討論。</a:t>
             </a:r>
             <a:endParaRPr lang="en-US" sz="1200" dirty="0"/>
           </a:p>
@@ -26832,7 +28030,7 @@
                 <a:ea typeface="Arial" pitchFamily="34" charset="-122"/>
                 <a:cs typeface="Arial" pitchFamily="34" charset="-120"/>
               </a:rPr>
-              <a:t>挑一個在建案，</a:t>
+              <a:t>不用現在決定</a:t>
             </a:r>
             <a:endParaRPr lang="en-US" sz="3700" dirty="0"/>
           </a:p>
@@ -26854,7 +28052,7 @@
                 <a:ea typeface="Arial" pitchFamily="34" charset="-122"/>
                 <a:cs typeface="Arial" pitchFamily="34" charset="-120"/>
               </a:rPr>
-              <a:t>把它從頭跑到底。</a:t>
+              <a:t>要怎麼合作。</a:t>
             </a:r>
             <a:endParaRPr lang="en-US" sz="3700" dirty="0"/>
           </a:p>
@@ -26869,7 +28067,7 @@
         <p:spPr>
           <a:xfrm>
             <a:off x="658368" y="2971800"/>
-            <a:ext cx="5437480" cy="822960"/>
+            <a:ext cx="5437480" cy="868680"/>
           </a:xfrm>
           <a:prstGeom prst="rect">
             <a:avLst/>
@@ -26898,7 +28096,7 @@
                 <a:ea typeface="Arial" pitchFamily="34" charset="-122"/>
                 <a:cs typeface="Arial" pitchFamily="34" charset="-120"/>
               </a:rPr>
-              <a:t>本案不是試用，是有驗收標準、有服務承諾的履約。契約載明的每一項，我都做得到才寫上去。</a:t>
+              <a:t>這份文件是接續上次談話的書面整理，把系統做到哪、資安過不過得了、行政面怎麼走，一次寫清楚，方便組長自己看。</a:t>
             </a:r>
             <a:endParaRPr lang="en-US" sz="1400" dirty="0"/>
           </a:p>
@@ -26912,7 +28110,48 @@
         </p:nvSpPr>
         <p:spPr>
           <a:xfrm>
-            <a:off x="658368" y="3931920"/>
+            <a:off x="658368" y="3977640"/>
+            <a:ext cx="5437480" cy="310896"/>
+          </a:xfrm>
+          <a:prstGeom prst="rect">
+            <a:avLst/>
+          </a:prstGeom>
+          <a:noFill/>
+          <a:ln/>
+        </p:spPr>
+        <p:txBody>
+          <a:bodyPr wrap="square" lIns="0" tIns="0" rIns="0" bIns="0" rtlCol="0" anchor="ctr"/>
+          <a:lstStyle/>
+          <a:p>
+            <a:pPr indent="0" marL="0">
+              <a:buNone/>
+            </a:pPr>
+            <a:r>
+              <a:rPr lang="en-US" sz="1300" b="1" dirty="0">
+                <a:solidFill>
+                  <a:srgbClr val="FFFFFF"/>
+                </a:solidFill>
+                <a:latin typeface="Arial" pitchFamily="34" charset="0"/>
+                <a:ea typeface="Microsoft JhengHei"/>
+                <a:cs typeface="Microsoft JhengHei"/>
+                <a:ea typeface="Arial" pitchFamily="34" charset="-122"/>
+                <a:cs typeface="Arial" pitchFamily="34" charset="-120"/>
+              </a:rPr>
+              <a:t>若有哪一頁與貴校實務不符，請直接指正，我照著改。</a:t>
+            </a:r>
+            <a:endParaRPr lang="en-US" sz="1300" dirty="0"/>
+          </a:p>
+        </p:txBody>
+      </p:sp>
+      <p:sp>
+        <p:nvSpPr>
+          <p:cNvPr id="8" name="Text 6"/>
+          <p:cNvSpPr/>
+          <p:nvPr/>
+        </p:nvSpPr>
+        <p:spPr>
+          <a:xfrm>
+            <a:off x="658368" y="4480560"/>
             <a:ext cx="5437480" cy="274320"/>
           </a:xfrm>
           <a:prstGeom prst="rect">
@@ -26929,89 +28168,7 @@
               <a:buNone/>
             </a:pPr>
             <a:r>
-              <a:rPr lang="en-US" sz="1300" b="1" dirty="0">
-                <a:solidFill>
-                  <a:srgbClr val="FFFFFF"/>
-                </a:solidFill>
-                <a:latin typeface="Arial" pitchFamily="34" charset="0"/>
-                <a:ea typeface="Microsoft JhengHei"/>
-                <a:cs typeface="Microsoft JhengHei"/>
-                <a:ea typeface="Arial" pitchFamily="34" charset="-122"/>
-                <a:cs typeface="Arial" pitchFamily="34" charset="-120"/>
-              </a:rPr>
-              <a:t>貴組需要投入的</a:t>
-            </a:r>
-            <a:endParaRPr lang="en-US" sz="1300" dirty="0"/>
-          </a:p>
-        </p:txBody>
-      </p:sp>
-      <p:sp>
-        <p:nvSpPr>
-          <p:cNvPr id="8" name="Text 6"/>
-          <p:cNvSpPr/>
-          <p:nvPr/>
-        </p:nvSpPr>
-        <p:spPr>
-          <a:xfrm>
-            <a:off x="658368" y="4279392"/>
-            <a:ext cx="219456" cy="292608"/>
-          </a:xfrm>
-          <a:prstGeom prst="rect">
-            <a:avLst/>
-          </a:prstGeom>
-          <a:noFill/>
-          <a:ln/>
-        </p:spPr>
-        <p:txBody>
-          <a:bodyPr wrap="square" lIns="0" tIns="0" rIns="0" bIns="0" rtlCol="0" anchor="ctr"/>
-          <a:lstStyle/>
-          <a:p>
-            <a:pPr indent="0" marL="0">
-              <a:buNone/>
-            </a:pPr>
-            <a:r>
-              <a:rPr lang="en-US" sz="800" b="1" dirty="0">
-                <a:solidFill>
-                  <a:srgbClr val="7A8794"/>
-                </a:solidFill>
-                <a:latin typeface="Arial" pitchFamily="34" charset="0"/>
-                <a:ea typeface="Microsoft JhengHei"/>
-                <a:cs typeface="Microsoft JhengHei"/>
-                <a:ea typeface="Arial" pitchFamily="34" charset="-122"/>
-                <a:cs typeface="Arial" pitchFamily="34" charset="-120"/>
-              </a:rPr>
-              <a:t>—</a:t>
-            </a:r>
-            <a:endParaRPr lang="en-US" sz="800" dirty="0"/>
-          </a:p>
-        </p:txBody>
-      </p:sp>
-      <p:sp>
-        <p:nvSpPr>
-          <p:cNvPr id="9" name="Text 7"/>
-          <p:cNvSpPr/>
-          <p:nvPr/>
-        </p:nvSpPr>
-        <p:spPr>
-          <a:xfrm>
-            <a:off x="877824" y="4279392"/>
-            <a:ext cx="5000524" cy="292608"/>
-          </a:xfrm>
-          <a:prstGeom prst="rect">
-            <a:avLst/>
-          </a:prstGeom>
-          <a:noFill/>
-          <a:ln/>
-        </p:spPr>
-        <p:txBody>
-          <a:bodyPr wrap="square" lIns="0" tIns="0" rIns="0" bIns="0" rtlCol="0" anchor="ctr"/>
-          <a:lstStyle/>
-          <a:p>
-            <a:pPr indent="0" marL="0">
-              <a:buNone/>
-            </a:pPr>
-            <a:r>
-              <a:rPr lang="en-US" sz="1250" dirty="0">
+              <a:rPr lang="en-US" sz="1200" dirty="0">
                 <a:solidFill>
                   <a:srgbClr val="A9C8DE"/>
                 </a:solidFill>
@@ -27021,179 +28178,15 @@
                 <a:ea typeface="Arial" pitchFamily="34" charset="-122"/>
                 <a:cs typeface="Arial" pitchFamily="34" charset="-120"/>
               </a:rPr>
-              <a:t>一位承辦人，每週約一小時</a:t>
-            </a:r>
-            <a:endParaRPr lang="en-US" sz="1250" dirty="0"/>
-          </a:p>
-        </p:txBody>
-      </p:sp>
-      <p:sp>
-        <p:nvSpPr>
-          <p:cNvPr id="10" name="Text 8"/>
-          <p:cNvSpPr/>
-          <p:nvPr/>
-        </p:nvSpPr>
-        <p:spPr>
-          <a:xfrm>
-            <a:off x="658368" y="4572000"/>
-            <a:ext cx="219456" cy="292608"/>
-          </a:xfrm>
-          <a:prstGeom prst="rect">
-            <a:avLst/>
-          </a:prstGeom>
-          <a:noFill/>
-          <a:ln/>
-        </p:spPr>
-        <p:txBody>
-          <a:bodyPr wrap="square" lIns="0" tIns="0" rIns="0" bIns="0" rtlCol="0" anchor="ctr"/>
-          <a:lstStyle/>
-          <a:p>
-            <a:pPr indent="0" marL="0">
-              <a:buNone/>
-            </a:pPr>
-            <a:r>
-              <a:rPr lang="en-US" sz="800" b="1" dirty="0">
-                <a:solidFill>
-                  <a:srgbClr val="7A8794"/>
-                </a:solidFill>
-                <a:latin typeface="Arial" pitchFamily="34" charset="0"/>
-                <a:ea typeface="Microsoft JhengHei"/>
-                <a:cs typeface="Microsoft JhengHei"/>
-                <a:ea typeface="Arial" pitchFamily="34" charset="-122"/>
-                <a:cs typeface="Arial" pitchFamily="34" charset="-120"/>
-              </a:rPr>
-              <a:t>—</a:t>
-            </a:r>
-            <a:endParaRPr lang="en-US" sz="800" dirty="0"/>
-          </a:p>
-        </p:txBody>
-      </p:sp>
-      <p:sp>
-        <p:nvSpPr>
-          <p:cNvPr id="11" name="Text 9"/>
-          <p:cNvSpPr/>
-          <p:nvPr/>
-        </p:nvSpPr>
-        <p:spPr>
-          <a:xfrm>
-            <a:off x="877824" y="4572000"/>
-            <a:ext cx="5000524" cy="292608"/>
-          </a:xfrm>
-          <a:prstGeom prst="rect">
-            <a:avLst/>
-          </a:prstGeom>
-          <a:noFill/>
-          <a:ln/>
-        </p:spPr>
-        <p:txBody>
-          <a:bodyPr wrap="square" lIns="0" tIns="0" rIns="0" bIns="0" rtlCol="0" anchor="ctr"/>
-          <a:lstStyle/>
-          <a:p>
-            <a:pPr indent="0" marL="0">
-              <a:buNone/>
-            </a:pPr>
-            <a:r>
-              <a:rPr lang="en-US" sz="1250" dirty="0">
-                <a:solidFill>
-                  <a:srgbClr val="A9C8DE"/>
-                </a:solidFill>
-                <a:latin typeface="Arial" pitchFamily="34" charset="0"/>
-                <a:ea typeface="Microsoft JhengHei"/>
-                <a:cs typeface="Microsoft JhengHei"/>
-                <a:ea typeface="Arial" pitchFamily="34" charset="-122"/>
-                <a:cs typeface="Arial" pitchFamily="34" charset="-120"/>
-              </a:rPr>
-              <a:t>一個進行中的案子（契約＋標單）</a:t>
-            </a:r>
-            <a:endParaRPr lang="en-US" sz="1250" dirty="0"/>
-          </a:p>
-        </p:txBody>
-      </p:sp>
-      <p:sp>
-        <p:nvSpPr>
-          <p:cNvPr id="12" name="Text 10"/>
-          <p:cNvSpPr/>
-          <p:nvPr/>
-        </p:nvSpPr>
-        <p:spPr>
-          <a:xfrm>
-            <a:off x="658368" y="4864608"/>
-            <a:ext cx="219456" cy="292608"/>
-          </a:xfrm>
-          <a:prstGeom prst="rect">
-            <a:avLst/>
-          </a:prstGeom>
-          <a:noFill/>
-          <a:ln/>
-        </p:spPr>
-        <p:txBody>
-          <a:bodyPr wrap="square" lIns="0" tIns="0" rIns="0" bIns="0" rtlCol="0" anchor="ctr"/>
-          <a:lstStyle/>
-          <a:p>
-            <a:pPr indent="0" marL="0">
-              <a:buNone/>
-            </a:pPr>
-            <a:r>
-              <a:rPr lang="en-US" sz="800" b="1" dirty="0">
-                <a:solidFill>
-                  <a:srgbClr val="7A8794"/>
-                </a:solidFill>
-                <a:latin typeface="Arial" pitchFamily="34" charset="0"/>
-                <a:ea typeface="Microsoft JhengHei"/>
-                <a:cs typeface="Microsoft JhengHei"/>
-                <a:ea typeface="Arial" pitchFamily="34" charset="-122"/>
-                <a:cs typeface="Arial" pitchFamily="34" charset="-120"/>
-              </a:rPr>
-              <a:t>—</a:t>
-            </a:r>
-            <a:endParaRPr lang="en-US" sz="800" dirty="0"/>
-          </a:p>
-        </p:txBody>
-      </p:sp>
-      <p:sp>
-        <p:nvSpPr>
-          <p:cNvPr id="13" name="Text 11"/>
-          <p:cNvSpPr/>
-          <p:nvPr/>
-        </p:nvSpPr>
-        <p:spPr>
-          <a:xfrm>
-            <a:off x="877824" y="4864608"/>
-            <a:ext cx="5000524" cy="292608"/>
-          </a:xfrm>
-          <a:prstGeom prst="rect">
-            <a:avLst/>
-          </a:prstGeom>
-          <a:noFill/>
-          <a:ln/>
-        </p:spPr>
-        <p:txBody>
-          <a:bodyPr wrap="square" lIns="0" tIns="0" rIns="0" bIns="0" rtlCol="0" anchor="ctr"/>
-          <a:lstStyle/>
-          <a:p>
-            <a:pPr indent="0" marL="0">
-              <a:buNone/>
-            </a:pPr>
-            <a:r>
-              <a:rPr lang="en-US" sz="1250" dirty="0">
-                <a:solidFill>
-                  <a:srgbClr val="A9C8DE"/>
-                </a:solidFill>
-                <a:latin typeface="Arial" pitchFamily="34" charset="0"/>
-                <a:ea typeface="Microsoft JhengHei"/>
-                <a:cs typeface="Microsoft JhengHei"/>
-                <a:ea typeface="Arial" pitchFamily="34" charset="-122"/>
-                <a:cs typeface="Arial" pitchFamily="34" charset="-120"/>
-              </a:rPr>
-              <a:t>廠商與監造各一位聯絡人</a:t>
-            </a:r>
-            <a:endParaRPr lang="en-US" sz="1250" dirty="0"/>
-          </a:p>
-        </p:txBody>
-      </p:sp>
-      <p:sp>
-        <p:nvSpPr>
-          <p:cNvPr id="14" name="Shape 12"/>
+              <a:t>聯絡：security@gov-agent.ai　·　gov-agent.ai</a:t>
+            </a:r>
+            <a:endParaRPr lang="en-US" sz="1200" dirty="0"/>
+          </a:p>
+        </p:txBody>
+      </p:sp>
+      <p:sp>
+        <p:nvSpPr>
+          <p:cNvPr id="9" name="Shape 7"/>
           <p:cNvSpPr/>
           <p:nvPr/>
         </p:nvSpPr>
@@ -27220,7 +28213,7 @@
       </p:sp>
       <p:sp>
         <p:nvSpPr>
-          <p:cNvPr id="15" name="Text 13"/>
+          <p:cNvPr id="10" name="Text 8"/>
           <p:cNvSpPr/>
           <p:nvPr/>
         </p:nvSpPr>
@@ -27253,7 +28246,7 @@
                 <a:ea typeface="Arial" pitchFamily="34" charset="-122"/>
                 <a:cs typeface="Arial" pitchFamily="34" charset="-120"/>
               </a:rPr>
-              <a:t>今天想請組長決定的三件事</a:t>
+              <a:t>若方便，只想請組長幫一件事</a:t>
             </a:r>
             <a:endParaRPr lang="en-US" sz="1600" dirty="0"/>
           </a:p>
@@ -27261,14 +28254,14 @@
       </p:sp>
       <p:sp>
         <p:nvSpPr>
-          <p:cNvPr id="16" name="Text 14"/>
-          <p:cNvSpPr/>
-          <p:nvPr/>
-        </p:nvSpPr>
-        <p:spPr>
-          <a:xfrm>
-            <a:off x="7059241" y="2048256"/>
-            <a:ext cx="274320" cy="274320"/>
+          <p:cNvPr id="11" name="Text 9"/>
+          <p:cNvSpPr/>
+          <p:nvPr/>
+        </p:nvSpPr>
+        <p:spPr>
+          <a:xfrm>
+            <a:off x="7059241" y="1883664"/>
+            <a:ext cx="4163190" cy="329184"/>
           </a:xfrm>
           <a:prstGeom prst="rect">
             <a:avLst/>
@@ -27284,7 +28277,7 @@
               <a:buNone/>
             </a:pPr>
             <a:r>
-              <a:rPr lang="en-US" sz="1300" b="1" dirty="0">
+              <a:rPr lang="en-US" sz="1900" b="1" dirty="0">
                 <a:solidFill>
                   <a:srgbClr val="E8630C"/>
                 </a:solidFill>
@@ -27294,63 +28287,22 @@
                 <a:ea typeface="Arial" pitchFamily="34" charset="-122"/>
                 <a:cs typeface="Arial" pitchFamily="34" charset="-120"/>
               </a:rPr>
-              <a:t>1</a:t>
-            </a:r>
-            <a:endParaRPr lang="en-US" sz="1300" dirty="0"/>
-          </a:p>
-        </p:txBody>
-      </p:sp>
-      <p:sp>
-        <p:nvSpPr>
-          <p:cNvPr id="17" name="Text 15"/>
-          <p:cNvSpPr/>
-          <p:nvPr/>
-        </p:nvSpPr>
-        <p:spPr>
-          <a:xfrm>
-            <a:off x="7388425" y="2048256"/>
-            <a:ext cx="3834006" cy="274320"/>
-          </a:xfrm>
-          <a:prstGeom prst="rect">
-            <a:avLst/>
-          </a:prstGeom>
-          <a:noFill/>
-          <a:ln/>
-        </p:spPr>
-        <p:txBody>
-          <a:bodyPr wrap="square" lIns="0" tIns="0" rIns="0" bIns="0" rtlCol="0" anchor="ctr"/>
-          <a:lstStyle/>
-          <a:p>
-            <a:pPr indent="0" marL="0">
-              <a:buNone/>
-            </a:pPr>
-            <a:r>
-              <a:rPr lang="en-US" sz="1400" b="1" dirty="0">
-                <a:solidFill>
-                  <a:srgbClr val="FFFFFF"/>
-                </a:solidFill>
-                <a:latin typeface="Arial" pitchFamily="34" charset="0"/>
-                <a:ea typeface="Microsoft JhengHei"/>
-                <a:cs typeface="Microsoft JhengHei"/>
-                <a:ea typeface="Arial" pitchFamily="34" charset="-122"/>
-                <a:cs typeface="Arial" pitchFamily="34" charset="-120"/>
-              </a:rPr>
-              <a:t>驗收時點</a:t>
-            </a:r>
-            <a:endParaRPr lang="en-US" sz="1400" dirty="0"/>
-          </a:p>
-        </p:txBody>
-      </p:sp>
-      <p:sp>
-        <p:nvSpPr>
-          <p:cNvPr id="18" name="Text 16"/>
-          <p:cNvSpPr/>
-          <p:nvPr/>
-        </p:nvSpPr>
-        <p:spPr>
-          <a:xfrm>
-            <a:off x="7388425" y="2340864"/>
-            <a:ext cx="3834006" cy="457200"/>
+              <a:t>引薦計網中心的窗口。</a:t>
+            </a:r>
+            <a:endParaRPr lang="en-US" sz="1900" dirty="0"/>
+          </a:p>
+        </p:txBody>
+      </p:sp>
+      <p:sp>
+        <p:nvSpPr>
+          <p:cNvPr id="12" name="Text 10"/>
+          <p:cNvSpPr/>
+          <p:nvPr/>
+        </p:nvSpPr>
+        <p:spPr>
+          <a:xfrm>
+            <a:off x="7059241" y="2304288"/>
+            <a:ext cx="4163190" cy="914400"/>
           </a:xfrm>
           <a:prstGeom prst="rect">
             <a:avLst/>
@@ -27364,11 +28316,134 @@
           <a:p>
             <a:pPr indent="0" marL="0">
               <a:lnSpc>
-                <a:spcPts val="1600"/>
+                <a:spcPts val="1700"/>
               </a:lnSpc>
               <a:buNone/>
             </a:pPr>
             <a:r>
+              <a:rPr lang="en-US" sz="1200" dirty="0">
+                <a:solidFill>
+                  <a:srgbClr val="A9C8DE"/>
+                </a:solidFill>
+                <a:latin typeface="Arial" pitchFamily="34" charset="0"/>
+                <a:ea typeface="Microsoft JhengHei"/>
+                <a:cs typeface="Microsoft JhengHei"/>
+                <a:ea typeface="Arial" pitchFamily="34" charset="-122"/>
+                <a:cs typeface="Arial" pitchFamily="34" charset="-120"/>
+              </a:rPr>
+              <a:t>不論最後用哪一種合作方式，資安這一關遲早要過。提前對過一次，之後不論走到哪一步都會順很多——而且這一步不需要貴組做任何決定。</a:t>
+            </a:r>
+            <a:endParaRPr lang="en-US" sz="1200" dirty="0"/>
+          </a:p>
+        </p:txBody>
+      </p:sp>
+      <p:sp>
+        <p:nvSpPr>
+          <p:cNvPr id="13" name="Text 11"/>
+          <p:cNvSpPr/>
+          <p:nvPr/>
+        </p:nvSpPr>
+        <p:spPr>
+          <a:xfrm>
+            <a:off x="7059241" y="3346704"/>
+            <a:ext cx="4163190" cy="274320"/>
+          </a:xfrm>
+          <a:prstGeom prst="rect">
+            <a:avLst/>
+          </a:prstGeom>
+          <a:noFill/>
+          <a:ln/>
+        </p:spPr>
+        <p:txBody>
+          <a:bodyPr wrap="square" lIns="0" tIns="0" rIns="0" bIns="0" rtlCol="0" anchor="ctr"/>
+          <a:lstStyle/>
+          <a:p>
+            <a:pPr indent="0" marL="0">
+              <a:buNone/>
+            </a:pPr>
+            <a:r>
+              <a:rPr lang="en-US" sz="1250" b="1" dirty="0">
+                <a:solidFill>
+                  <a:srgbClr val="FFFFFF"/>
+                </a:solidFill>
+                <a:latin typeface="Arial" pitchFamily="34" charset="0"/>
+                <a:ea typeface="Microsoft JhengHei"/>
+                <a:cs typeface="Microsoft JhengHei"/>
+                <a:ea typeface="Arial" pitchFamily="34" charset="-122"/>
+                <a:cs typeface="Arial" pitchFamily="34" charset="-120"/>
+              </a:rPr>
+              <a:t>其他兩件，不急：</a:t>
+            </a:r>
+            <a:endParaRPr lang="en-US" sz="1250" dirty="0"/>
+          </a:p>
+        </p:txBody>
+      </p:sp>
+      <p:sp>
+        <p:nvSpPr>
+          <p:cNvPr id="14" name="Text 12"/>
+          <p:cNvSpPr/>
+          <p:nvPr/>
+        </p:nvSpPr>
+        <p:spPr>
+          <a:xfrm>
+            <a:off x="7059241" y="3675888"/>
+            <a:ext cx="219456" cy="265176"/>
+          </a:xfrm>
+          <a:prstGeom prst="rect">
+            <a:avLst/>
+          </a:prstGeom>
+          <a:noFill/>
+          <a:ln/>
+        </p:spPr>
+        <p:txBody>
+          <a:bodyPr wrap="square" lIns="0" tIns="0" rIns="0" bIns="0" rtlCol="0" anchor="ctr"/>
+          <a:lstStyle/>
+          <a:p>
+            <a:pPr indent="0" marL="0">
+              <a:buNone/>
+            </a:pPr>
+            <a:r>
+              <a:rPr lang="en-US" sz="800" b="1" dirty="0">
+                <a:solidFill>
+                  <a:srgbClr val="7A8794"/>
+                </a:solidFill>
+                <a:latin typeface="Arial" pitchFamily="34" charset="0"/>
+                <a:ea typeface="Microsoft JhengHei"/>
+                <a:cs typeface="Microsoft JhengHei"/>
+                <a:ea typeface="Arial" pitchFamily="34" charset="-122"/>
+                <a:cs typeface="Arial" pitchFamily="34" charset="-120"/>
+              </a:rPr>
+              <a:t>—</a:t>
+            </a:r>
+            <a:endParaRPr lang="en-US" sz="800" dirty="0"/>
+          </a:p>
+        </p:txBody>
+      </p:sp>
+      <p:sp>
+        <p:nvSpPr>
+          <p:cNvPr id="15" name="Text 13"/>
+          <p:cNvSpPr/>
+          <p:nvPr/>
+        </p:nvSpPr>
+        <p:spPr>
+          <a:xfrm>
+            <a:off x="7278697" y="3675888"/>
+            <a:ext cx="3943734" cy="265176"/>
+          </a:xfrm>
+          <a:prstGeom prst="rect">
+            <a:avLst/>
+          </a:prstGeom>
+          <a:noFill/>
+          <a:ln/>
+        </p:spPr>
+        <p:txBody>
+          <a:bodyPr wrap="square" lIns="0" tIns="0" rIns="0" bIns="0" rtlCol="0" anchor="ctr"/>
+          <a:lstStyle/>
+          <a:p>
+            <a:pPr indent="0" marL="0">
+              <a:buNone/>
+            </a:pPr>
+            <a:r>
               <a:rPr lang="en-US" sz="1150" dirty="0">
                 <a:solidFill>
                   <a:srgbClr val="A9C8DE"/>
@@ -27379,7 +28454,7 @@
                 <a:ea typeface="Arial" pitchFamily="34" charset="-122"/>
                 <a:cs typeface="Arial" pitchFamily="34" charset="-120"/>
               </a:rPr>
-              <a:t>要用甲、乙、丙哪一個方案？（建議乙：開通驗收）</a:t>
+              <a:t>合作想從哪一格開始（P19）</a:t>
             </a:r>
             <a:endParaRPr lang="en-US" sz="1150" dirty="0"/>
           </a:p>
@@ -27387,14 +28462,14 @@
       </p:sp>
       <p:sp>
         <p:nvSpPr>
-          <p:cNvPr id="19" name="Text 17"/>
-          <p:cNvSpPr/>
-          <p:nvPr/>
-        </p:nvSpPr>
-        <p:spPr>
-          <a:xfrm>
-            <a:off x="7059241" y="2889504"/>
-            <a:ext cx="274320" cy="274320"/>
+          <p:cNvPr id="16" name="Text 14"/>
+          <p:cNvSpPr/>
+          <p:nvPr/>
+        </p:nvSpPr>
+        <p:spPr>
+          <a:xfrm>
+            <a:off x="7059241" y="3941064"/>
+            <a:ext cx="219456" cy="265176"/>
           </a:xfrm>
           <a:prstGeom prst="rect">
             <a:avLst/>
@@ -27410,32 +28485,32 @@
               <a:buNone/>
             </a:pPr>
             <a:r>
-              <a:rPr lang="en-US" sz="1300" b="1" dirty="0">
-                <a:solidFill>
-                  <a:srgbClr val="E8630C"/>
-                </a:solidFill>
-                <a:latin typeface="Arial" pitchFamily="34" charset="0"/>
-                <a:ea typeface="Microsoft JhengHei"/>
-                <a:cs typeface="Microsoft JhengHei"/>
-                <a:ea typeface="Arial" pitchFamily="34" charset="-122"/>
-                <a:cs typeface="Arial" pitchFamily="34" charset="-120"/>
-              </a:rPr>
-              <a:t>2</a:t>
-            </a:r>
-            <a:endParaRPr lang="en-US" sz="1300" dirty="0"/>
-          </a:p>
-        </p:txBody>
-      </p:sp>
-      <p:sp>
-        <p:nvSpPr>
-          <p:cNvPr id="20" name="Text 18"/>
-          <p:cNvSpPr/>
-          <p:nvPr/>
-        </p:nvSpPr>
-        <p:spPr>
-          <a:xfrm>
-            <a:off x="7388425" y="2889504"/>
-            <a:ext cx="3834006" cy="274320"/>
+              <a:rPr lang="en-US" sz="800" b="1" dirty="0">
+                <a:solidFill>
+                  <a:srgbClr val="7A8794"/>
+                </a:solidFill>
+                <a:latin typeface="Arial" pitchFamily="34" charset="0"/>
+                <a:ea typeface="Microsoft JhengHei"/>
+                <a:cs typeface="Microsoft JhengHei"/>
+                <a:ea typeface="Arial" pitchFamily="34" charset="-122"/>
+                <a:cs typeface="Arial" pitchFamily="34" charset="-120"/>
+              </a:rPr>
+              <a:t>—</a:t>
+            </a:r>
+            <a:endParaRPr lang="en-US" sz="800" dirty="0"/>
+          </a:p>
+        </p:txBody>
+      </p:sp>
+      <p:sp>
+        <p:nvSpPr>
+          <p:cNvPr id="17" name="Text 15"/>
+          <p:cNvSpPr/>
+          <p:nvPr/>
+        </p:nvSpPr>
+        <p:spPr>
+          <a:xfrm>
+            <a:off x="7278697" y="3941064"/>
+            <a:ext cx="3943734" cy="265176"/>
           </a:xfrm>
           <a:prstGeom prst="rect">
             <a:avLst/>
@@ -27451,50 +28526,6 @@
               <a:buNone/>
             </a:pPr>
             <a:r>
-              <a:rPr lang="en-US" sz="1400" b="1" dirty="0">
-                <a:solidFill>
-                  <a:srgbClr val="FFFFFF"/>
-                </a:solidFill>
-                <a:latin typeface="Arial" pitchFamily="34" charset="0"/>
-                <a:ea typeface="Microsoft JhengHei"/>
-                <a:cs typeface="Microsoft JhengHei"/>
-                <a:ea typeface="Arial" pitchFamily="34" charset="-122"/>
-                <a:cs typeface="Arial" pitchFamily="34" charset="-120"/>
-              </a:rPr>
-              <a:t>引薦計網中心</a:t>
-            </a:r>
-            <a:endParaRPr lang="en-US" sz="1400" dirty="0"/>
-          </a:p>
-        </p:txBody>
-      </p:sp>
-      <p:sp>
-        <p:nvSpPr>
-          <p:cNvPr id="21" name="Text 19"/>
-          <p:cNvSpPr/>
-          <p:nvPr/>
-        </p:nvSpPr>
-        <p:spPr>
-          <a:xfrm>
-            <a:off x="7388425" y="3182112"/>
-            <a:ext cx="3834006" cy="457200"/>
-          </a:xfrm>
-          <a:prstGeom prst="rect">
-            <a:avLst/>
-          </a:prstGeom>
-          <a:noFill/>
-          <a:ln/>
-        </p:spPr>
-        <p:txBody>
-          <a:bodyPr wrap="square" lIns="0" tIns="0" rIns="0" bIns="0" rtlCol="0" anchor="t"/>
-          <a:lstStyle/>
-          <a:p>
-            <a:pPr indent="0" marL="0">
-              <a:lnSpc>
-                <a:spcPts val="1600"/>
-              </a:lnSpc>
-              <a:buNone/>
-            </a:pPr>
-            <a:r>
               <a:rPr lang="en-US" sz="1150" dirty="0">
                 <a:solidFill>
                   <a:srgbClr val="A9C8DE"/>
@@ -27505,133 +28536,7 @@
                 <a:ea typeface="Arial" pitchFamily="34" charset="-122"/>
                 <a:cs typeface="Arial" pitchFamily="34" charset="-120"/>
               </a:rPr>
-              <a:t>送簽前先對一次資安要求，把退件風險降到最低。</a:t>
-            </a:r>
-            <a:endParaRPr lang="en-US" sz="1150" dirty="0"/>
-          </a:p>
-        </p:txBody>
-      </p:sp>
-      <p:sp>
-        <p:nvSpPr>
-          <p:cNvPr id="22" name="Text 20"/>
-          <p:cNvSpPr/>
-          <p:nvPr/>
-        </p:nvSpPr>
-        <p:spPr>
-          <a:xfrm>
-            <a:off x="7059241" y="3730752"/>
-            <a:ext cx="274320" cy="274320"/>
-          </a:xfrm>
-          <a:prstGeom prst="rect">
-            <a:avLst/>
-          </a:prstGeom>
-          <a:noFill/>
-          <a:ln/>
-        </p:spPr>
-        <p:txBody>
-          <a:bodyPr wrap="square" lIns="0" tIns="0" rIns="0" bIns="0" rtlCol="0" anchor="ctr"/>
-          <a:lstStyle/>
-          <a:p>
-            <a:pPr indent="0" marL="0">
-              <a:buNone/>
-            </a:pPr>
-            <a:r>
-              <a:rPr lang="en-US" sz="1300" b="1" dirty="0">
-                <a:solidFill>
-                  <a:srgbClr val="E8630C"/>
-                </a:solidFill>
-                <a:latin typeface="Arial" pitchFamily="34" charset="0"/>
-                <a:ea typeface="Microsoft JhengHei"/>
-                <a:cs typeface="Microsoft JhengHei"/>
-                <a:ea typeface="Arial" pitchFamily="34" charset="-122"/>
-                <a:cs typeface="Arial" pitchFamily="34" charset="-120"/>
-              </a:rPr>
-              <a:t>3</a:t>
-            </a:r>
-            <a:endParaRPr lang="en-US" sz="1300" dirty="0"/>
-          </a:p>
-        </p:txBody>
-      </p:sp>
-      <p:sp>
-        <p:nvSpPr>
-          <p:cNvPr id="23" name="Text 21"/>
-          <p:cNvSpPr/>
-          <p:nvPr/>
-        </p:nvSpPr>
-        <p:spPr>
-          <a:xfrm>
-            <a:off x="7388425" y="3730752"/>
-            <a:ext cx="3834006" cy="274320"/>
-          </a:xfrm>
-          <a:prstGeom prst="rect">
-            <a:avLst/>
-          </a:prstGeom>
-          <a:noFill/>
-          <a:ln/>
-        </p:spPr>
-        <p:txBody>
-          <a:bodyPr wrap="square" lIns="0" tIns="0" rIns="0" bIns="0" rtlCol="0" anchor="ctr"/>
-          <a:lstStyle/>
-          <a:p>
-            <a:pPr indent="0" marL="0">
-              <a:buNone/>
-            </a:pPr>
-            <a:r>
-              <a:rPr lang="en-US" sz="1400" b="1" dirty="0">
-                <a:solidFill>
-                  <a:srgbClr val="FFFFFF"/>
-                </a:solidFill>
-                <a:latin typeface="Arial" pitchFamily="34" charset="0"/>
-                <a:ea typeface="Microsoft JhengHei"/>
-                <a:cs typeface="Microsoft JhengHei"/>
-                <a:ea typeface="Arial" pitchFamily="34" charset="-122"/>
-                <a:cs typeface="Arial" pitchFamily="34" charset="-120"/>
-              </a:rPr>
-              <a:t>試辦標的</a:t>
-            </a:r>
-            <a:endParaRPr lang="en-US" sz="1400" dirty="0"/>
-          </a:p>
-        </p:txBody>
-      </p:sp>
-      <p:sp>
-        <p:nvSpPr>
-          <p:cNvPr id="24" name="Text 22"/>
-          <p:cNvSpPr/>
-          <p:nvPr/>
-        </p:nvSpPr>
-        <p:spPr>
-          <a:xfrm>
-            <a:off x="7388425" y="4023360"/>
-            <a:ext cx="3834006" cy="457200"/>
-          </a:xfrm>
-          <a:prstGeom prst="rect">
-            <a:avLst/>
-          </a:prstGeom>
-          <a:noFill/>
-          <a:ln/>
-        </p:spPr>
-        <p:txBody>
-          <a:bodyPr wrap="square" lIns="0" tIns="0" rIns="0" bIns="0" rtlCol="0" anchor="t"/>
-          <a:lstStyle/>
-          <a:p>
-            <a:pPr indent="0" marL="0">
-              <a:lnSpc>
-                <a:spcPts val="1600"/>
-              </a:lnSpc>
-              <a:buNone/>
-            </a:pPr>
-            <a:r>
-              <a:rPr lang="en-US" sz="1150" dirty="0">
-                <a:solidFill>
-                  <a:srgbClr val="A9C8DE"/>
-                </a:solidFill>
-                <a:latin typeface="Arial" pitchFamily="34" charset="0"/>
-                <a:ea typeface="Microsoft JhengHei"/>
-                <a:cs typeface="Microsoft JhengHei"/>
-                <a:ea typeface="Arial" pitchFamily="34" charset="-122"/>
-                <a:cs typeface="Arial" pitchFamily="34" charset="-120"/>
-              </a:rPr>
-              <a:t>哪一個在建工程案適合？契約與標單能否先給我。</a:t>
+              <a:t>若想看真實文件跑一次，需要一份契約與標單</a:t>
             </a:r>
             <a:endParaRPr lang="en-US" sz="1150" dirty="0"/>
           </a:p>
